--- a/lectures/week11/lecture1/slides/week10_lecture1.pptx
+++ b/lectures/week11/lecture1/slides/week10_lecture1.pptx
@@ -5,27 +5,24 @@
     <p:sldMasterId id="2147483670" r:id="rId1"/>
   </p:sldMasterIdLst>
   <p:notesMasterIdLst>
-    <p:notesMasterId r:id="rId20"/>
+    <p:notesMasterId r:id="rId17"/>
   </p:notesMasterIdLst>
   <p:sldIdLst>
     <p:sldId id="256" r:id="rId2"/>
     <p:sldId id="259" r:id="rId3"/>
-    <p:sldId id="415" r:id="rId4"/>
-    <p:sldId id="420" r:id="rId5"/>
-    <p:sldId id="421" r:id="rId6"/>
-    <p:sldId id="691" r:id="rId7"/>
-    <p:sldId id="699" r:id="rId8"/>
-    <p:sldId id="356" r:id="rId9"/>
-    <p:sldId id="411" r:id="rId10"/>
-    <p:sldId id="695" r:id="rId11"/>
-    <p:sldId id="693" r:id="rId12"/>
-    <p:sldId id="696" r:id="rId13"/>
-    <p:sldId id="412" r:id="rId14"/>
-    <p:sldId id="697" r:id="rId15"/>
-    <p:sldId id="698" r:id="rId16"/>
-    <p:sldId id="428" r:id="rId17"/>
-    <p:sldId id="429" r:id="rId18"/>
-    <p:sldId id="690" r:id="rId19"/>
+    <p:sldId id="691" r:id="rId4"/>
+    <p:sldId id="699" r:id="rId5"/>
+    <p:sldId id="356" r:id="rId6"/>
+    <p:sldId id="411" r:id="rId7"/>
+    <p:sldId id="695" r:id="rId8"/>
+    <p:sldId id="693" r:id="rId9"/>
+    <p:sldId id="696" r:id="rId10"/>
+    <p:sldId id="412" r:id="rId11"/>
+    <p:sldId id="697" r:id="rId12"/>
+    <p:sldId id="698" r:id="rId13"/>
+    <p:sldId id="428" r:id="rId14"/>
+    <p:sldId id="429" r:id="rId15"/>
+    <p:sldId id="690" r:id="rId16"/>
   </p:sldIdLst>
   <p:sldSz cx="12192000" cy="6858000"/>
   <p:notesSz cx="6858000" cy="9144000"/>
@@ -214,7 +211,7 @@
           <a:p>
             <a:fld id="{125D7D83-D401-9A49-861D-A02E2788C764}" type="datetimeFigureOut">
               <a:rPr lang="en-US" smtClean="0"/>
-              <a:t>3/6/2026</a:t>
+              <a:t>3/14/2026</a:t>
             </a:fld>
             <a:endParaRPr lang="en-US"/>
           </a:p>
@@ -547,7 +544,7 @@
           <a:p>
             <a:fld id="{C723D110-B33C-3E49-B5DC-7F1369944E63}" type="slidenum">
               <a:rPr lang="en-US" smtClean="0"/>
-              <a:t>4</a:t>
+              <a:t>7</a:t>
             </a:fld>
             <a:endParaRPr lang="en-US"/>
           </a:p>
@@ -556,7 +553,7 @@
     </p:spTree>
     <p:extLst>
       <p:ext uri="{BB962C8B-B14F-4D97-AF65-F5344CB8AC3E}">
-        <p14:creationId xmlns:p14="http://schemas.microsoft.com/office/powerpoint/2010/main" val="2259477974"/>
+        <p14:creationId xmlns:p14="http://schemas.microsoft.com/office/powerpoint/2010/main" val="478306496"/>
       </p:ext>
     </p:extLst>
   </p:cSld>
@@ -631,7 +628,7 @@
           <a:p>
             <a:fld id="{C723D110-B33C-3E49-B5DC-7F1369944E63}" type="slidenum">
               <a:rPr lang="en-US" smtClean="0"/>
-              <a:t>5</a:t>
+              <a:t>12</a:t>
             </a:fld>
             <a:endParaRPr lang="en-US"/>
           </a:p>
@@ -640,7 +637,7 @@
     </p:spTree>
     <p:extLst>
       <p:ext uri="{BB962C8B-B14F-4D97-AF65-F5344CB8AC3E}">
-        <p14:creationId xmlns:p14="http://schemas.microsoft.com/office/powerpoint/2010/main" val="2259477974"/>
+        <p14:creationId xmlns:p14="http://schemas.microsoft.com/office/powerpoint/2010/main" val="497596369"/>
       </p:ext>
     </p:extLst>
   </p:cSld>
@@ -715,175 +712,7 @@
           <a:p>
             <a:fld id="{C723D110-B33C-3E49-B5DC-7F1369944E63}" type="slidenum">
               <a:rPr lang="en-US" smtClean="0"/>
-              <a:t>10</a:t>
-            </a:fld>
-            <a:endParaRPr lang="en-US"/>
-          </a:p>
-        </p:txBody>
-      </p:sp>
-    </p:spTree>
-    <p:extLst>
-      <p:ext uri="{BB962C8B-B14F-4D97-AF65-F5344CB8AC3E}">
-        <p14:creationId xmlns:p14="http://schemas.microsoft.com/office/powerpoint/2010/main" val="478306496"/>
-      </p:ext>
-    </p:extLst>
-  </p:cSld>
-  <p:clrMapOvr>
-    <a:masterClrMapping/>
-  </p:clrMapOvr>
-</p:notes>
-</file>
-
-<file path=ppt/notesSlides/notesSlide4.xml><?xml version="1.0" encoding="utf-8"?>
-<p:notes xmlns:a="http://schemas.openxmlformats.org/drawingml/2006/main" xmlns:r="http://schemas.openxmlformats.org/officeDocument/2006/relationships" xmlns:p="http://schemas.openxmlformats.org/presentationml/2006/main">
-  <p:cSld>
-    <p:spTree>
-      <p:nvGrpSpPr>
-        <p:cNvPr id="1" name=""/>
-        <p:cNvGrpSpPr/>
-        <p:nvPr/>
-      </p:nvGrpSpPr>
-      <p:grpSpPr>
-        <a:xfrm>
-          <a:off x="0" y="0"/>
-          <a:ext cx="0" cy="0"/>
-          <a:chOff x="0" y="0"/>
-          <a:chExt cx="0" cy="0"/>
-        </a:xfrm>
-      </p:grpSpPr>
-      <p:sp>
-        <p:nvSpPr>
-          <p:cNvPr id="2" name="Slide Image Placeholder 1"/>
-          <p:cNvSpPr>
-            <a:spLocks noGrp="1" noRot="1" noChangeAspect="1"/>
-          </p:cNvSpPr>
-          <p:nvPr>
-            <p:ph type="sldImg"/>
-          </p:nvPr>
-        </p:nvSpPr>
-        <p:spPr/>
-      </p:sp>
-      <p:sp>
-        <p:nvSpPr>
-          <p:cNvPr id="3" name="Notes Placeholder 2"/>
-          <p:cNvSpPr>
-            <a:spLocks noGrp="1"/>
-          </p:cNvSpPr>
-          <p:nvPr>
-            <p:ph type="body" idx="1"/>
-          </p:nvPr>
-        </p:nvSpPr>
-        <p:spPr/>
-        <p:txBody>
-          <a:bodyPr/>
-          <a:lstStyle/>
-          <a:p>
-            <a:endParaRPr lang="en-US" dirty="0"/>
-          </a:p>
-        </p:txBody>
-      </p:sp>
-      <p:sp>
-        <p:nvSpPr>
-          <p:cNvPr id="4" name="Slide Number Placeholder 3"/>
-          <p:cNvSpPr>
-            <a:spLocks noGrp="1"/>
-          </p:cNvSpPr>
-          <p:nvPr>
-            <p:ph type="sldNum" sz="quarter" idx="5"/>
-          </p:nvPr>
-        </p:nvSpPr>
-        <p:spPr/>
-        <p:txBody>
-          <a:bodyPr/>
-          <a:lstStyle/>
-          <a:p>
-            <a:fld id="{C723D110-B33C-3E49-B5DC-7F1369944E63}" type="slidenum">
-              <a:rPr lang="en-US" smtClean="0"/>
-              <a:t>15</a:t>
-            </a:fld>
-            <a:endParaRPr lang="en-US"/>
-          </a:p>
-        </p:txBody>
-      </p:sp>
-    </p:spTree>
-    <p:extLst>
-      <p:ext uri="{BB962C8B-B14F-4D97-AF65-F5344CB8AC3E}">
-        <p14:creationId xmlns:p14="http://schemas.microsoft.com/office/powerpoint/2010/main" val="497596369"/>
-      </p:ext>
-    </p:extLst>
-  </p:cSld>
-  <p:clrMapOvr>
-    <a:masterClrMapping/>
-  </p:clrMapOvr>
-</p:notes>
-</file>
-
-<file path=ppt/notesSlides/notesSlide5.xml><?xml version="1.0" encoding="utf-8"?>
-<p:notes xmlns:a="http://schemas.openxmlformats.org/drawingml/2006/main" xmlns:r="http://schemas.openxmlformats.org/officeDocument/2006/relationships" xmlns:p="http://schemas.openxmlformats.org/presentationml/2006/main">
-  <p:cSld>
-    <p:spTree>
-      <p:nvGrpSpPr>
-        <p:cNvPr id="1" name=""/>
-        <p:cNvGrpSpPr/>
-        <p:nvPr/>
-      </p:nvGrpSpPr>
-      <p:grpSpPr>
-        <a:xfrm>
-          <a:off x="0" y="0"/>
-          <a:ext cx="0" cy="0"/>
-          <a:chOff x="0" y="0"/>
-          <a:chExt cx="0" cy="0"/>
-        </a:xfrm>
-      </p:grpSpPr>
-      <p:sp>
-        <p:nvSpPr>
-          <p:cNvPr id="2" name="Slide Image Placeholder 1"/>
-          <p:cNvSpPr>
-            <a:spLocks noGrp="1" noRot="1" noChangeAspect="1"/>
-          </p:cNvSpPr>
-          <p:nvPr>
-            <p:ph type="sldImg"/>
-          </p:nvPr>
-        </p:nvSpPr>
-        <p:spPr/>
-      </p:sp>
-      <p:sp>
-        <p:nvSpPr>
-          <p:cNvPr id="3" name="Notes Placeholder 2"/>
-          <p:cNvSpPr>
-            <a:spLocks noGrp="1"/>
-          </p:cNvSpPr>
-          <p:nvPr>
-            <p:ph type="body" idx="1"/>
-          </p:nvPr>
-        </p:nvSpPr>
-        <p:spPr/>
-        <p:txBody>
-          <a:bodyPr/>
-          <a:lstStyle/>
-          <a:p>
-            <a:endParaRPr lang="en-US" dirty="0"/>
-          </a:p>
-        </p:txBody>
-      </p:sp>
-      <p:sp>
-        <p:nvSpPr>
-          <p:cNvPr id="4" name="Slide Number Placeholder 3"/>
-          <p:cNvSpPr>
-            <a:spLocks noGrp="1"/>
-          </p:cNvSpPr>
-          <p:nvPr>
-            <p:ph type="sldNum" sz="quarter" idx="5"/>
-          </p:nvPr>
-        </p:nvSpPr>
-        <p:spPr/>
-        <p:txBody>
-          <a:bodyPr/>
-          <a:lstStyle/>
-          <a:p>
-            <a:fld id="{C723D110-B33C-3E49-B5DC-7F1369944E63}" type="slidenum">
-              <a:rPr lang="en-US" smtClean="0"/>
-              <a:t>17</a:t>
+              <a:t>14</a:t>
             </a:fld>
             <a:endParaRPr lang="en-US"/>
           </a:p>
@@ -3062,2910 +2891,6 @@
           <p:cNvPr id="2" name="Title 1">
             <a:extLst>
               <a:ext uri="{FF2B5EF4-FFF2-40B4-BE49-F238E27FC236}">
-                <a16:creationId xmlns:a16="http://schemas.microsoft.com/office/drawing/2014/main" id="{9FD3E942-D48A-CF4F-BAD4-22FE8605A580}"/>
-              </a:ext>
-            </a:extLst>
-          </p:cNvPr>
-          <p:cNvSpPr>
-            <a:spLocks noGrp="1"/>
-          </p:cNvSpPr>
-          <p:nvPr>
-            <p:ph type="title"/>
-          </p:nvPr>
-        </p:nvSpPr>
-        <p:spPr/>
-        <p:txBody>
-          <a:bodyPr>
-            <a:normAutofit fontScale="90000"/>
-          </a:bodyPr>
-          <a:lstStyle/>
-          <a:p>
-            <a:r>
-              <a:rPr lang="en-US" dirty="0"/>
-              <a:t>Let’s Code!</a:t>
-            </a:r>
-          </a:p>
-        </p:txBody>
-      </p:sp>
-      <p:sp>
-        <p:nvSpPr>
-          <p:cNvPr id="3" name="Content Placeholder 2">
-            <a:extLst>
-              <a:ext uri="{FF2B5EF4-FFF2-40B4-BE49-F238E27FC236}">
-                <a16:creationId xmlns:a16="http://schemas.microsoft.com/office/drawing/2014/main" id="{66A3DF1E-F240-BC41-B313-3625DDE1D979}"/>
-              </a:ext>
-            </a:extLst>
-          </p:cNvPr>
-          <p:cNvSpPr>
-            <a:spLocks noGrp="1"/>
-          </p:cNvSpPr>
-          <p:nvPr>
-            <p:ph idx="1"/>
-          </p:nvPr>
-        </p:nvSpPr>
-        <p:spPr>
-          <a:xfrm>
-            <a:off x="400050" y="1532292"/>
-            <a:ext cx="7025986" cy="4835479"/>
-          </a:xfrm>
-        </p:spPr>
-        <p:txBody>
-          <a:bodyPr>
-            <a:normAutofit/>
-          </a:bodyPr>
-          <a:lstStyle/>
-          <a:p>
-            <a:r>
-              <a:rPr lang="en-CA" dirty="0"/>
-              <a:t>Let’s look at how this works in Python!</a:t>
-            </a:r>
-          </a:p>
-          <a:p>
-            <a:pPr lvl="1"/>
-            <a:r>
-              <a:rPr lang="en-CA" dirty="0"/>
-              <a:t>Point Class Recap</a:t>
-            </a:r>
-          </a:p>
-          <a:p>
-            <a:pPr lvl="1"/>
-            <a:r>
-              <a:rPr lang="en-CA" dirty="0"/>
-              <a:t>Rectangle Class</a:t>
-            </a:r>
-          </a:p>
-          <a:p>
-            <a:endParaRPr lang="en-CA" dirty="0"/>
-          </a:p>
-        </p:txBody>
-      </p:sp>
-      <p:sp>
-        <p:nvSpPr>
-          <p:cNvPr id="4" name="Rectangle: Rounded Corners 5">
-            <a:extLst>
-              <a:ext uri="{FF2B5EF4-FFF2-40B4-BE49-F238E27FC236}">
-                <a16:creationId xmlns:a16="http://schemas.microsoft.com/office/drawing/2014/main" id="{9BD5FBCF-8C94-E44C-BBC9-C128207E6FA0}"/>
-              </a:ext>
-            </a:extLst>
-          </p:cNvPr>
-          <p:cNvSpPr/>
-          <p:nvPr/>
-        </p:nvSpPr>
-        <p:spPr>
-          <a:xfrm>
-            <a:off x="7664115" y="1949006"/>
-            <a:ext cx="3958389" cy="4418765"/>
-          </a:xfrm>
-          <a:prstGeom prst="roundRect">
-            <a:avLst/>
-          </a:prstGeom>
-          <a:noFill/>
-          <a:ln w="76200">
-            <a:solidFill>
-              <a:schemeClr val="accent2"/>
-            </a:solidFill>
-          </a:ln>
-        </p:spPr>
-        <p:style>
-          <a:lnRef idx="2">
-            <a:schemeClr val="accent1">
-              <a:shade val="50000"/>
-            </a:schemeClr>
-          </a:lnRef>
-          <a:fillRef idx="1">
-            <a:schemeClr val="accent1"/>
-          </a:fillRef>
-          <a:effectRef idx="0">
-            <a:schemeClr val="accent1"/>
-          </a:effectRef>
-          <a:fontRef idx="minor">
-            <a:schemeClr val="lt1"/>
-          </a:fontRef>
-        </p:style>
-        <p:txBody>
-          <a:bodyPr rtlCol="0" anchor="ctr"/>
-          <a:lstStyle/>
-          <a:p>
-            <a:r>
-              <a:rPr lang="en-US" sz="4400" b="1" dirty="0">
-                <a:solidFill>
-                  <a:srgbClr val="FFFFFF"/>
-                </a:solidFill>
-              </a:rPr>
-              <a:t>Open your notebook</a:t>
-            </a:r>
-          </a:p>
-          <a:p>
-            <a:endParaRPr lang="en-US" sz="4400" b="1" dirty="0">
-              <a:solidFill>
-                <a:srgbClr val="FFFFFF"/>
-              </a:solidFill>
-            </a:endParaRPr>
-          </a:p>
-          <a:p>
-            <a:r>
-              <a:rPr lang="en-US" sz="2800" b="1" dirty="0">
-                <a:solidFill>
-                  <a:srgbClr val="FFFFFF"/>
-                </a:solidFill>
-              </a:rPr>
-              <a:t>Click Link</a:t>
-            </a:r>
-            <a:r>
-              <a:rPr lang="en-US" sz="2800" b="1" dirty="0">
-                <a:solidFill>
-                  <a:schemeClr val="accent6"/>
-                </a:solidFill>
-              </a:rPr>
-              <a:t>:</a:t>
-            </a:r>
-          </a:p>
-          <a:p>
-            <a:r>
-              <a:rPr lang="en-US" sz="2800" b="1" dirty="0">
-                <a:solidFill>
-                  <a:schemeClr val="accent6"/>
-                </a:solidFill>
-              </a:rPr>
-              <a:t>1. Encapsulation</a:t>
-            </a:r>
-          </a:p>
-        </p:txBody>
-      </p:sp>
-      <p:pic>
-        <p:nvPicPr>
-          <p:cNvPr id="5" name="Picture 2" descr="Pretty layers of encapsulation : r/ProgrammerHumor">
-            <a:extLst>
-              <a:ext uri="{FF2B5EF4-FFF2-40B4-BE49-F238E27FC236}">
-                <a16:creationId xmlns:a16="http://schemas.microsoft.com/office/drawing/2014/main" id="{50471478-DAE1-3341-B655-F3D05BDDFAD7}"/>
-              </a:ext>
-            </a:extLst>
-          </p:cNvPr>
-          <p:cNvPicPr>
-            <a:picLocks noChangeAspect="1" noChangeArrowheads="1"/>
-          </p:cNvPicPr>
-          <p:nvPr/>
-        </p:nvPicPr>
-        <p:blipFill>
-          <a:blip r:embed="rId3">
-            <a:extLst>
-              <a:ext uri="{28A0092B-C50C-407E-A947-70E740481C1C}">
-                <a14:useLocalDpi xmlns:a14="http://schemas.microsoft.com/office/drawing/2010/main" val="0"/>
-              </a:ext>
-            </a:extLst>
-          </a:blip>
-          <a:srcRect/>
-          <a:stretch>
-            <a:fillRect/>
-          </a:stretch>
-        </p:blipFill>
-        <p:spPr bwMode="auto">
-          <a:xfrm>
-            <a:off x="1143001" y="3028181"/>
-            <a:ext cx="4786745" cy="3339590"/>
-          </a:xfrm>
-          <a:prstGeom prst="rect">
-            <a:avLst/>
-          </a:prstGeom>
-          <a:noFill/>
-          <a:extLst>
-            <a:ext uri="{909E8E84-426E-40DD-AFC4-6F175D3DCCD1}">
-              <a14:hiddenFill xmlns:a14="http://schemas.microsoft.com/office/drawing/2010/main">
-                <a:solidFill>
-                  <a:srgbClr val="FFFFFF"/>
-                </a:solidFill>
-              </a14:hiddenFill>
-            </a:ext>
-          </a:extLst>
-        </p:spPr>
-      </p:pic>
-    </p:spTree>
-    <p:extLst>
-      <p:ext uri="{BB962C8B-B14F-4D97-AF65-F5344CB8AC3E}">
-        <p14:creationId xmlns:p14="http://schemas.microsoft.com/office/powerpoint/2010/main" val="3744884758"/>
-      </p:ext>
-    </p:extLst>
-  </p:cSld>
-  <p:clrMapOvr>
-    <a:masterClrMapping/>
-  </p:clrMapOvr>
-</p:sld>
-</file>
-
-<file path=ppt/slides/slide11.xml><?xml version="1.0" encoding="utf-8"?>
-<p:sld xmlns:a="http://schemas.openxmlformats.org/drawingml/2006/main" xmlns:r="http://schemas.openxmlformats.org/officeDocument/2006/relationships" xmlns:p="http://schemas.openxmlformats.org/presentationml/2006/main">
-  <p:cSld>
-    <p:spTree>
-      <p:nvGrpSpPr>
-        <p:cNvPr id="1" name=""/>
-        <p:cNvGrpSpPr/>
-        <p:nvPr/>
-      </p:nvGrpSpPr>
-      <p:grpSpPr>
-        <a:xfrm>
-          <a:off x="0" y="0"/>
-          <a:ext cx="0" cy="0"/>
-          <a:chOff x="0" y="0"/>
-          <a:chExt cx="0" cy="0"/>
-        </a:xfrm>
-      </p:grpSpPr>
-      <p:sp>
-        <p:nvSpPr>
-          <p:cNvPr id="2" name="Title 1">
-            <a:extLst>
-              <a:ext uri="{FF2B5EF4-FFF2-40B4-BE49-F238E27FC236}">
-                <a16:creationId xmlns:a16="http://schemas.microsoft.com/office/drawing/2014/main" id="{277B8662-D2F9-454D-8182-0E3A3A7F69EC}"/>
-              </a:ext>
-            </a:extLst>
-          </p:cNvPr>
-          <p:cNvSpPr>
-            <a:spLocks noGrp="1"/>
-          </p:cNvSpPr>
-          <p:nvPr>
-            <p:ph type="title"/>
-          </p:nvPr>
-        </p:nvSpPr>
-        <p:spPr/>
-        <p:txBody>
-          <a:bodyPr>
-            <a:normAutofit fontScale="90000"/>
-          </a:bodyPr>
-          <a:lstStyle/>
-          <a:p>
-            <a:r>
-              <a:rPr lang="en-US" dirty="0"/>
-              <a:t>Printing Information</a:t>
-            </a:r>
-          </a:p>
-        </p:txBody>
-      </p:sp>
-      <p:sp>
-        <p:nvSpPr>
-          <p:cNvPr id="3" name="Content Placeholder 2">
-            <a:extLst>
-              <a:ext uri="{FF2B5EF4-FFF2-40B4-BE49-F238E27FC236}">
-                <a16:creationId xmlns:a16="http://schemas.microsoft.com/office/drawing/2014/main" id="{816DE886-4A89-AD42-9138-CE102F1D6C87}"/>
-              </a:ext>
-            </a:extLst>
-          </p:cNvPr>
-          <p:cNvSpPr>
-            <a:spLocks noGrp="1"/>
-          </p:cNvSpPr>
-          <p:nvPr>
-            <p:ph idx="1"/>
-          </p:nvPr>
-        </p:nvSpPr>
-        <p:spPr/>
-        <p:txBody>
-          <a:bodyPr/>
-          <a:lstStyle/>
-          <a:p>
-            <a:r>
-              <a:rPr lang="en-US" dirty="0"/>
-              <a:t>It would be nice to not have to write a print statement when we want to display attribute information:</a:t>
-            </a:r>
-          </a:p>
-          <a:p>
-            <a:endParaRPr lang="en-US" dirty="0"/>
-          </a:p>
-          <a:p>
-            <a:endParaRPr lang="en-US" dirty="0"/>
-          </a:p>
-          <a:p>
-            <a:r>
-              <a:rPr lang="en-US" dirty="0"/>
-              <a:t>Is there a better way to encapsulate this? How about a method?</a:t>
-            </a:r>
-          </a:p>
-        </p:txBody>
-      </p:sp>
-      <p:sp>
-        <p:nvSpPr>
-          <p:cNvPr id="4" name="object 5">
-            <a:extLst>
-              <a:ext uri="{FF2B5EF4-FFF2-40B4-BE49-F238E27FC236}">
-                <a16:creationId xmlns:a16="http://schemas.microsoft.com/office/drawing/2014/main" id="{DD78018B-EE42-7446-A316-AC67025A187A}"/>
-              </a:ext>
-            </a:extLst>
-          </p:cNvPr>
-          <p:cNvSpPr txBox="1"/>
-          <p:nvPr/>
-        </p:nvSpPr>
-        <p:spPr>
-          <a:xfrm>
-            <a:off x="4064635" y="2778242"/>
-            <a:ext cx="8127365" cy="3539430"/>
-          </a:xfrm>
-          <a:prstGeom prst="rect">
-            <a:avLst/>
-          </a:prstGeom>
-        </p:spPr>
-        <p:txBody>
-          <a:bodyPr vert="horz" wrap="square" lIns="0" tIns="0" rIns="0" bIns="0" rtlCol="0">
-            <a:spAutoFit/>
-          </a:bodyPr>
-          <a:lstStyle/>
-          <a:p>
-            <a:pPr marL="1765300" marR="0" lvl="0" indent="0" algn="l" defTabSz="914400" rtl="0" eaLnBrk="1" fontAlgn="auto" latinLnBrk="0" hangingPunct="1">
-              <a:lnSpc>
-                <a:spcPct val="100000"/>
-              </a:lnSpc>
-              <a:spcBef>
-                <a:spcPts val="1865"/>
-              </a:spcBef>
-              <a:spcAft>
-                <a:spcPts val="0"/>
-              </a:spcAft>
-              <a:buClrTx/>
-              <a:buSzTx/>
-              <a:buFontTx/>
-              <a:buNone/>
-              <a:tabLst/>
-              <a:defRPr/>
-            </a:pPr>
-            <a:r>
-              <a:rPr kumimoji="0" sz="2000" b="0" i="0" u="none" strike="noStrike" kern="1200" cap="none" spc="-5" normalizeH="0" baseline="0" noProof="0" dirty="0">
-                <a:ln>
-                  <a:noFill/>
-                </a:ln>
-                <a:solidFill>
-                  <a:srgbClr val="00FF00"/>
-                </a:solidFill>
-                <a:effectLst/>
-                <a:uLnTx/>
-                <a:uFillTx/>
-                <a:latin typeface="Courier New"/>
-                <a:ea typeface="+mn-ea"/>
-                <a:cs typeface="Courier New"/>
-              </a:rPr>
-              <a:t>&gt;&gt;</a:t>
-            </a:r>
-            <a:r>
-              <a:rPr kumimoji="0" sz="2000" b="0" i="0" u="none" strike="noStrike" kern="1200" cap="none" spc="0" normalizeH="0" baseline="0" noProof="0" dirty="0">
-                <a:ln>
-                  <a:noFill/>
-                </a:ln>
-                <a:solidFill>
-                  <a:srgbClr val="00FF00"/>
-                </a:solidFill>
-                <a:effectLst/>
-                <a:uLnTx/>
-                <a:uFillTx/>
-                <a:latin typeface="Courier New"/>
-                <a:ea typeface="+mn-ea"/>
-                <a:cs typeface="Courier New"/>
-              </a:rPr>
-              <a:t>&gt;</a:t>
-            </a:r>
-            <a:r>
-              <a:rPr kumimoji="0" sz="2000" b="0" i="0" u="none" strike="noStrike" kern="1200" cap="none" spc="-5" normalizeH="0" baseline="0" noProof="0" dirty="0">
-                <a:ln>
-                  <a:noFill/>
-                </a:ln>
-                <a:solidFill>
-                  <a:srgbClr val="00FF00"/>
-                </a:solidFill>
-                <a:effectLst/>
-                <a:uLnTx/>
-                <a:uFillTx/>
-                <a:latin typeface="Courier New"/>
-                <a:ea typeface="+mn-ea"/>
-                <a:cs typeface="Courier New"/>
-              </a:rPr>
-              <a:t> </a:t>
-            </a:r>
-            <a:r>
-              <a:rPr kumimoji="0" sz="2000" b="0" i="0" u="none" strike="noStrike" kern="1200" cap="none" spc="0" normalizeH="0" baseline="0" noProof="0" dirty="0">
-                <a:ln>
-                  <a:noFill/>
-                </a:ln>
-                <a:solidFill>
-                  <a:srgbClr val="00FF00"/>
-                </a:solidFill>
-                <a:effectLst/>
-                <a:uLnTx/>
-                <a:uFillTx/>
-                <a:latin typeface="Courier New"/>
-                <a:ea typeface="+mn-ea"/>
-                <a:cs typeface="Courier New"/>
-              </a:rPr>
-              <a:t>p</a:t>
-            </a:r>
-            <a:r>
-              <a:rPr kumimoji="0" sz="2000" b="0" i="0" u="none" strike="noStrike" kern="1200" cap="none" spc="-5" normalizeH="0" baseline="0" noProof="0" dirty="0">
-                <a:ln>
-                  <a:noFill/>
-                </a:ln>
-                <a:solidFill>
-                  <a:srgbClr val="00FF00"/>
-                </a:solidFill>
-                <a:effectLst/>
-                <a:uLnTx/>
-                <a:uFillTx/>
-                <a:latin typeface="Courier New"/>
-                <a:ea typeface="+mn-ea"/>
-                <a:cs typeface="Courier New"/>
-              </a:rPr>
-              <a:t> </a:t>
-            </a:r>
-            <a:r>
-              <a:rPr kumimoji="0" sz="2000" b="0" i="0" u="none" strike="noStrike" kern="1200" cap="none" spc="0" normalizeH="0" baseline="0" noProof="0" dirty="0">
-                <a:ln>
-                  <a:noFill/>
-                </a:ln>
-                <a:solidFill>
-                  <a:srgbClr val="00FF00"/>
-                </a:solidFill>
-                <a:effectLst/>
-                <a:uLnTx/>
-                <a:uFillTx/>
-                <a:latin typeface="Courier New"/>
-                <a:ea typeface="+mn-ea"/>
-                <a:cs typeface="Courier New"/>
-              </a:rPr>
-              <a:t>=</a:t>
-            </a:r>
-            <a:r>
-              <a:rPr kumimoji="0" sz="2000" b="0" i="0" u="none" strike="noStrike" kern="1200" cap="none" spc="-5" normalizeH="0" baseline="0" noProof="0" dirty="0">
-                <a:ln>
-                  <a:noFill/>
-                </a:ln>
-                <a:solidFill>
-                  <a:srgbClr val="00FF00"/>
-                </a:solidFill>
-                <a:effectLst/>
-                <a:uLnTx/>
-                <a:uFillTx/>
-                <a:latin typeface="Courier New"/>
-                <a:ea typeface="+mn-ea"/>
-                <a:cs typeface="Courier New"/>
-              </a:rPr>
-              <a:t> Point(3,</a:t>
-            </a:r>
-            <a:r>
-              <a:rPr kumimoji="0" sz="2000" b="0" i="0" u="none" strike="noStrike" kern="1200" cap="none" spc="0" normalizeH="0" baseline="0" noProof="0" dirty="0">
-                <a:ln>
-                  <a:noFill/>
-                </a:ln>
-                <a:solidFill>
-                  <a:srgbClr val="00FF00"/>
-                </a:solidFill>
-                <a:effectLst/>
-                <a:uLnTx/>
-                <a:uFillTx/>
-                <a:latin typeface="Courier New"/>
-                <a:ea typeface="+mn-ea"/>
-                <a:cs typeface="Courier New"/>
-              </a:rPr>
-              <a:t>4)</a:t>
-            </a:r>
-          </a:p>
-          <a:p>
-            <a:pPr marL="1765300" marR="0" lvl="0" indent="0" algn="l" defTabSz="914400" rtl="0" eaLnBrk="1" fontAlgn="auto" latinLnBrk="0" hangingPunct="1">
-              <a:lnSpc>
-                <a:spcPct val="100000"/>
-              </a:lnSpc>
-              <a:spcBef>
-                <a:spcPts val="0"/>
-              </a:spcBef>
-              <a:spcAft>
-                <a:spcPts val="0"/>
-              </a:spcAft>
-              <a:buClrTx/>
-              <a:buSzTx/>
-              <a:buFontTx/>
-              <a:buNone/>
-              <a:tabLst/>
-              <a:defRPr/>
-            </a:pPr>
-            <a:r>
-              <a:rPr kumimoji="0" sz="2000" b="0" i="0" u="none" strike="noStrike" kern="1200" cap="none" spc="-5" normalizeH="0" baseline="0" noProof="0" dirty="0">
-                <a:ln>
-                  <a:noFill/>
-                </a:ln>
-                <a:solidFill>
-                  <a:srgbClr val="00FF00"/>
-                </a:solidFill>
-                <a:effectLst/>
-                <a:uLnTx/>
-                <a:uFillTx/>
-                <a:latin typeface="Courier New"/>
-                <a:ea typeface="+mn-ea"/>
-                <a:cs typeface="Courier New"/>
-              </a:rPr>
-              <a:t>&gt;&gt;</a:t>
-            </a:r>
-            <a:r>
-              <a:rPr kumimoji="0" sz="2000" b="0" i="0" u="none" strike="noStrike" kern="1200" cap="none" spc="0" normalizeH="0" baseline="0" noProof="0" dirty="0">
-                <a:ln>
-                  <a:noFill/>
-                </a:ln>
-                <a:solidFill>
-                  <a:srgbClr val="00FF00"/>
-                </a:solidFill>
-                <a:effectLst/>
-                <a:uLnTx/>
-                <a:uFillTx/>
-                <a:latin typeface="Courier New"/>
-                <a:ea typeface="+mn-ea"/>
-                <a:cs typeface="Courier New"/>
-              </a:rPr>
-              <a:t>&gt;</a:t>
-            </a:r>
-            <a:r>
-              <a:rPr kumimoji="0" sz="2000" b="0" i="0" u="none" strike="noStrike" kern="1200" cap="none" spc="-5" normalizeH="0" baseline="0" noProof="0" dirty="0">
-                <a:ln>
-                  <a:noFill/>
-                </a:ln>
-                <a:solidFill>
-                  <a:srgbClr val="00FF00"/>
-                </a:solidFill>
-                <a:effectLst/>
-                <a:uLnTx/>
-                <a:uFillTx/>
-                <a:latin typeface="Courier New"/>
-                <a:ea typeface="+mn-ea"/>
-                <a:cs typeface="Courier New"/>
-              </a:rPr>
-              <a:t> print</a:t>
-            </a:r>
-            <a:r>
-              <a:rPr kumimoji="0" sz="2000" b="0" i="0" u="none" strike="noStrike" kern="1200" cap="none" spc="0" normalizeH="0" baseline="0" noProof="0" dirty="0">
-                <a:ln>
-                  <a:noFill/>
-                </a:ln>
-                <a:solidFill>
-                  <a:srgbClr val="00FF00"/>
-                </a:solidFill>
-                <a:effectLst/>
-                <a:uLnTx/>
-                <a:uFillTx/>
-                <a:latin typeface="Courier New"/>
-                <a:ea typeface="+mn-ea"/>
-                <a:cs typeface="Courier New"/>
-              </a:rPr>
-              <a:t>(</a:t>
-            </a:r>
-            <a:r>
-              <a:rPr lang="en-US" sz="2000" spc="-5" dirty="0">
-                <a:solidFill>
-                  <a:srgbClr val="00FF00"/>
-                </a:solidFill>
-                <a:latin typeface="Courier New"/>
-                <a:cs typeface="Courier New"/>
-              </a:rPr>
-              <a:t>p</a:t>
-            </a:r>
-            <a:r>
-              <a:rPr kumimoji="0" sz="2000" b="0" i="0" u="none" strike="noStrike" kern="1200" cap="none" spc="-5" normalizeH="0" baseline="0" noProof="0" dirty="0">
-                <a:ln>
-                  <a:noFill/>
-                </a:ln>
-                <a:solidFill>
-                  <a:srgbClr val="00FF00"/>
-                </a:solidFill>
-                <a:effectLst/>
-                <a:uLnTx/>
-                <a:uFillTx/>
-                <a:latin typeface="Courier New"/>
-                <a:ea typeface="+mn-ea"/>
-                <a:cs typeface="Courier New"/>
-              </a:rPr>
-              <a:t>.x</a:t>
-            </a:r>
-            <a:r>
-              <a:rPr kumimoji="0" sz="2000" b="0" i="0" u="none" strike="noStrike" kern="1200" cap="none" spc="0" normalizeH="0" baseline="0" noProof="0" dirty="0">
-                <a:ln>
-                  <a:noFill/>
-                </a:ln>
-                <a:solidFill>
-                  <a:srgbClr val="00FF00"/>
-                </a:solidFill>
-                <a:effectLst/>
-                <a:uLnTx/>
-                <a:uFillTx/>
-                <a:latin typeface="Courier New"/>
-                <a:ea typeface="+mn-ea"/>
-                <a:cs typeface="Courier New"/>
-              </a:rPr>
-              <a:t>,</a:t>
-            </a:r>
-            <a:r>
-              <a:rPr kumimoji="0" sz="2000" b="0" i="0" u="none" strike="noStrike" kern="1200" cap="none" spc="-5" normalizeH="0" baseline="0" noProof="0" dirty="0">
-                <a:ln>
-                  <a:noFill/>
-                </a:ln>
-                <a:solidFill>
-                  <a:srgbClr val="00FF00"/>
-                </a:solidFill>
-                <a:effectLst/>
-                <a:uLnTx/>
-                <a:uFillTx/>
-                <a:latin typeface="Courier New"/>
-                <a:ea typeface="+mn-ea"/>
-                <a:cs typeface="Courier New"/>
-              </a:rPr>
-              <a:t> </a:t>
-            </a:r>
-            <a:r>
-              <a:rPr kumimoji="0" lang="en-US" sz="2000" b="0" i="0" u="none" strike="noStrike" kern="1200" cap="none" spc="-5" normalizeH="0" baseline="0" noProof="0" dirty="0" err="1">
-                <a:ln>
-                  <a:noFill/>
-                </a:ln>
-                <a:solidFill>
-                  <a:srgbClr val="00FF00"/>
-                </a:solidFill>
-                <a:effectLst/>
-                <a:uLnTx/>
-                <a:uFillTx/>
-                <a:latin typeface="Courier New"/>
-                <a:ea typeface="+mn-ea"/>
-                <a:cs typeface="Courier New"/>
-              </a:rPr>
-              <a:t>p</a:t>
-            </a:r>
-            <a:r>
-              <a:rPr kumimoji="0" sz="2000" b="0" i="0" u="none" strike="noStrike" kern="1200" cap="none" spc="-5" normalizeH="0" baseline="0" noProof="0" dirty="0" err="1">
-                <a:ln>
-                  <a:noFill/>
-                </a:ln>
-                <a:solidFill>
-                  <a:srgbClr val="00FF00"/>
-                </a:solidFill>
-                <a:effectLst/>
-                <a:uLnTx/>
-                <a:uFillTx/>
-                <a:latin typeface="Courier New"/>
-                <a:ea typeface="+mn-ea"/>
-                <a:cs typeface="Courier New"/>
-              </a:rPr>
-              <a:t>.y</a:t>
-            </a:r>
-            <a:r>
-              <a:rPr kumimoji="0" sz="2000" b="0" i="0" u="none" strike="noStrike" kern="1200" cap="none" spc="0" normalizeH="0" baseline="0" noProof="0" dirty="0">
-                <a:ln>
-                  <a:noFill/>
-                </a:ln>
-                <a:solidFill>
-                  <a:srgbClr val="00FF00"/>
-                </a:solidFill>
-                <a:effectLst/>
-                <a:uLnTx/>
-                <a:uFillTx/>
-                <a:latin typeface="Courier New"/>
-                <a:ea typeface="+mn-ea"/>
-                <a:cs typeface="Courier New"/>
-              </a:rPr>
-              <a:t>)</a:t>
-            </a:r>
-          </a:p>
-          <a:p>
-            <a:pPr marL="1765300" marR="0" lvl="0" indent="0" algn="l" defTabSz="914400" rtl="0" eaLnBrk="1" fontAlgn="auto" latinLnBrk="0" hangingPunct="1">
-              <a:lnSpc>
-                <a:spcPct val="100000"/>
-              </a:lnSpc>
-              <a:spcBef>
-                <a:spcPts val="0"/>
-              </a:spcBef>
-              <a:spcAft>
-                <a:spcPts val="0"/>
-              </a:spcAft>
-              <a:buClrTx/>
-              <a:buSzTx/>
-              <a:buFontTx/>
-              <a:buNone/>
-              <a:tabLst/>
-              <a:defRPr/>
-            </a:pPr>
-            <a:r>
-              <a:rPr kumimoji="0" sz="2000" b="1" i="0" u="none" strike="noStrike" kern="1200" cap="none" spc="0" normalizeH="0" baseline="0" noProof="0" dirty="0">
-                <a:ln>
-                  <a:noFill/>
-                </a:ln>
-                <a:solidFill>
-                  <a:srgbClr val="00FF00"/>
-                </a:solidFill>
-                <a:effectLst/>
-                <a:uLnTx/>
-                <a:uFillTx/>
-                <a:latin typeface="Courier New"/>
-                <a:ea typeface="+mn-ea"/>
-                <a:cs typeface="Courier New"/>
-              </a:rPr>
-              <a:t>3</a:t>
-            </a:r>
-            <a:r>
-              <a:rPr kumimoji="0" sz="2000" b="1" i="0" u="none" strike="noStrike" kern="1200" cap="none" spc="-5" normalizeH="0" baseline="0" noProof="0" dirty="0">
-                <a:ln>
-                  <a:noFill/>
-                </a:ln>
-                <a:solidFill>
-                  <a:srgbClr val="00FF00"/>
-                </a:solidFill>
-                <a:effectLst/>
-                <a:uLnTx/>
-                <a:uFillTx/>
-                <a:latin typeface="Courier New"/>
-                <a:ea typeface="+mn-ea"/>
-                <a:cs typeface="Courier New"/>
-              </a:rPr>
-              <a:t> </a:t>
-            </a:r>
-            <a:r>
-              <a:rPr kumimoji="0" sz="2000" b="1" i="0" u="none" strike="noStrike" kern="1200" cap="none" spc="0" normalizeH="0" baseline="0" noProof="0" dirty="0">
-                <a:ln>
-                  <a:noFill/>
-                </a:ln>
-                <a:solidFill>
-                  <a:srgbClr val="00FF00"/>
-                </a:solidFill>
-                <a:effectLst/>
-                <a:uLnTx/>
-                <a:uFillTx/>
-                <a:latin typeface="Courier New"/>
-                <a:ea typeface="+mn-ea"/>
-                <a:cs typeface="Courier New"/>
-              </a:rPr>
-              <a:t>4</a:t>
-            </a:r>
-            <a:endParaRPr kumimoji="0" lang="en-US" sz="2000" b="1" i="0" u="none" strike="noStrike" kern="1200" cap="none" spc="0" normalizeH="0" baseline="0" noProof="0" dirty="0">
-              <a:ln>
-                <a:noFill/>
-              </a:ln>
-              <a:solidFill>
-                <a:srgbClr val="00FF00"/>
-              </a:solidFill>
-              <a:effectLst/>
-              <a:uLnTx/>
-              <a:uFillTx/>
-              <a:latin typeface="Courier New"/>
-              <a:ea typeface="+mn-ea"/>
-              <a:cs typeface="Courier New"/>
-            </a:endParaRPr>
-          </a:p>
-          <a:p>
-            <a:pPr marL="1765300" marR="0" lvl="0" indent="0" algn="l" defTabSz="914400" rtl="0" eaLnBrk="1" fontAlgn="auto" latinLnBrk="0" hangingPunct="1">
-              <a:lnSpc>
-                <a:spcPct val="100000"/>
-              </a:lnSpc>
-              <a:spcBef>
-                <a:spcPts val="0"/>
-              </a:spcBef>
-              <a:spcAft>
-                <a:spcPts val="0"/>
-              </a:spcAft>
-              <a:buClrTx/>
-              <a:buSzTx/>
-              <a:buFontTx/>
-              <a:buNone/>
-              <a:tabLst/>
-              <a:defRPr/>
-            </a:pPr>
-            <a:endParaRPr kumimoji="0" lang="en-US" sz="2000" b="0" i="0" u="none" strike="noStrike" kern="1200" cap="none" spc="0" normalizeH="0" baseline="0" noProof="0" dirty="0">
-              <a:ln>
-                <a:noFill/>
-              </a:ln>
-              <a:solidFill>
-                <a:srgbClr val="00FF00"/>
-              </a:solidFill>
-              <a:effectLst/>
-              <a:uLnTx/>
-              <a:uFillTx/>
-              <a:latin typeface="Courier New"/>
-              <a:ea typeface="+mn-ea"/>
-              <a:cs typeface="Courier New"/>
-            </a:endParaRPr>
-          </a:p>
-          <a:p>
-            <a:pPr marL="1765300" marR="0" lvl="0" indent="0" algn="l" defTabSz="914400" rtl="0" eaLnBrk="1" fontAlgn="auto" latinLnBrk="0" hangingPunct="1">
-              <a:lnSpc>
-                <a:spcPct val="100000"/>
-              </a:lnSpc>
-              <a:spcBef>
-                <a:spcPts val="0"/>
-              </a:spcBef>
-              <a:spcAft>
-                <a:spcPts val="0"/>
-              </a:spcAft>
-              <a:buClrTx/>
-              <a:buSzTx/>
-              <a:buFontTx/>
-              <a:buNone/>
-              <a:tabLst/>
-              <a:defRPr/>
-            </a:pPr>
-            <a:endParaRPr kumimoji="0" lang="en-US" sz="2000" b="0" i="0" u="none" strike="noStrike" kern="1200" cap="none" spc="0" normalizeH="0" baseline="0" noProof="0" dirty="0">
-              <a:ln>
-                <a:noFill/>
-              </a:ln>
-              <a:solidFill>
-                <a:srgbClr val="00FF00"/>
-              </a:solidFill>
-              <a:effectLst/>
-              <a:uLnTx/>
-              <a:uFillTx/>
-              <a:latin typeface="Courier New"/>
-              <a:ea typeface="+mn-ea"/>
-              <a:cs typeface="Courier New"/>
-            </a:endParaRPr>
-          </a:p>
-          <a:p>
-            <a:pPr marL="1765300" marR="0" lvl="0" indent="0" algn="l" defTabSz="914400" rtl="0" eaLnBrk="1" fontAlgn="auto" latinLnBrk="0" hangingPunct="1">
-              <a:lnSpc>
-                <a:spcPct val="100000"/>
-              </a:lnSpc>
-              <a:spcBef>
-                <a:spcPts val="1215"/>
-              </a:spcBef>
-              <a:spcAft>
-                <a:spcPts val="0"/>
-              </a:spcAft>
-              <a:buClrTx/>
-              <a:buSzTx/>
-              <a:buFontTx/>
-              <a:buNone/>
-              <a:tabLst/>
-              <a:defRPr/>
-            </a:pPr>
-            <a:r>
-              <a:rPr kumimoji="0" sz="2000" b="0" i="0" u="none" strike="noStrike" kern="1200" cap="none" spc="-5" normalizeH="0" baseline="0" noProof="0" dirty="0">
-                <a:ln>
-                  <a:noFill/>
-                </a:ln>
-                <a:solidFill>
-                  <a:srgbClr val="00FF00"/>
-                </a:solidFill>
-                <a:effectLst/>
-                <a:uLnTx/>
-                <a:uFillTx/>
-                <a:latin typeface="Courier New"/>
-                <a:ea typeface="+mn-ea"/>
-                <a:cs typeface="Courier New"/>
-              </a:rPr>
-              <a:t>&gt;&gt;</a:t>
-            </a:r>
-            <a:r>
-              <a:rPr kumimoji="0" sz="2000" b="0" i="0" u="none" strike="noStrike" kern="1200" cap="none" spc="0" normalizeH="0" baseline="0" noProof="0" dirty="0">
-                <a:ln>
-                  <a:noFill/>
-                </a:ln>
-                <a:solidFill>
-                  <a:srgbClr val="00FF00"/>
-                </a:solidFill>
-                <a:effectLst/>
-                <a:uLnTx/>
-                <a:uFillTx/>
-                <a:latin typeface="Courier New"/>
-                <a:ea typeface="+mn-ea"/>
-                <a:cs typeface="Courier New"/>
-              </a:rPr>
-              <a:t>&gt;</a:t>
-            </a:r>
-            <a:r>
-              <a:rPr kumimoji="0" sz="2000" b="0" i="0" u="none" strike="noStrike" kern="1200" cap="none" spc="-5" normalizeH="0" baseline="0" noProof="0" dirty="0">
-                <a:ln>
-                  <a:noFill/>
-                </a:ln>
-                <a:solidFill>
-                  <a:srgbClr val="00FF00"/>
-                </a:solidFill>
-                <a:effectLst/>
-                <a:uLnTx/>
-                <a:uFillTx/>
-                <a:latin typeface="Courier New"/>
-                <a:ea typeface="+mn-ea"/>
-                <a:cs typeface="Courier New"/>
-              </a:rPr>
-              <a:t> </a:t>
-            </a:r>
-            <a:r>
-              <a:rPr kumimoji="0" sz="2000" b="0" i="0" u="none" strike="noStrike" kern="1200" cap="none" spc="0" normalizeH="0" baseline="0" noProof="0" dirty="0">
-                <a:ln>
-                  <a:noFill/>
-                </a:ln>
-                <a:solidFill>
-                  <a:srgbClr val="00FF00"/>
-                </a:solidFill>
-                <a:effectLst/>
-                <a:uLnTx/>
-                <a:uFillTx/>
-                <a:latin typeface="Courier New"/>
-                <a:ea typeface="+mn-ea"/>
-                <a:cs typeface="Courier New"/>
-              </a:rPr>
-              <a:t>p</a:t>
-            </a:r>
-            <a:r>
-              <a:rPr kumimoji="0" sz="2000" b="0" i="0" u="none" strike="noStrike" kern="1200" cap="none" spc="-5" normalizeH="0" baseline="0" noProof="0" dirty="0">
-                <a:ln>
-                  <a:noFill/>
-                </a:ln>
-                <a:solidFill>
-                  <a:srgbClr val="00FF00"/>
-                </a:solidFill>
-                <a:effectLst/>
-                <a:uLnTx/>
-                <a:uFillTx/>
-                <a:latin typeface="Courier New"/>
-                <a:ea typeface="+mn-ea"/>
-                <a:cs typeface="Courier New"/>
-              </a:rPr>
-              <a:t> </a:t>
-            </a:r>
-            <a:r>
-              <a:rPr kumimoji="0" sz="2000" b="0" i="0" u="none" strike="noStrike" kern="1200" cap="none" spc="0" normalizeH="0" baseline="0" noProof="0" dirty="0">
-                <a:ln>
-                  <a:noFill/>
-                </a:ln>
-                <a:solidFill>
-                  <a:srgbClr val="00FF00"/>
-                </a:solidFill>
-                <a:effectLst/>
-                <a:uLnTx/>
-                <a:uFillTx/>
-                <a:latin typeface="Courier New"/>
-                <a:ea typeface="+mn-ea"/>
-                <a:cs typeface="Courier New"/>
-              </a:rPr>
-              <a:t>=</a:t>
-            </a:r>
-            <a:r>
-              <a:rPr kumimoji="0" sz="2000" b="0" i="0" u="none" strike="noStrike" kern="1200" cap="none" spc="-5" normalizeH="0" baseline="0" noProof="0" dirty="0">
-                <a:ln>
-                  <a:noFill/>
-                </a:ln>
-                <a:solidFill>
-                  <a:srgbClr val="00FF00"/>
-                </a:solidFill>
-                <a:effectLst/>
-                <a:uLnTx/>
-                <a:uFillTx/>
-                <a:latin typeface="Courier New"/>
-                <a:ea typeface="+mn-ea"/>
-                <a:cs typeface="Courier New"/>
-              </a:rPr>
-              <a:t> Point(3,</a:t>
-            </a:r>
-            <a:r>
-              <a:rPr kumimoji="0" sz="2000" b="0" i="0" u="none" strike="noStrike" kern="1200" cap="none" spc="0" normalizeH="0" baseline="0" noProof="0" dirty="0">
-                <a:ln>
-                  <a:noFill/>
-                </a:ln>
-                <a:solidFill>
-                  <a:srgbClr val="00FF00"/>
-                </a:solidFill>
-                <a:effectLst/>
-                <a:uLnTx/>
-                <a:uFillTx/>
-                <a:latin typeface="Courier New"/>
-                <a:ea typeface="+mn-ea"/>
-                <a:cs typeface="Courier New"/>
-              </a:rPr>
-              <a:t>4)</a:t>
-            </a:r>
-          </a:p>
-          <a:p>
-            <a:pPr marL="1765300" marR="0" lvl="0" indent="0" algn="l" defTabSz="914400" rtl="0" eaLnBrk="1" fontAlgn="auto" latinLnBrk="0" hangingPunct="1">
-              <a:lnSpc>
-                <a:spcPct val="100000"/>
-              </a:lnSpc>
-              <a:spcBef>
-                <a:spcPts val="0"/>
-              </a:spcBef>
-              <a:spcAft>
-                <a:spcPts val="0"/>
-              </a:spcAft>
-              <a:buClrTx/>
-              <a:buSzTx/>
-              <a:buFontTx/>
-              <a:buNone/>
-              <a:tabLst/>
-              <a:defRPr/>
-            </a:pPr>
-            <a:r>
-              <a:rPr kumimoji="0" sz="2000" b="0" i="0" u="none" strike="noStrike" kern="1200" cap="none" spc="-5" normalizeH="0" baseline="0" noProof="0" dirty="0">
-                <a:ln>
-                  <a:noFill/>
-                </a:ln>
-                <a:solidFill>
-                  <a:srgbClr val="00FF00"/>
-                </a:solidFill>
-                <a:effectLst/>
-                <a:uLnTx/>
-                <a:uFillTx/>
-                <a:latin typeface="Courier New"/>
-                <a:ea typeface="+mn-ea"/>
-                <a:cs typeface="Courier New"/>
-              </a:rPr>
-              <a:t>&gt;&gt;</a:t>
-            </a:r>
-            <a:r>
-              <a:rPr kumimoji="0" sz="2000" b="0" i="0" u="none" strike="noStrike" kern="1200" cap="none" spc="0" normalizeH="0" baseline="0" noProof="0" dirty="0">
-                <a:ln>
-                  <a:noFill/>
-                </a:ln>
-                <a:solidFill>
-                  <a:srgbClr val="00FF00"/>
-                </a:solidFill>
-                <a:effectLst/>
-                <a:uLnTx/>
-                <a:uFillTx/>
-                <a:latin typeface="Courier New"/>
-                <a:ea typeface="+mn-ea"/>
-                <a:cs typeface="Courier New"/>
-              </a:rPr>
-              <a:t>&gt; </a:t>
-            </a:r>
-            <a:r>
-              <a:rPr kumimoji="0" sz="2000" b="0" i="0" u="none" strike="noStrike" kern="1200" cap="none" spc="-5" normalizeH="0" baseline="0" noProof="0" dirty="0">
-                <a:ln>
-                  <a:noFill/>
-                </a:ln>
-                <a:solidFill>
-                  <a:srgbClr val="00FF00"/>
-                </a:solidFill>
-                <a:effectLst/>
-                <a:uLnTx/>
-                <a:uFillTx/>
-                <a:latin typeface="Courier New"/>
-                <a:ea typeface="+mn-ea"/>
-                <a:cs typeface="Courier New"/>
-              </a:rPr>
-              <a:t>p.</a:t>
-            </a:r>
-            <a:r>
-              <a:rPr lang="en-US" sz="2000" spc="-5" dirty="0" err="1">
-                <a:solidFill>
-                  <a:srgbClr val="00FF00"/>
-                </a:solidFill>
-                <a:latin typeface="Courier New"/>
-                <a:cs typeface="Courier New"/>
-              </a:rPr>
-              <a:t>to_string</a:t>
-            </a:r>
-            <a:r>
-              <a:rPr kumimoji="0" lang="en-US" sz="2000" b="0" i="0" u="none" strike="noStrike" kern="1200" cap="none" spc="-5" normalizeH="0" baseline="0" noProof="0" dirty="0">
-                <a:ln>
-                  <a:noFill/>
-                </a:ln>
-                <a:solidFill>
-                  <a:srgbClr val="00FF00"/>
-                </a:solidFill>
-                <a:effectLst/>
-                <a:uLnTx/>
-                <a:uFillTx/>
-                <a:latin typeface="Courier New"/>
-                <a:ea typeface="+mn-ea"/>
-                <a:cs typeface="Courier New"/>
-              </a:rPr>
-              <a:t>()</a:t>
-            </a:r>
-            <a:endParaRPr kumimoji="0" sz="2000" b="0" i="0" u="none" strike="noStrike" kern="1200" cap="none" spc="0" normalizeH="0" baseline="0" noProof="0" dirty="0">
-              <a:ln>
-                <a:noFill/>
-              </a:ln>
-              <a:solidFill>
-                <a:srgbClr val="00FF00"/>
-              </a:solidFill>
-              <a:effectLst/>
-              <a:uLnTx/>
-              <a:uFillTx/>
-              <a:latin typeface="Courier New"/>
-              <a:ea typeface="+mn-ea"/>
-              <a:cs typeface="Courier New"/>
-            </a:endParaRPr>
-          </a:p>
-          <a:p>
-            <a:pPr marL="1765300" marR="0" lvl="0" indent="0" algn="l" defTabSz="914400" rtl="0" eaLnBrk="1" fontAlgn="auto" latinLnBrk="0" hangingPunct="1">
-              <a:lnSpc>
-                <a:spcPct val="100000"/>
-              </a:lnSpc>
-              <a:spcBef>
-                <a:spcPts val="0"/>
-              </a:spcBef>
-              <a:spcAft>
-                <a:spcPts val="0"/>
-              </a:spcAft>
-              <a:buClrTx/>
-              <a:buSzTx/>
-              <a:buFontTx/>
-              <a:buNone/>
-              <a:tabLst/>
-              <a:defRPr/>
-            </a:pPr>
-            <a:r>
-              <a:rPr kumimoji="0" sz="2000" b="1" i="0" u="none" strike="noStrike" kern="1200" cap="none" spc="-5" normalizeH="0" baseline="0" noProof="0" dirty="0">
-                <a:ln>
-                  <a:noFill/>
-                </a:ln>
-                <a:solidFill>
-                  <a:srgbClr val="00FF00"/>
-                </a:solidFill>
-                <a:effectLst/>
-                <a:uLnTx/>
-                <a:uFillTx/>
-                <a:latin typeface="Courier New"/>
-                <a:ea typeface="+mn-ea"/>
-                <a:cs typeface="Courier New"/>
-              </a:rPr>
-              <a:t>'(3,4)'</a:t>
-            </a:r>
-            <a:endParaRPr kumimoji="0" sz="2000" b="0" i="0" u="none" strike="noStrike" kern="1200" cap="none" spc="0" normalizeH="0" baseline="0" noProof="0" dirty="0">
-              <a:ln>
-                <a:noFill/>
-              </a:ln>
-              <a:solidFill>
-                <a:srgbClr val="00FF00"/>
-              </a:solidFill>
-              <a:effectLst/>
-              <a:uLnTx/>
-              <a:uFillTx/>
-              <a:latin typeface="Courier New"/>
-              <a:ea typeface="+mn-ea"/>
-              <a:cs typeface="Courier New"/>
-            </a:endParaRPr>
-          </a:p>
-          <a:p>
-            <a:pPr marL="1765300" marR="0" lvl="0" indent="0" algn="l" defTabSz="914400" rtl="0" eaLnBrk="1" fontAlgn="auto" latinLnBrk="0" hangingPunct="1">
-              <a:lnSpc>
-                <a:spcPct val="100000"/>
-              </a:lnSpc>
-              <a:spcBef>
-                <a:spcPts val="0"/>
-              </a:spcBef>
-              <a:spcAft>
-                <a:spcPts val="0"/>
-              </a:spcAft>
-              <a:buClrTx/>
-              <a:buSzTx/>
-              <a:buFontTx/>
-              <a:buNone/>
-              <a:tabLst/>
-              <a:defRPr/>
-            </a:pPr>
-            <a:r>
-              <a:rPr kumimoji="0" sz="2000" b="0" i="0" u="none" strike="noStrike" kern="1200" cap="none" spc="-5" normalizeH="0" baseline="0" noProof="0" dirty="0">
-                <a:ln>
-                  <a:noFill/>
-                </a:ln>
-                <a:solidFill>
-                  <a:srgbClr val="00FF00"/>
-                </a:solidFill>
-                <a:effectLst/>
-                <a:uLnTx/>
-                <a:uFillTx/>
-                <a:latin typeface="Courier New"/>
-                <a:ea typeface="+mn-ea"/>
-                <a:cs typeface="Courier New"/>
-              </a:rPr>
-              <a:t>&gt;&gt;</a:t>
-            </a:r>
-            <a:r>
-              <a:rPr kumimoji="0" sz="2000" b="0" i="0" u="none" strike="noStrike" kern="1200" cap="none" spc="0" normalizeH="0" baseline="0" noProof="0" dirty="0">
-                <a:ln>
-                  <a:noFill/>
-                </a:ln>
-                <a:solidFill>
-                  <a:srgbClr val="00FF00"/>
-                </a:solidFill>
-                <a:effectLst/>
-                <a:uLnTx/>
-                <a:uFillTx/>
-                <a:latin typeface="Courier New"/>
-                <a:ea typeface="+mn-ea"/>
-                <a:cs typeface="Courier New"/>
-              </a:rPr>
-              <a:t>&gt;</a:t>
-            </a:r>
-            <a:r>
-              <a:rPr kumimoji="0" sz="2000" b="0" i="0" u="none" strike="noStrike" kern="1200" cap="none" spc="-5" normalizeH="0" baseline="0" noProof="0" dirty="0">
-                <a:ln>
-                  <a:noFill/>
-                </a:ln>
-                <a:solidFill>
-                  <a:srgbClr val="00FF00"/>
-                </a:solidFill>
-                <a:effectLst/>
-                <a:uLnTx/>
-                <a:uFillTx/>
-                <a:latin typeface="Courier New"/>
-                <a:ea typeface="+mn-ea"/>
-                <a:cs typeface="Courier New"/>
-              </a:rPr>
-              <a:t> </a:t>
-            </a:r>
-            <a:r>
-              <a:rPr kumimoji="0" sz="2000" b="0" i="0" u="none" strike="noStrike" kern="1200" cap="none" spc="0" normalizeH="0" baseline="0" noProof="0" dirty="0">
-                <a:ln>
-                  <a:noFill/>
-                </a:ln>
-                <a:solidFill>
-                  <a:srgbClr val="00FF00"/>
-                </a:solidFill>
-                <a:effectLst/>
-                <a:uLnTx/>
-                <a:uFillTx/>
-                <a:latin typeface="Courier New"/>
-                <a:ea typeface="+mn-ea"/>
-                <a:cs typeface="Courier New"/>
-              </a:rPr>
-              <a:t>r =</a:t>
-            </a:r>
-            <a:r>
-              <a:rPr kumimoji="0" sz="2000" b="0" i="0" u="none" strike="noStrike" kern="1200" cap="none" spc="-5" normalizeH="0" baseline="0" noProof="0" dirty="0">
-                <a:ln>
-                  <a:noFill/>
-                </a:ln>
-                <a:solidFill>
-                  <a:srgbClr val="00FF00"/>
-                </a:solidFill>
-                <a:effectLst/>
-                <a:uLnTx/>
-                <a:uFillTx/>
-                <a:latin typeface="Courier New"/>
-                <a:ea typeface="+mn-ea"/>
-                <a:cs typeface="Courier New"/>
-              </a:rPr>
-              <a:t> p.halfway(Point(5,12))</a:t>
-            </a:r>
-            <a:endParaRPr kumimoji="0" sz="2000" b="0" i="0" u="none" strike="noStrike" kern="1200" cap="none" spc="0" normalizeH="0" baseline="0" noProof="0" dirty="0">
-              <a:ln>
-                <a:noFill/>
-              </a:ln>
-              <a:solidFill>
-                <a:srgbClr val="00FF00"/>
-              </a:solidFill>
-              <a:effectLst/>
-              <a:uLnTx/>
-              <a:uFillTx/>
-              <a:latin typeface="Courier New"/>
-              <a:ea typeface="+mn-ea"/>
-              <a:cs typeface="Courier New"/>
-            </a:endParaRPr>
-          </a:p>
-          <a:p>
-            <a:pPr marL="1765300" marR="0" lvl="0" indent="0" algn="l" defTabSz="914400" rtl="0" eaLnBrk="1" fontAlgn="auto" latinLnBrk="0" hangingPunct="1">
-              <a:lnSpc>
-                <a:spcPct val="100000"/>
-              </a:lnSpc>
-              <a:spcBef>
-                <a:spcPts val="0"/>
-              </a:spcBef>
-              <a:spcAft>
-                <a:spcPts val="0"/>
-              </a:spcAft>
-              <a:buClrTx/>
-              <a:buSzTx/>
-              <a:buFontTx/>
-              <a:buNone/>
-              <a:tabLst/>
-              <a:defRPr/>
-            </a:pPr>
-            <a:r>
-              <a:rPr kumimoji="0" sz="2000" b="0" i="0" u="none" strike="noStrike" kern="1200" cap="none" spc="-5" normalizeH="0" baseline="0" noProof="0" dirty="0">
-                <a:ln>
-                  <a:noFill/>
-                </a:ln>
-                <a:solidFill>
-                  <a:srgbClr val="00FF00"/>
-                </a:solidFill>
-                <a:effectLst/>
-                <a:uLnTx/>
-                <a:uFillTx/>
-                <a:latin typeface="Courier New"/>
-                <a:ea typeface="+mn-ea"/>
-                <a:cs typeface="Courier New"/>
-              </a:rPr>
-              <a:t>&gt;&gt;</a:t>
-            </a:r>
-            <a:r>
-              <a:rPr kumimoji="0" sz="2000" b="0" i="0" u="none" strike="noStrike" kern="1200" cap="none" spc="0" normalizeH="0" baseline="0" noProof="0" dirty="0">
-                <a:ln>
-                  <a:noFill/>
-                </a:ln>
-                <a:solidFill>
-                  <a:srgbClr val="00FF00"/>
-                </a:solidFill>
-                <a:effectLst/>
-                <a:uLnTx/>
-                <a:uFillTx/>
-                <a:latin typeface="Courier New"/>
-                <a:ea typeface="+mn-ea"/>
-                <a:cs typeface="Courier New"/>
-              </a:rPr>
-              <a:t>&gt; </a:t>
-            </a:r>
-            <a:r>
-              <a:rPr kumimoji="0" sz="2000" b="0" i="0" u="none" strike="noStrike" kern="1200" cap="none" spc="-5" normalizeH="0" baseline="0" noProof="0" dirty="0">
-                <a:ln>
-                  <a:noFill/>
-                </a:ln>
-                <a:solidFill>
-                  <a:srgbClr val="00FF00"/>
-                </a:solidFill>
-                <a:effectLst/>
-                <a:uLnTx/>
-                <a:uFillTx/>
-                <a:latin typeface="Courier New"/>
-                <a:ea typeface="+mn-ea"/>
-                <a:cs typeface="Courier New"/>
-              </a:rPr>
-              <a:t>r.</a:t>
-            </a:r>
-            <a:r>
-              <a:rPr lang="en-US" sz="2000" spc="-5" dirty="0" err="1">
-                <a:solidFill>
-                  <a:srgbClr val="00FF00"/>
-                </a:solidFill>
-                <a:latin typeface="Courier New"/>
-                <a:cs typeface="Courier New"/>
-              </a:rPr>
-              <a:t>to_string</a:t>
-            </a:r>
-            <a:r>
-              <a:rPr lang="en-US" sz="2000" spc="-5" dirty="0">
-                <a:solidFill>
-                  <a:srgbClr val="00FF00"/>
-                </a:solidFill>
-                <a:latin typeface="Courier New"/>
-                <a:cs typeface="Courier New"/>
-              </a:rPr>
-              <a:t>()</a:t>
-            </a:r>
-            <a:endParaRPr kumimoji="0" sz="2000" b="0" i="0" u="none" strike="noStrike" kern="1200" cap="none" spc="0" normalizeH="0" baseline="0" noProof="0" dirty="0">
-              <a:ln>
-                <a:noFill/>
-              </a:ln>
-              <a:solidFill>
-                <a:srgbClr val="00FF00"/>
-              </a:solidFill>
-              <a:effectLst/>
-              <a:uLnTx/>
-              <a:uFillTx/>
-              <a:latin typeface="Courier New"/>
-              <a:ea typeface="+mn-ea"/>
-              <a:cs typeface="Courier New"/>
-            </a:endParaRPr>
-          </a:p>
-          <a:p>
-            <a:pPr marL="1765300" marR="0" lvl="0" indent="0" algn="l" defTabSz="914400" rtl="0" eaLnBrk="1" fontAlgn="auto" latinLnBrk="0" hangingPunct="1">
-              <a:lnSpc>
-                <a:spcPct val="100000"/>
-              </a:lnSpc>
-              <a:spcBef>
-                <a:spcPts val="0"/>
-              </a:spcBef>
-              <a:spcAft>
-                <a:spcPts val="0"/>
-              </a:spcAft>
-              <a:buClrTx/>
-              <a:buSzTx/>
-              <a:buFontTx/>
-              <a:buNone/>
-              <a:tabLst/>
-              <a:defRPr/>
-            </a:pPr>
-            <a:r>
-              <a:rPr kumimoji="0" sz="2000" b="1" i="0" u="none" strike="noStrike" kern="1200" cap="none" spc="-5" normalizeH="0" baseline="0" noProof="0" dirty="0">
-                <a:ln>
-                  <a:noFill/>
-                </a:ln>
-                <a:solidFill>
-                  <a:srgbClr val="00FF00"/>
-                </a:solidFill>
-                <a:effectLst/>
-                <a:uLnTx/>
-                <a:uFillTx/>
-                <a:latin typeface="Courier New"/>
-                <a:ea typeface="+mn-ea"/>
-                <a:cs typeface="Courier New"/>
-              </a:rPr>
-              <a:t>'(4,8)'</a:t>
-            </a:r>
-            <a:endParaRPr kumimoji="0" sz="2000" b="0" i="0" u="none" strike="noStrike" kern="1200" cap="none" spc="0" normalizeH="0" baseline="0" noProof="0" dirty="0">
-              <a:ln>
-                <a:noFill/>
-              </a:ln>
-              <a:solidFill>
-                <a:srgbClr val="00FF00"/>
-              </a:solidFill>
-              <a:effectLst/>
-              <a:uLnTx/>
-              <a:uFillTx/>
-              <a:latin typeface="Courier New"/>
-              <a:ea typeface="+mn-ea"/>
-              <a:cs typeface="Courier New"/>
-            </a:endParaRPr>
-          </a:p>
-        </p:txBody>
-      </p:sp>
-      <p:sp>
-        <p:nvSpPr>
-          <p:cNvPr id="6" name="TextBox 5">
-            <a:extLst>
-              <a:ext uri="{FF2B5EF4-FFF2-40B4-BE49-F238E27FC236}">
-                <a16:creationId xmlns:a16="http://schemas.microsoft.com/office/drawing/2014/main" id="{120E1DC6-BC1E-1849-9678-E19549819074}"/>
-              </a:ext>
-            </a:extLst>
-          </p:cNvPr>
-          <p:cNvSpPr txBox="1"/>
-          <p:nvPr/>
-        </p:nvSpPr>
-        <p:spPr>
-          <a:xfrm>
-            <a:off x="-1407320" y="2778242"/>
-            <a:ext cx="7503320" cy="923330"/>
-          </a:xfrm>
-          <a:prstGeom prst="rect">
-            <a:avLst/>
-          </a:prstGeom>
-          <a:noFill/>
-        </p:spPr>
-        <p:txBody>
-          <a:bodyPr wrap="square">
-            <a:spAutoFit/>
-          </a:bodyPr>
-          <a:lstStyle/>
-          <a:p>
-            <a:pPr marL="1765300" marR="0" lvl="0" indent="0" algn="l" defTabSz="914400" rtl="0" eaLnBrk="1" fontAlgn="auto" latinLnBrk="0" hangingPunct="1">
-              <a:lnSpc>
-                <a:spcPct val="100000"/>
-              </a:lnSpc>
-              <a:spcBef>
-                <a:spcPts val="1865"/>
-              </a:spcBef>
-              <a:spcAft>
-                <a:spcPts val="0"/>
-              </a:spcAft>
-              <a:buClrTx/>
-              <a:buSzTx/>
-              <a:buFontTx/>
-              <a:buNone/>
-              <a:tabLst/>
-              <a:defRPr/>
-            </a:pPr>
-            <a:r>
-              <a:rPr kumimoji="0" lang="en-CA" sz="1800" b="0" i="0" u="none" strike="noStrike" kern="1200" cap="none" spc="-5" normalizeH="0" baseline="0" noProof="0" dirty="0">
-                <a:ln>
-                  <a:noFill/>
-                </a:ln>
-                <a:solidFill>
-                  <a:srgbClr val="00FF00"/>
-                </a:solidFill>
-                <a:effectLst/>
-                <a:uLnTx/>
-                <a:uFillTx/>
-                <a:latin typeface="Courier New"/>
-                <a:ea typeface="+mn-ea"/>
-                <a:cs typeface="Courier New"/>
-              </a:rPr>
-              <a:t>&gt;&gt;</a:t>
-            </a:r>
-            <a:r>
-              <a:rPr kumimoji="0" lang="en-CA" sz="1800" b="0" i="0" u="none" strike="noStrike" kern="1200" cap="none" spc="0" normalizeH="0" baseline="0" noProof="0" dirty="0">
-                <a:ln>
-                  <a:noFill/>
-                </a:ln>
-                <a:solidFill>
-                  <a:srgbClr val="00FF00"/>
-                </a:solidFill>
-                <a:effectLst/>
-                <a:uLnTx/>
-                <a:uFillTx/>
-                <a:latin typeface="Courier New"/>
-                <a:ea typeface="+mn-ea"/>
-                <a:cs typeface="Courier New"/>
-              </a:rPr>
-              <a:t>&gt;</a:t>
-            </a:r>
-            <a:r>
-              <a:rPr kumimoji="0" lang="en-CA" sz="1800" b="0" i="0" u="none" strike="noStrike" kern="1200" cap="none" spc="-5" normalizeH="0" baseline="0" noProof="0" dirty="0">
-                <a:ln>
-                  <a:noFill/>
-                </a:ln>
-                <a:solidFill>
-                  <a:srgbClr val="00FF00"/>
-                </a:solidFill>
-                <a:effectLst/>
-                <a:uLnTx/>
-                <a:uFillTx/>
-                <a:latin typeface="Courier New"/>
-                <a:ea typeface="+mn-ea"/>
-                <a:cs typeface="Courier New"/>
-              </a:rPr>
-              <a:t> </a:t>
-            </a:r>
-            <a:r>
-              <a:rPr kumimoji="0" lang="en-CA" sz="1800" b="0" i="0" u="none" strike="noStrike" kern="1200" cap="none" spc="0" normalizeH="0" baseline="0" noProof="0" dirty="0">
-                <a:ln>
-                  <a:noFill/>
-                </a:ln>
-                <a:solidFill>
-                  <a:srgbClr val="00FF00"/>
-                </a:solidFill>
-                <a:effectLst/>
-                <a:uLnTx/>
-                <a:uFillTx/>
-                <a:latin typeface="Courier New"/>
-                <a:ea typeface="+mn-ea"/>
-                <a:cs typeface="Courier New"/>
-              </a:rPr>
-              <a:t>p</a:t>
-            </a:r>
-            <a:r>
-              <a:rPr kumimoji="0" lang="en-CA" sz="1800" b="0" i="0" u="none" strike="noStrike" kern="1200" cap="none" spc="-5" normalizeH="0" baseline="0" noProof="0" dirty="0">
-                <a:ln>
-                  <a:noFill/>
-                </a:ln>
-                <a:solidFill>
-                  <a:srgbClr val="00FF00"/>
-                </a:solidFill>
-                <a:effectLst/>
-                <a:uLnTx/>
-                <a:uFillTx/>
-                <a:latin typeface="Courier New"/>
-                <a:ea typeface="+mn-ea"/>
-                <a:cs typeface="Courier New"/>
-              </a:rPr>
-              <a:t> </a:t>
-            </a:r>
-            <a:r>
-              <a:rPr kumimoji="0" lang="en-CA" sz="1800" b="0" i="0" u="none" strike="noStrike" kern="1200" cap="none" spc="0" normalizeH="0" baseline="0" noProof="0" dirty="0">
-                <a:ln>
-                  <a:noFill/>
-                </a:ln>
-                <a:solidFill>
-                  <a:srgbClr val="00FF00"/>
-                </a:solidFill>
-                <a:effectLst/>
-                <a:uLnTx/>
-                <a:uFillTx/>
-                <a:latin typeface="Courier New"/>
-                <a:ea typeface="+mn-ea"/>
-                <a:cs typeface="Courier New"/>
-              </a:rPr>
-              <a:t>=</a:t>
-            </a:r>
-            <a:r>
-              <a:rPr kumimoji="0" lang="en-CA" sz="1800" b="0" i="0" u="none" strike="noStrike" kern="1200" cap="none" spc="-5" normalizeH="0" baseline="0" noProof="0" dirty="0">
-                <a:ln>
-                  <a:noFill/>
-                </a:ln>
-                <a:solidFill>
-                  <a:srgbClr val="00FF00"/>
-                </a:solidFill>
-                <a:effectLst/>
-                <a:uLnTx/>
-                <a:uFillTx/>
-                <a:latin typeface="Courier New"/>
-                <a:ea typeface="+mn-ea"/>
-                <a:cs typeface="Courier New"/>
-              </a:rPr>
-              <a:t> Point(3,</a:t>
-            </a:r>
-            <a:r>
-              <a:rPr kumimoji="0" lang="en-CA" sz="1800" b="0" i="0" u="none" strike="noStrike" kern="1200" cap="none" spc="0" normalizeH="0" baseline="0" noProof="0" dirty="0">
-                <a:ln>
-                  <a:noFill/>
-                </a:ln>
-                <a:solidFill>
-                  <a:srgbClr val="00FF00"/>
-                </a:solidFill>
-                <a:effectLst/>
-                <a:uLnTx/>
-                <a:uFillTx/>
-                <a:latin typeface="Courier New"/>
-                <a:ea typeface="+mn-ea"/>
-                <a:cs typeface="Courier New"/>
-              </a:rPr>
-              <a:t>4)</a:t>
-            </a:r>
-          </a:p>
-          <a:p>
-            <a:pPr marL="1765300" marR="0" lvl="0" indent="0" algn="l" defTabSz="914400" rtl="0" eaLnBrk="1" fontAlgn="auto" latinLnBrk="0" hangingPunct="1">
-              <a:lnSpc>
-                <a:spcPct val="100000"/>
-              </a:lnSpc>
-              <a:spcBef>
-                <a:spcPts val="0"/>
-              </a:spcBef>
-              <a:spcAft>
-                <a:spcPts val="0"/>
-              </a:spcAft>
-              <a:buClrTx/>
-              <a:buSzTx/>
-              <a:buFontTx/>
-              <a:buNone/>
-              <a:tabLst/>
-              <a:defRPr/>
-            </a:pPr>
-            <a:r>
-              <a:rPr kumimoji="0" lang="en-CA" sz="1800" b="0" i="0" u="none" strike="noStrike" kern="1200" cap="none" spc="-5" normalizeH="0" baseline="0" noProof="0" dirty="0">
-                <a:ln>
-                  <a:noFill/>
-                </a:ln>
-                <a:solidFill>
-                  <a:srgbClr val="00FF00"/>
-                </a:solidFill>
-                <a:effectLst/>
-                <a:uLnTx/>
-                <a:uFillTx/>
-                <a:latin typeface="Courier New"/>
-                <a:ea typeface="+mn-ea"/>
-                <a:cs typeface="Courier New"/>
-              </a:rPr>
-              <a:t>&gt;&gt;</a:t>
-            </a:r>
-            <a:r>
-              <a:rPr kumimoji="0" lang="en-CA" sz="1800" b="0" i="0" u="none" strike="noStrike" kern="1200" cap="none" spc="0" normalizeH="0" baseline="0" noProof="0" dirty="0">
-                <a:ln>
-                  <a:noFill/>
-                </a:ln>
-                <a:solidFill>
-                  <a:srgbClr val="00FF00"/>
-                </a:solidFill>
-                <a:effectLst/>
-                <a:uLnTx/>
-                <a:uFillTx/>
-                <a:latin typeface="Courier New"/>
-                <a:ea typeface="+mn-ea"/>
-                <a:cs typeface="Courier New"/>
-              </a:rPr>
-              <a:t>&gt;</a:t>
-            </a:r>
-            <a:r>
-              <a:rPr kumimoji="0" lang="en-CA" sz="1800" b="0" i="0" u="none" strike="noStrike" kern="1200" cap="none" spc="-5" normalizeH="0" baseline="0" noProof="0" dirty="0">
-                <a:ln>
-                  <a:noFill/>
-                </a:ln>
-                <a:solidFill>
-                  <a:srgbClr val="00FF00"/>
-                </a:solidFill>
-                <a:effectLst/>
-                <a:uLnTx/>
-                <a:uFillTx/>
-                <a:latin typeface="Courier New"/>
-                <a:ea typeface="+mn-ea"/>
-                <a:cs typeface="Courier New"/>
-              </a:rPr>
-              <a:t> print</a:t>
-            </a:r>
-            <a:r>
-              <a:rPr kumimoji="0" lang="en-CA" sz="1800" b="0" i="0" u="none" strike="noStrike" kern="1200" cap="none" spc="0" normalizeH="0" baseline="0" noProof="0" dirty="0">
-                <a:ln>
-                  <a:noFill/>
-                </a:ln>
-                <a:solidFill>
-                  <a:srgbClr val="00FF00"/>
-                </a:solidFill>
-                <a:effectLst/>
-                <a:uLnTx/>
-                <a:uFillTx/>
-                <a:latin typeface="Courier New"/>
-                <a:ea typeface="+mn-ea"/>
-                <a:cs typeface="Courier New"/>
-              </a:rPr>
-              <a:t>(</a:t>
-            </a:r>
-            <a:r>
-              <a:rPr kumimoji="0" lang="en-CA" sz="1800" b="0" i="0" u="none" strike="noStrike" kern="1200" cap="none" spc="-5" normalizeH="0" baseline="0" noProof="0" dirty="0">
-                <a:ln>
-                  <a:noFill/>
-                </a:ln>
-                <a:solidFill>
-                  <a:srgbClr val="00FF00"/>
-                </a:solidFill>
-                <a:effectLst/>
-                <a:uLnTx/>
-                <a:uFillTx/>
-                <a:latin typeface="Courier New"/>
-                <a:ea typeface="+mn-ea"/>
-                <a:cs typeface="Courier New"/>
-              </a:rPr>
-              <a:t>p</a:t>
-            </a:r>
-            <a:r>
-              <a:rPr kumimoji="0" lang="en-CA" sz="1800" b="0" i="0" u="none" strike="noStrike" kern="1200" cap="none" spc="0" normalizeH="0" baseline="0" noProof="0" dirty="0">
-                <a:ln>
-                  <a:noFill/>
-                </a:ln>
-                <a:solidFill>
-                  <a:srgbClr val="00FF00"/>
-                </a:solidFill>
-                <a:effectLst/>
-                <a:uLnTx/>
-                <a:uFillTx/>
-                <a:latin typeface="Courier New"/>
-                <a:ea typeface="+mn-ea"/>
-                <a:cs typeface="Courier New"/>
-              </a:rPr>
-              <a:t>)</a:t>
-            </a:r>
-          </a:p>
-          <a:p>
-            <a:pPr marL="1765300" lvl="0">
-              <a:defRPr/>
-            </a:pPr>
-            <a:r>
-              <a:rPr lang="en-CA" dirty="0">
-                <a:solidFill>
-                  <a:srgbClr val="00FF00"/>
-                </a:solidFill>
-              </a:rPr>
-              <a:t>&lt;__</a:t>
-            </a:r>
-            <a:r>
-              <a:rPr lang="en-CA" dirty="0" err="1">
-                <a:solidFill>
-                  <a:srgbClr val="00FF00"/>
-                </a:solidFill>
-              </a:rPr>
-              <a:t>main__.Point</a:t>
-            </a:r>
-            <a:r>
-              <a:rPr lang="en-CA" dirty="0">
-                <a:solidFill>
-                  <a:srgbClr val="00FF00"/>
-                </a:solidFill>
-              </a:rPr>
-              <a:t> object at 0x7fd8100778b0&gt;</a:t>
-            </a:r>
-            <a:endParaRPr kumimoji="0" lang="en-CA" sz="1800" b="1" i="0" u="none" strike="noStrike" kern="1200" cap="none" spc="0" normalizeH="0" baseline="0" noProof="0" dirty="0">
-              <a:ln>
-                <a:noFill/>
-              </a:ln>
-              <a:solidFill>
-                <a:srgbClr val="00FF00"/>
-              </a:solidFill>
-              <a:effectLst/>
-              <a:uLnTx/>
-              <a:uFillTx/>
-              <a:latin typeface="Courier New"/>
-              <a:ea typeface="+mn-ea"/>
-              <a:cs typeface="Courier New"/>
-            </a:endParaRPr>
-          </a:p>
-        </p:txBody>
-      </p:sp>
-    </p:spTree>
-    <p:extLst>
-      <p:ext uri="{BB962C8B-B14F-4D97-AF65-F5344CB8AC3E}">
-        <p14:creationId xmlns:p14="http://schemas.microsoft.com/office/powerpoint/2010/main" val="3101585139"/>
-      </p:ext>
-    </p:extLst>
-  </p:cSld>
-  <p:clrMapOvr>
-    <a:masterClrMapping/>
-  </p:clrMapOvr>
-</p:sld>
-</file>
-
-<file path=ppt/slides/slide12.xml><?xml version="1.0" encoding="utf-8"?>
-<p:sld xmlns:a="http://schemas.openxmlformats.org/drawingml/2006/main" xmlns:r="http://schemas.openxmlformats.org/officeDocument/2006/relationships" xmlns:p="http://schemas.openxmlformats.org/presentationml/2006/main">
-  <p:cSld>
-    <p:spTree>
-      <p:nvGrpSpPr>
-        <p:cNvPr id="1" name=""/>
-        <p:cNvGrpSpPr/>
-        <p:nvPr/>
-      </p:nvGrpSpPr>
-      <p:grpSpPr>
-        <a:xfrm>
-          <a:off x="0" y="0"/>
-          <a:ext cx="0" cy="0"/>
-          <a:chOff x="0" y="0"/>
-          <a:chExt cx="0" cy="0"/>
-        </a:xfrm>
-      </p:grpSpPr>
-      <p:sp>
-        <p:nvSpPr>
-          <p:cNvPr id="2" name="Title 1">
-            <a:extLst>
-              <a:ext uri="{FF2B5EF4-FFF2-40B4-BE49-F238E27FC236}">
-                <a16:creationId xmlns:a16="http://schemas.microsoft.com/office/drawing/2014/main" id="{277B8662-D2F9-454D-8182-0E3A3A7F69EC}"/>
-              </a:ext>
-            </a:extLst>
-          </p:cNvPr>
-          <p:cNvSpPr>
-            <a:spLocks noGrp="1"/>
-          </p:cNvSpPr>
-          <p:nvPr>
-            <p:ph type="title"/>
-          </p:nvPr>
-        </p:nvSpPr>
-        <p:spPr/>
-        <p:txBody>
-          <a:bodyPr>
-            <a:normAutofit fontScale="90000"/>
-          </a:bodyPr>
-          <a:lstStyle/>
-          <a:p>
-            <a:r>
-              <a:rPr lang="en-US" dirty="0"/>
-              <a:t>Printing Information</a:t>
-            </a:r>
-          </a:p>
-        </p:txBody>
-      </p:sp>
-      <p:sp>
-        <p:nvSpPr>
-          <p:cNvPr id="3" name="Content Placeholder 2">
-            <a:extLst>
-              <a:ext uri="{FF2B5EF4-FFF2-40B4-BE49-F238E27FC236}">
-                <a16:creationId xmlns:a16="http://schemas.microsoft.com/office/drawing/2014/main" id="{816DE886-4A89-AD42-9138-CE102F1D6C87}"/>
-              </a:ext>
-            </a:extLst>
-          </p:cNvPr>
-          <p:cNvSpPr>
-            <a:spLocks noGrp="1"/>
-          </p:cNvSpPr>
-          <p:nvPr>
-            <p:ph idx="1"/>
-          </p:nvPr>
-        </p:nvSpPr>
-        <p:spPr/>
-        <p:txBody>
-          <a:bodyPr/>
-          <a:lstStyle/>
-          <a:p>
-            <a:r>
-              <a:rPr lang="en-US" dirty="0"/>
-              <a:t>If we had a method, we just need to format the attributes into a string:</a:t>
-            </a:r>
-          </a:p>
-          <a:p>
-            <a:endParaRPr lang="en-US" dirty="0"/>
-          </a:p>
-          <a:p>
-            <a:endParaRPr lang="en-US" dirty="0"/>
-          </a:p>
-          <a:p>
-            <a:endParaRPr lang="en-US" dirty="0"/>
-          </a:p>
-          <a:p>
-            <a:endParaRPr lang="en-US" dirty="0"/>
-          </a:p>
-          <a:p>
-            <a:endParaRPr lang="en-US" dirty="0"/>
-          </a:p>
-          <a:p>
-            <a:endParaRPr lang="en-US" dirty="0"/>
-          </a:p>
-          <a:p>
-            <a:r>
-              <a:rPr lang="en-US" dirty="0"/>
-              <a:t>We could make a similar method for any class (ex: Square)</a:t>
-            </a:r>
-          </a:p>
-        </p:txBody>
-      </p:sp>
-      <p:sp>
-        <p:nvSpPr>
-          <p:cNvPr id="6" name="TextBox 5">
-            <a:extLst>
-              <a:ext uri="{FF2B5EF4-FFF2-40B4-BE49-F238E27FC236}">
-                <a16:creationId xmlns:a16="http://schemas.microsoft.com/office/drawing/2014/main" id="{120E1DC6-BC1E-1849-9678-E19549819074}"/>
-              </a:ext>
-            </a:extLst>
-          </p:cNvPr>
-          <p:cNvSpPr txBox="1"/>
-          <p:nvPr/>
-        </p:nvSpPr>
-        <p:spPr>
-          <a:xfrm>
-            <a:off x="178590" y="2812201"/>
-            <a:ext cx="8422485" cy="2945661"/>
-          </a:xfrm>
-          <a:prstGeom prst="rect">
-            <a:avLst/>
-          </a:prstGeom>
-          <a:noFill/>
-        </p:spPr>
-        <p:txBody>
-          <a:bodyPr wrap="square">
-            <a:spAutoFit/>
-          </a:bodyPr>
-          <a:lstStyle/>
-          <a:p>
-            <a:pPr lvl="0">
-              <a:defRPr/>
-            </a:pPr>
-            <a:r>
-              <a:rPr lang="en-CA" spc="-5" dirty="0">
-                <a:solidFill>
-                  <a:schemeClr val="accent6"/>
-                </a:solidFill>
-                <a:latin typeface="Courier New"/>
-                <a:cs typeface="Courier New"/>
-              </a:rPr>
-              <a:t>class Point:</a:t>
-            </a:r>
-          </a:p>
-          <a:p>
-            <a:pPr lvl="0">
-              <a:defRPr/>
-            </a:pPr>
-            <a:r>
-              <a:rPr lang="en-CA" spc="-5" dirty="0">
-                <a:solidFill>
-                  <a:schemeClr val="accent6"/>
-                </a:solidFill>
-                <a:latin typeface="Courier New"/>
-                <a:cs typeface="Courier New"/>
-              </a:rPr>
-              <a:t>    </a:t>
-            </a:r>
-          </a:p>
-          <a:p>
-            <a:pPr lvl="0">
-              <a:defRPr/>
-            </a:pPr>
-            <a:r>
-              <a:rPr lang="en-CA" spc="-5" dirty="0">
-                <a:solidFill>
-                  <a:schemeClr val="accent6"/>
-                </a:solidFill>
-                <a:latin typeface="Courier New"/>
-                <a:cs typeface="Courier New"/>
-              </a:rPr>
-              <a:t>"""A class that represents and manipulates 2D points"""</a:t>
-            </a:r>
-          </a:p>
-          <a:p>
-            <a:pPr lvl="0">
-              <a:defRPr/>
-            </a:pPr>
-            <a:r>
-              <a:rPr lang="en-CA" spc="-5" dirty="0">
-                <a:solidFill>
-                  <a:srgbClr val="00FF00"/>
-                </a:solidFill>
-                <a:latin typeface="Courier New"/>
-                <a:cs typeface="Courier New"/>
-              </a:rPr>
-              <a:t>    </a:t>
-            </a:r>
-          </a:p>
-          <a:p>
-            <a:pPr lvl="0">
-              <a:defRPr/>
-            </a:pPr>
-            <a:r>
-              <a:rPr lang="en-CA" spc="-5" dirty="0">
-                <a:solidFill>
-                  <a:srgbClr val="00FF00"/>
-                </a:solidFill>
-                <a:latin typeface="Courier New"/>
-                <a:cs typeface="Courier New"/>
-              </a:rPr>
-              <a:t>    def </a:t>
-            </a:r>
-            <a:r>
-              <a:rPr lang="en-CA" spc="-5" dirty="0" err="1">
-                <a:solidFill>
-                  <a:srgbClr val="00FF00"/>
-                </a:solidFill>
-                <a:latin typeface="Courier New"/>
-                <a:cs typeface="Courier New"/>
-              </a:rPr>
-              <a:t>to_string</a:t>
-            </a:r>
-            <a:r>
-              <a:rPr lang="en-CA" spc="-5" dirty="0">
-                <a:solidFill>
-                  <a:srgbClr val="00FF00"/>
-                </a:solidFill>
-                <a:latin typeface="Courier New"/>
-                <a:cs typeface="Courier New"/>
-              </a:rPr>
-              <a:t>(self):</a:t>
-            </a:r>
-          </a:p>
-          <a:p>
-            <a:pPr lvl="0">
-              <a:defRPr/>
-            </a:pPr>
-            <a:r>
-              <a:rPr lang="en-CA" spc="-5" dirty="0">
-                <a:solidFill>
-                  <a:srgbClr val="00FF00"/>
-                </a:solidFill>
-                <a:latin typeface="Courier New"/>
-                <a:cs typeface="Courier New"/>
-              </a:rPr>
-              <a:t>        """</a:t>
-            </a:r>
-          </a:p>
-          <a:p>
-            <a:pPr lvl="0">
-              <a:defRPr/>
-            </a:pPr>
-            <a:r>
-              <a:rPr lang="en-CA" spc="-5" dirty="0">
-                <a:solidFill>
-                  <a:srgbClr val="00FF00"/>
-                </a:solidFill>
-                <a:latin typeface="Courier New"/>
-                <a:cs typeface="Courier New"/>
-              </a:rPr>
-              <a:t>        (self) -&gt; None</a:t>
-            </a:r>
-          </a:p>
-          <a:p>
-            <a:pPr lvl="0">
-              <a:defRPr/>
-            </a:pPr>
-            <a:r>
-              <a:rPr lang="en-CA" spc="-5" dirty="0">
-                <a:solidFill>
-                  <a:srgbClr val="00FF00"/>
-                </a:solidFill>
-                <a:latin typeface="Courier New"/>
-                <a:cs typeface="Courier New"/>
-              </a:rPr>
-              <a:t>        Prints the (x, y) coordinate for the point.</a:t>
-            </a:r>
-          </a:p>
-          <a:p>
-            <a:pPr lvl="0">
-              <a:defRPr/>
-            </a:pPr>
-            <a:r>
-              <a:rPr lang="en-CA" spc="-5" dirty="0">
-                <a:solidFill>
-                  <a:srgbClr val="00FF00"/>
-                </a:solidFill>
-                <a:latin typeface="Courier New"/>
-                <a:cs typeface="Courier New"/>
-              </a:rPr>
-              <a:t>        """</a:t>
-            </a:r>
-          </a:p>
-          <a:p>
-            <a:pPr lvl="0">
-              <a:defRPr/>
-            </a:pPr>
-            <a:r>
-              <a:rPr lang="en-CA" spc="-5" dirty="0">
-                <a:solidFill>
-                  <a:srgbClr val="00FF00"/>
-                </a:solidFill>
-                <a:latin typeface="Courier New"/>
-                <a:cs typeface="Courier New"/>
-              </a:rPr>
-              <a:t>        print('(' + str(</a:t>
-            </a:r>
-            <a:r>
-              <a:rPr lang="en-CA" spc="-5" dirty="0" err="1">
-                <a:solidFill>
-                  <a:srgbClr val="00FF00"/>
-                </a:solidFill>
-                <a:latin typeface="Courier New"/>
-                <a:cs typeface="Courier New"/>
-              </a:rPr>
-              <a:t>self.x</a:t>
-            </a:r>
-            <a:r>
-              <a:rPr lang="en-CA" spc="-5" dirty="0">
-                <a:solidFill>
-                  <a:srgbClr val="00FF00"/>
-                </a:solidFill>
-                <a:latin typeface="Courier New"/>
-                <a:cs typeface="Courier New"/>
-              </a:rPr>
-              <a:t>) + ', ' + str(</a:t>
-            </a:r>
-            <a:r>
-              <a:rPr lang="en-CA" spc="-5" dirty="0" err="1">
-                <a:solidFill>
-                  <a:srgbClr val="00FF00"/>
-                </a:solidFill>
-                <a:latin typeface="Courier New"/>
-                <a:cs typeface="Courier New"/>
-              </a:rPr>
-              <a:t>self.y</a:t>
-            </a:r>
-            <a:r>
-              <a:rPr lang="en-CA" spc="-5" dirty="0">
-                <a:solidFill>
-                  <a:srgbClr val="00FF00"/>
-                </a:solidFill>
-                <a:latin typeface="Courier New"/>
-                <a:cs typeface="Courier New"/>
-              </a:rPr>
-              <a:t>) + ')')</a:t>
-            </a:r>
-            <a:endParaRPr kumimoji="0" lang="en-CA" sz="1800" b="1" i="0" u="none" strike="noStrike" kern="1200" cap="none" spc="0" normalizeH="0" baseline="0" noProof="0" dirty="0">
-              <a:ln>
-                <a:noFill/>
-              </a:ln>
-              <a:solidFill>
-                <a:srgbClr val="00FF00"/>
-              </a:solidFill>
-              <a:effectLst/>
-              <a:uLnTx/>
-              <a:uFillTx/>
-              <a:latin typeface="Courier New"/>
-              <a:ea typeface="+mn-ea"/>
-              <a:cs typeface="Courier New"/>
-            </a:endParaRPr>
-          </a:p>
-        </p:txBody>
-      </p:sp>
-      <p:sp>
-        <p:nvSpPr>
-          <p:cNvPr id="7" name="TextBox 6">
-            <a:extLst>
-              <a:ext uri="{FF2B5EF4-FFF2-40B4-BE49-F238E27FC236}">
-                <a16:creationId xmlns:a16="http://schemas.microsoft.com/office/drawing/2014/main" id="{193F6282-2CF2-3A45-AD92-A60375377CB9}"/>
-              </a:ext>
-            </a:extLst>
-          </p:cNvPr>
-          <p:cNvSpPr txBox="1"/>
-          <p:nvPr/>
-        </p:nvSpPr>
-        <p:spPr>
-          <a:xfrm>
-            <a:off x="6096000" y="2812201"/>
-            <a:ext cx="6165057" cy="1754326"/>
-          </a:xfrm>
-          <a:prstGeom prst="rect">
-            <a:avLst/>
-          </a:prstGeom>
-          <a:noFill/>
-        </p:spPr>
-        <p:txBody>
-          <a:bodyPr wrap="square">
-            <a:spAutoFit/>
-          </a:bodyPr>
-          <a:lstStyle/>
-          <a:p>
-            <a:pPr marL="1765300" marR="0" lvl="0" indent="0" algn="l" defTabSz="914400" rtl="0" eaLnBrk="1" fontAlgn="auto" latinLnBrk="0" hangingPunct="1">
-              <a:lnSpc>
-                <a:spcPct val="100000"/>
-              </a:lnSpc>
-              <a:spcBef>
-                <a:spcPts val="1215"/>
-              </a:spcBef>
-              <a:spcAft>
-                <a:spcPts val="0"/>
-              </a:spcAft>
-              <a:buClrTx/>
-              <a:buSzTx/>
-              <a:buFontTx/>
-              <a:buNone/>
-              <a:tabLst/>
-              <a:defRPr/>
-            </a:pPr>
-            <a:r>
-              <a:rPr kumimoji="0" lang="en-CA" sz="1800" b="0" i="0" u="none" strike="noStrike" kern="1200" cap="none" spc="-5" normalizeH="0" baseline="0" noProof="0" dirty="0">
-                <a:ln>
-                  <a:noFill/>
-                </a:ln>
-                <a:solidFill>
-                  <a:srgbClr val="00FCFF"/>
-                </a:solidFill>
-                <a:effectLst/>
-                <a:uLnTx/>
-                <a:uFillTx/>
-                <a:latin typeface="Courier New"/>
-                <a:ea typeface="+mn-ea"/>
-                <a:cs typeface="Courier New"/>
-              </a:rPr>
-              <a:t>&gt;&gt;</a:t>
-            </a:r>
-            <a:r>
-              <a:rPr kumimoji="0" lang="en-CA" sz="1800" b="0" i="0" u="none" strike="noStrike" kern="1200" cap="none" spc="0" normalizeH="0" baseline="0" noProof="0" dirty="0">
-                <a:ln>
-                  <a:noFill/>
-                </a:ln>
-                <a:solidFill>
-                  <a:srgbClr val="00FCFF"/>
-                </a:solidFill>
-                <a:effectLst/>
-                <a:uLnTx/>
-                <a:uFillTx/>
-                <a:latin typeface="Courier New"/>
-                <a:ea typeface="+mn-ea"/>
-                <a:cs typeface="Courier New"/>
-              </a:rPr>
-              <a:t>&gt;</a:t>
-            </a:r>
-            <a:r>
-              <a:rPr kumimoji="0" lang="en-CA" sz="1800" b="0" i="0" u="none" strike="noStrike" kern="1200" cap="none" spc="-5" normalizeH="0" baseline="0" noProof="0" dirty="0">
-                <a:ln>
-                  <a:noFill/>
-                </a:ln>
-                <a:solidFill>
-                  <a:srgbClr val="00FCFF"/>
-                </a:solidFill>
-                <a:effectLst/>
-                <a:uLnTx/>
-                <a:uFillTx/>
-                <a:latin typeface="Courier New"/>
-                <a:ea typeface="+mn-ea"/>
-                <a:cs typeface="Courier New"/>
-              </a:rPr>
-              <a:t> </a:t>
-            </a:r>
-            <a:r>
-              <a:rPr kumimoji="0" lang="en-CA" sz="1800" b="0" i="0" u="none" strike="noStrike" kern="1200" cap="none" spc="0" normalizeH="0" baseline="0" noProof="0" dirty="0">
-                <a:ln>
-                  <a:noFill/>
-                </a:ln>
-                <a:solidFill>
-                  <a:srgbClr val="00FCFF"/>
-                </a:solidFill>
-                <a:effectLst/>
-                <a:uLnTx/>
-                <a:uFillTx/>
-                <a:latin typeface="Courier New"/>
-                <a:ea typeface="+mn-ea"/>
-                <a:cs typeface="Courier New"/>
-              </a:rPr>
-              <a:t>p</a:t>
-            </a:r>
-            <a:r>
-              <a:rPr kumimoji="0" lang="en-CA" sz="1800" b="0" i="0" u="none" strike="noStrike" kern="1200" cap="none" spc="-5" normalizeH="0" baseline="0" noProof="0" dirty="0">
-                <a:ln>
-                  <a:noFill/>
-                </a:ln>
-                <a:solidFill>
-                  <a:srgbClr val="00FCFF"/>
-                </a:solidFill>
-                <a:effectLst/>
-                <a:uLnTx/>
-                <a:uFillTx/>
-                <a:latin typeface="Courier New"/>
-                <a:ea typeface="+mn-ea"/>
-                <a:cs typeface="Courier New"/>
-              </a:rPr>
-              <a:t> </a:t>
-            </a:r>
-            <a:r>
-              <a:rPr kumimoji="0" lang="en-CA" sz="1800" b="0" i="0" u="none" strike="noStrike" kern="1200" cap="none" spc="0" normalizeH="0" baseline="0" noProof="0" dirty="0">
-                <a:ln>
-                  <a:noFill/>
-                </a:ln>
-                <a:solidFill>
-                  <a:srgbClr val="00FCFF"/>
-                </a:solidFill>
-                <a:effectLst/>
-                <a:uLnTx/>
-                <a:uFillTx/>
-                <a:latin typeface="Courier New"/>
-                <a:ea typeface="+mn-ea"/>
-                <a:cs typeface="Courier New"/>
-              </a:rPr>
-              <a:t>=</a:t>
-            </a:r>
-            <a:r>
-              <a:rPr kumimoji="0" lang="en-CA" sz="1800" b="0" i="0" u="none" strike="noStrike" kern="1200" cap="none" spc="-5" normalizeH="0" baseline="0" noProof="0" dirty="0">
-                <a:ln>
-                  <a:noFill/>
-                </a:ln>
-                <a:solidFill>
-                  <a:srgbClr val="00FCFF"/>
-                </a:solidFill>
-                <a:effectLst/>
-                <a:uLnTx/>
-                <a:uFillTx/>
-                <a:latin typeface="Courier New"/>
-                <a:ea typeface="+mn-ea"/>
-                <a:cs typeface="Courier New"/>
-              </a:rPr>
-              <a:t> Point(3,</a:t>
-            </a:r>
-            <a:r>
-              <a:rPr kumimoji="0" lang="en-CA" sz="1800" b="0" i="0" u="none" strike="noStrike" kern="1200" cap="none" spc="0" normalizeH="0" baseline="0" noProof="0" dirty="0">
-                <a:ln>
-                  <a:noFill/>
-                </a:ln>
-                <a:solidFill>
-                  <a:srgbClr val="00FCFF"/>
-                </a:solidFill>
-                <a:effectLst/>
-                <a:uLnTx/>
-                <a:uFillTx/>
-                <a:latin typeface="Courier New"/>
-                <a:ea typeface="+mn-ea"/>
-                <a:cs typeface="Courier New"/>
-              </a:rPr>
-              <a:t>4)</a:t>
-            </a:r>
-          </a:p>
-          <a:p>
-            <a:pPr marL="1765300" marR="0" lvl="0" indent="0" algn="l" defTabSz="914400" rtl="0" eaLnBrk="1" fontAlgn="auto" latinLnBrk="0" hangingPunct="1">
-              <a:lnSpc>
-                <a:spcPct val="100000"/>
-              </a:lnSpc>
-              <a:spcBef>
-                <a:spcPts val="0"/>
-              </a:spcBef>
-              <a:spcAft>
-                <a:spcPts val="0"/>
-              </a:spcAft>
-              <a:buClrTx/>
-              <a:buSzTx/>
-              <a:buFontTx/>
-              <a:buNone/>
-              <a:tabLst/>
-              <a:defRPr/>
-            </a:pPr>
-            <a:r>
-              <a:rPr kumimoji="0" lang="en-CA" sz="1800" b="0" i="0" u="none" strike="noStrike" kern="1200" cap="none" spc="-5" normalizeH="0" baseline="0" noProof="0" dirty="0">
-                <a:ln>
-                  <a:noFill/>
-                </a:ln>
-                <a:solidFill>
-                  <a:srgbClr val="00FCFF"/>
-                </a:solidFill>
-                <a:effectLst/>
-                <a:uLnTx/>
-                <a:uFillTx/>
-                <a:latin typeface="Courier New"/>
-                <a:ea typeface="+mn-ea"/>
-                <a:cs typeface="Courier New"/>
-              </a:rPr>
-              <a:t>&gt;&gt;</a:t>
-            </a:r>
-            <a:r>
-              <a:rPr kumimoji="0" lang="en-CA" sz="1800" b="0" i="0" u="none" strike="noStrike" kern="1200" cap="none" spc="0" normalizeH="0" baseline="0" noProof="0" dirty="0">
-                <a:ln>
-                  <a:noFill/>
-                </a:ln>
-                <a:solidFill>
-                  <a:srgbClr val="00FCFF"/>
-                </a:solidFill>
-                <a:effectLst/>
-                <a:uLnTx/>
-                <a:uFillTx/>
-                <a:latin typeface="Courier New"/>
-                <a:ea typeface="+mn-ea"/>
-                <a:cs typeface="Courier New"/>
-              </a:rPr>
-              <a:t>&gt; </a:t>
-            </a:r>
-            <a:r>
-              <a:rPr kumimoji="0" lang="en-CA" sz="1800" b="0" i="0" u="none" strike="noStrike" kern="1200" cap="none" spc="-5" normalizeH="0" baseline="0" noProof="0" dirty="0">
-                <a:ln>
-                  <a:noFill/>
-                </a:ln>
-                <a:solidFill>
-                  <a:srgbClr val="00FCFF"/>
-                </a:solidFill>
-                <a:effectLst/>
-                <a:uLnTx/>
-                <a:uFillTx/>
-                <a:latin typeface="Courier New"/>
-                <a:ea typeface="+mn-ea"/>
-                <a:cs typeface="Courier New"/>
-              </a:rPr>
-              <a:t>p.</a:t>
-            </a:r>
-            <a:r>
-              <a:rPr lang="en-CA" spc="-5" dirty="0" err="1">
-                <a:solidFill>
-                  <a:srgbClr val="00FCFF"/>
-                </a:solidFill>
-                <a:latin typeface="Courier New"/>
-                <a:cs typeface="Courier New"/>
-              </a:rPr>
-              <a:t>to_string</a:t>
-            </a:r>
-            <a:r>
-              <a:rPr kumimoji="0" lang="en-CA" sz="1800" b="0" i="0" u="none" strike="noStrike" kern="1200" cap="none" spc="-5" normalizeH="0" baseline="0" noProof="0" dirty="0">
-                <a:ln>
-                  <a:noFill/>
-                </a:ln>
-                <a:solidFill>
-                  <a:srgbClr val="00FCFF"/>
-                </a:solidFill>
-                <a:effectLst/>
-                <a:uLnTx/>
-                <a:uFillTx/>
-                <a:latin typeface="Courier New"/>
-                <a:ea typeface="+mn-ea"/>
-                <a:cs typeface="Courier New"/>
-              </a:rPr>
-              <a:t>()</a:t>
-            </a:r>
-            <a:endParaRPr kumimoji="0" lang="en-CA" sz="1800" b="0" i="0" u="none" strike="noStrike" kern="1200" cap="none" spc="0" normalizeH="0" baseline="0" noProof="0" dirty="0">
-              <a:ln>
-                <a:noFill/>
-              </a:ln>
-              <a:solidFill>
-                <a:srgbClr val="00FCFF"/>
-              </a:solidFill>
-              <a:effectLst/>
-              <a:uLnTx/>
-              <a:uFillTx/>
-              <a:latin typeface="Courier New"/>
-              <a:ea typeface="+mn-ea"/>
-              <a:cs typeface="Courier New"/>
-            </a:endParaRPr>
-          </a:p>
-          <a:p>
-            <a:pPr marL="1765300" marR="0" lvl="0" indent="0" algn="l" defTabSz="914400" rtl="0" eaLnBrk="1" fontAlgn="auto" latinLnBrk="0" hangingPunct="1">
-              <a:lnSpc>
-                <a:spcPct val="100000"/>
-              </a:lnSpc>
-              <a:spcBef>
-                <a:spcPts val="0"/>
-              </a:spcBef>
-              <a:spcAft>
-                <a:spcPts val="0"/>
-              </a:spcAft>
-              <a:buClrTx/>
-              <a:buSzTx/>
-              <a:buFontTx/>
-              <a:buNone/>
-              <a:tabLst/>
-              <a:defRPr/>
-            </a:pPr>
-            <a:r>
-              <a:rPr kumimoji="0" lang="en-CA" sz="1800" b="1" i="0" u="none" strike="noStrike" kern="1200" cap="none" spc="-5" normalizeH="0" baseline="0" noProof="0" dirty="0">
-                <a:ln>
-                  <a:noFill/>
-                </a:ln>
-                <a:solidFill>
-                  <a:srgbClr val="00FCFF"/>
-                </a:solidFill>
-                <a:effectLst/>
-                <a:uLnTx/>
-                <a:uFillTx/>
-                <a:latin typeface="Courier New"/>
-                <a:ea typeface="+mn-ea"/>
-                <a:cs typeface="Courier New"/>
-              </a:rPr>
-              <a:t>'(3,4)'</a:t>
-            </a:r>
-            <a:endParaRPr kumimoji="0" lang="en-CA" sz="1800" b="0" i="0" u="none" strike="noStrike" kern="1200" cap="none" spc="0" normalizeH="0" baseline="0" noProof="0" dirty="0">
-              <a:ln>
-                <a:noFill/>
-              </a:ln>
-              <a:solidFill>
-                <a:srgbClr val="00FCFF"/>
-              </a:solidFill>
-              <a:effectLst/>
-              <a:uLnTx/>
-              <a:uFillTx/>
-              <a:latin typeface="Courier New"/>
-              <a:ea typeface="+mn-ea"/>
-              <a:cs typeface="Courier New"/>
-            </a:endParaRPr>
-          </a:p>
-          <a:p>
-            <a:pPr marL="1765300" marR="0" lvl="0" indent="0" algn="l" defTabSz="914400" rtl="0" eaLnBrk="1" fontAlgn="auto" latinLnBrk="0" hangingPunct="1">
-              <a:lnSpc>
-                <a:spcPct val="100000"/>
-              </a:lnSpc>
-              <a:spcBef>
-                <a:spcPts val="0"/>
-              </a:spcBef>
-              <a:spcAft>
-                <a:spcPts val="0"/>
-              </a:spcAft>
-              <a:buClrTx/>
-              <a:buSzTx/>
-              <a:buFontTx/>
-              <a:buNone/>
-              <a:tabLst/>
-              <a:defRPr/>
-            </a:pPr>
-            <a:r>
-              <a:rPr kumimoji="0" lang="en-CA" sz="1800" b="0" i="0" u="none" strike="noStrike" kern="1200" cap="none" spc="-5" normalizeH="0" baseline="0" noProof="0" dirty="0">
-                <a:ln>
-                  <a:noFill/>
-                </a:ln>
-                <a:solidFill>
-                  <a:srgbClr val="00FCFF"/>
-                </a:solidFill>
-                <a:effectLst/>
-                <a:uLnTx/>
-                <a:uFillTx/>
-                <a:latin typeface="Courier New"/>
-                <a:ea typeface="+mn-ea"/>
-                <a:cs typeface="Courier New"/>
-              </a:rPr>
-              <a:t>&gt;&gt;</a:t>
-            </a:r>
-            <a:r>
-              <a:rPr kumimoji="0" lang="en-CA" sz="1800" b="0" i="0" u="none" strike="noStrike" kern="1200" cap="none" spc="0" normalizeH="0" baseline="0" noProof="0" dirty="0">
-                <a:ln>
-                  <a:noFill/>
-                </a:ln>
-                <a:solidFill>
-                  <a:srgbClr val="00FCFF"/>
-                </a:solidFill>
-                <a:effectLst/>
-                <a:uLnTx/>
-                <a:uFillTx/>
-                <a:latin typeface="Courier New"/>
-                <a:ea typeface="+mn-ea"/>
-                <a:cs typeface="Courier New"/>
-              </a:rPr>
-              <a:t>&gt;</a:t>
-            </a:r>
-            <a:r>
-              <a:rPr kumimoji="0" lang="en-CA" sz="1800" b="0" i="0" u="none" strike="noStrike" kern="1200" cap="none" spc="-5" normalizeH="0" baseline="0" noProof="0" dirty="0">
-                <a:ln>
-                  <a:noFill/>
-                </a:ln>
-                <a:solidFill>
-                  <a:srgbClr val="00FCFF"/>
-                </a:solidFill>
-                <a:effectLst/>
-                <a:uLnTx/>
-                <a:uFillTx/>
-                <a:latin typeface="Courier New"/>
-                <a:ea typeface="+mn-ea"/>
-                <a:cs typeface="Courier New"/>
-              </a:rPr>
-              <a:t> </a:t>
-            </a:r>
-            <a:r>
-              <a:rPr kumimoji="0" lang="en-CA" sz="1800" b="0" i="0" u="none" strike="noStrike" kern="1200" cap="none" spc="0" normalizeH="0" baseline="0" noProof="0" dirty="0">
-                <a:ln>
-                  <a:noFill/>
-                </a:ln>
-                <a:solidFill>
-                  <a:srgbClr val="00FCFF"/>
-                </a:solidFill>
-                <a:effectLst/>
-                <a:uLnTx/>
-                <a:uFillTx/>
-                <a:latin typeface="Courier New"/>
-                <a:ea typeface="+mn-ea"/>
-                <a:cs typeface="Courier New"/>
-              </a:rPr>
-              <a:t>r =</a:t>
-            </a:r>
-            <a:r>
-              <a:rPr kumimoji="0" lang="en-CA" sz="1800" b="0" i="0" u="none" strike="noStrike" kern="1200" cap="none" spc="-5" normalizeH="0" baseline="0" noProof="0" dirty="0">
-                <a:ln>
-                  <a:noFill/>
-                </a:ln>
-                <a:solidFill>
-                  <a:srgbClr val="00FCFF"/>
-                </a:solidFill>
-                <a:effectLst/>
-                <a:uLnTx/>
-                <a:uFillTx/>
-                <a:latin typeface="Courier New"/>
-                <a:ea typeface="+mn-ea"/>
-                <a:cs typeface="Courier New"/>
-              </a:rPr>
-              <a:t> </a:t>
-            </a:r>
-            <a:r>
-              <a:rPr kumimoji="0" lang="en-CA" sz="1800" b="0" i="0" u="none" strike="noStrike" kern="1200" cap="none" spc="-5" normalizeH="0" baseline="0" noProof="0" dirty="0" err="1">
-                <a:ln>
-                  <a:noFill/>
-                </a:ln>
-                <a:solidFill>
-                  <a:srgbClr val="00FCFF"/>
-                </a:solidFill>
-                <a:effectLst/>
-                <a:uLnTx/>
-                <a:uFillTx/>
-                <a:latin typeface="Courier New"/>
-                <a:ea typeface="+mn-ea"/>
-                <a:cs typeface="Courier New"/>
-              </a:rPr>
-              <a:t>p.halfway</a:t>
-            </a:r>
-            <a:r>
-              <a:rPr kumimoji="0" lang="en-CA" sz="1800" b="0" i="0" u="none" strike="noStrike" kern="1200" cap="none" spc="-5" normalizeH="0" baseline="0" noProof="0" dirty="0">
-                <a:ln>
-                  <a:noFill/>
-                </a:ln>
-                <a:solidFill>
-                  <a:srgbClr val="00FCFF"/>
-                </a:solidFill>
-                <a:effectLst/>
-                <a:uLnTx/>
-                <a:uFillTx/>
-                <a:latin typeface="Courier New"/>
-                <a:ea typeface="+mn-ea"/>
-                <a:cs typeface="Courier New"/>
-              </a:rPr>
-              <a:t>(Point(5,12))</a:t>
-            </a:r>
-            <a:endParaRPr kumimoji="0" lang="en-CA" sz="1800" b="0" i="0" u="none" strike="noStrike" kern="1200" cap="none" spc="0" normalizeH="0" baseline="0" noProof="0" dirty="0">
-              <a:ln>
-                <a:noFill/>
-              </a:ln>
-              <a:solidFill>
-                <a:srgbClr val="00FCFF"/>
-              </a:solidFill>
-              <a:effectLst/>
-              <a:uLnTx/>
-              <a:uFillTx/>
-              <a:latin typeface="Courier New"/>
-              <a:ea typeface="+mn-ea"/>
-              <a:cs typeface="Courier New"/>
-            </a:endParaRPr>
-          </a:p>
-          <a:p>
-            <a:pPr marL="1765300" marR="0" lvl="0" indent="0" algn="l" defTabSz="914400" rtl="0" eaLnBrk="1" fontAlgn="auto" latinLnBrk="0" hangingPunct="1">
-              <a:lnSpc>
-                <a:spcPct val="100000"/>
-              </a:lnSpc>
-              <a:spcBef>
-                <a:spcPts val="0"/>
-              </a:spcBef>
-              <a:spcAft>
-                <a:spcPts val="0"/>
-              </a:spcAft>
-              <a:buClrTx/>
-              <a:buSzTx/>
-              <a:buFontTx/>
-              <a:buNone/>
-              <a:tabLst/>
-              <a:defRPr/>
-            </a:pPr>
-            <a:r>
-              <a:rPr kumimoji="0" lang="en-CA" sz="1800" b="0" i="0" u="none" strike="noStrike" kern="1200" cap="none" spc="-5" normalizeH="0" baseline="0" noProof="0" dirty="0">
-                <a:ln>
-                  <a:noFill/>
-                </a:ln>
-                <a:solidFill>
-                  <a:srgbClr val="00FCFF"/>
-                </a:solidFill>
-                <a:effectLst/>
-                <a:uLnTx/>
-                <a:uFillTx/>
-                <a:latin typeface="Courier New"/>
-                <a:ea typeface="+mn-ea"/>
-                <a:cs typeface="Courier New"/>
-              </a:rPr>
-              <a:t>&gt;&gt;</a:t>
-            </a:r>
-            <a:r>
-              <a:rPr kumimoji="0" lang="en-CA" sz="1800" b="0" i="0" u="none" strike="noStrike" kern="1200" cap="none" spc="0" normalizeH="0" baseline="0" noProof="0" dirty="0">
-                <a:ln>
-                  <a:noFill/>
-                </a:ln>
-                <a:solidFill>
-                  <a:srgbClr val="00FCFF"/>
-                </a:solidFill>
-                <a:effectLst/>
-                <a:uLnTx/>
-                <a:uFillTx/>
-                <a:latin typeface="Courier New"/>
-                <a:ea typeface="+mn-ea"/>
-                <a:cs typeface="Courier New"/>
-              </a:rPr>
-              <a:t>&gt; </a:t>
-            </a:r>
-            <a:r>
-              <a:rPr kumimoji="0" lang="en-CA" sz="1800" b="0" i="0" u="none" strike="noStrike" kern="1200" cap="none" spc="-5" normalizeH="0" baseline="0" noProof="0" dirty="0" err="1">
-                <a:ln>
-                  <a:noFill/>
-                </a:ln>
-                <a:solidFill>
-                  <a:srgbClr val="00FCFF"/>
-                </a:solidFill>
-                <a:effectLst/>
-                <a:uLnTx/>
-                <a:uFillTx/>
-                <a:latin typeface="Courier New"/>
-                <a:ea typeface="+mn-ea"/>
-                <a:cs typeface="Courier New"/>
-              </a:rPr>
-              <a:t>r.to_string</a:t>
-            </a:r>
-            <a:r>
-              <a:rPr lang="en-CA" sz="1800" spc="-5" dirty="0">
-                <a:solidFill>
-                  <a:srgbClr val="00FCFF"/>
-                </a:solidFill>
-                <a:latin typeface="Courier New"/>
-                <a:cs typeface="Courier New"/>
-              </a:rPr>
-              <a:t>()</a:t>
-            </a:r>
-            <a:endParaRPr kumimoji="0" lang="en-CA" sz="1800" b="0" i="0" u="none" strike="noStrike" kern="1200" cap="none" spc="0" normalizeH="0" baseline="0" noProof="0" dirty="0">
-              <a:ln>
-                <a:noFill/>
-              </a:ln>
-              <a:solidFill>
-                <a:srgbClr val="00FCFF"/>
-              </a:solidFill>
-              <a:effectLst/>
-              <a:uLnTx/>
-              <a:uFillTx/>
-              <a:latin typeface="Courier New"/>
-              <a:ea typeface="+mn-ea"/>
-              <a:cs typeface="Courier New"/>
-            </a:endParaRPr>
-          </a:p>
-          <a:p>
-            <a:pPr marL="1765300" marR="0" lvl="0" indent="0" algn="l" defTabSz="914400" rtl="0" eaLnBrk="1" fontAlgn="auto" latinLnBrk="0" hangingPunct="1">
-              <a:lnSpc>
-                <a:spcPct val="100000"/>
-              </a:lnSpc>
-              <a:spcBef>
-                <a:spcPts val="0"/>
-              </a:spcBef>
-              <a:spcAft>
-                <a:spcPts val="0"/>
-              </a:spcAft>
-              <a:buClrTx/>
-              <a:buSzTx/>
-              <a:buFontTx/>
-              <a:buNone/>
-              <a:tabLst/>
-              <a:defRPr/>
-            </a:pPr>
-            <a:r>
-              <a:rPr kumimoji="0" lang="en-CA" sz="1800" b="1" i="0" u="none" strike="noStrike" kern="1200" cap="none" spc="-5" normalizeH="0" baseline="0" noProof="0" dirty="0">
-                <a:ln>
-                  <a:noFill/>
-                </a:ln>
-                <a:solidFill>
-                  <a:srgbClr val="00FCFF"/>
-                </a:solidFill>
-                <a:effectLst/>
-                <a:uLnTx/>
-                <a:uFillTx/>
-                <a:latin typeface="Courier New"/>
-                <a:ea typeface="+mn-ea"/>
-                <a:cs typeface="Courier New"/>
-              </a:rPr>
-              <a:t>'(4,8)'</a:t>
-            </a:r>
-            <a:endParaRPr kumimoji="0" lang="en-CA" sz="1800" b="0" i="0" u="none" strike="noStrike" kern="1200" cap="none" spc="0" normalizeH="0" baseline="0" noProof="0" dirty="0">
-              <a:ln>
-                <a:noFill/>
-              </a:ln>
-              <a:solidFill>
-                <a:srgbClr val="00FCFF"/>
-              </a:solidFill>
-              <a:effectLst/>
-              <a:uLnTx/>
-              <a:uFillTx/>
-              <a:latin typeface="Courier New"/>
-              <a:ea typeface="+mn-ea"/>
-              <a:cs typeface="Courier New"/>
-            </a:endParaRPr>
-          </a:p>
-        </p:txBody>
-      </p:sp>
-    </p:spTree>
-    <p:extLst>
-      <p:ext uri="{BB962C8B-B14F-4D97-AF65-F5344CB8AC3E}">
-        <p14:creationId xmlns:p14="http://schemas.microsoft.com/office/powerpoint/2010/main" val="959801457"/>
-      </p:ext>
-    </p:extLst>
-  </p:cSld>
-  <p:clrMapOvr>
-    <a:masterClrMapping/>
-  </p:clrMapOvr>
-  <p:timing>
-    <p:tnLst>
-      <p:par>
-        <p:cTn id="1" dur="indefinite" restart="never" nodeType="tmRoot">
-          <p:childTnLst>
-            <p:seq concurrent="1" nextAc="seek">
-              <p:cTn id="2" dur="indefinite" nodeType="mainSeq">
-                <p:childTnLst>
-                  <p:par>
-                    <p:cTn id="3" fill="hold">
-                      <p:stCondLst>
-                        <p:cond delay="indefinite"/>
-                      </p:stCondLst>
-                      <p:childTnLst>
-                        <p:par>
-                          <p:cTn id="4" fill="hold">
-                            <p:stCondLst>
-                              <p:cond delay="0"/>
-                            </p:stCondLst>
-                            <p:childTnLst>
-                              <p:par>
-                                <p:cTn id="5" presetID="1" presetClass="entr" presetSubtype="0" fill="hold" grpId="0" nodeType="clickEffect">
-                                  <p:stCondLst>
-                                    <p:cond delay="0"/>
-                                  </p:stCondLst>
-                                  <p:childTnLst>
-                                    <p:set>
-                                      <p:cBhvr>
-                                        <p:cTn id="6" dur="1" fill="hold">
-                                          <p:stCondLst>
-                                            <p:cond delay="0"/>
-                                          </p:stCondLst>
-                                        </p:cTn>
-                                        <p:tgtEl>
-                                          <p:spTgt spid="7"/>
-                                        </p:tgtEl>
-                                        <p:attrNameLst>
-                                          <p:attrName>style.visibility</p:attrName>
-                                        </p:attrNameLst>
-                                      </p:cBhvr>
-                                      <p:to>
-                                        <p:strVal val="visible"/>
-                                      </p:to>
-                                    </p:set>
-                                  </p:childTnLst>
-                                </p:cTn>
-                              </p:par>
-                            </p:childTnLst>
-                          </p:cTn>
-                        </p:par>
-                      </p:childTnLst>
-                    </p:cTn>
-                  </p:par>
-                </p:childTnLst>
-              </p:cTn>
-              <p:prevCondLst>
-                <p:cond evt="onPrev" delay="0">
-                  <p:tgtEl>
-                    <p:sldTgt/>
-                  </p:tgtEl>
-                </p:cond>
-              </p:prevCondLst>
-              <p:nextCondLst>
-                <p:cond evt="onNext" delay="0">
-                  <p:tgtEl>
-                    <p:sldTgt/>
-                  </p:tgtEl>
-                </p:cond>
-              </p:nextCondLst>
-            </p:seq>
-          </p:childTnLst>
-        </p:cTn>
-      </p:par>
-    </p:tnLst>
-    <p:bldLst>
-      <p:bldP spid="7" grpId="0"/>
-    </p:bldLst>
-  </p:timing>
-</p:sld>
-</file>
-
-<file path=ppt/slides/slide13.xml><?xml version="1.0" encoding="utf-8"?>
-<p:sld xmlns:a="http://schemas.openxmlformats.org/drawingml/2006/main" xmlns:r="http://schemas.openxmlformats.org/officeDocument/2006/relationships" xmlns:p="http://schemas.openxmlformats.org/presentationml/2006/main">
-  <p:cSld>
-    <p:spTree>
-      <p:nvGrpSpPr>
-        <p:cNvPr id="1" name=""/>
-        <p:cNvGrpSpPr/>
-        <p:nvPr/>
-      </p:nvGrpSpPr>
-      <p:grpSpPr>
-        <a:xfrm>
-          <a:off x="0" y="0"/>
-          <a:ext cx="0" cy="0"/>
-          <a:chOff x="0" y="0"/>
-          <a:chExt cx="0" cy="0"/>
-        </a:xfrm>
-      </p:grpSpPr>
-      <p:sp>
-        <p:nvSpPr>
-          <p:cNvPr id="2" name="Title 1">
-            <a:extLst>
-              <a:ext uri="{FF2B5EF4-FFF2-40B4-BE49-F238E27FC236}">
                 <a16:creationId xmlns:a16="http://schemas.microsoft.com/office/drawing/2014/main" id="{ABBFE9CA-3CBC-5841-8561-1BC587C9E139}"/>
               </a:ext>
             </a:extLst>
@@ -6440,7 +3365,7 @@
 </p:sld>
 </file>
 
-<file path=ppt/slides/slide14.xml><?xml version="1.0" encoding="utf-8"?>
+<file path=ppt/slides/slide11.xml><?xml version="1.0" encoding="utf-8"?>
 <p:sld xmlns:a="http://schemas.openxmlformats.org/drawingml/2006/main" xmlns:r="http://schemas.openxmlformats.org/officeDocument/2006/relationships" xmlns:p="http://schemas.openxmlformats.org/presentationml/2006/main">
   <p:cSld>
     <p:spTree>
@@ -8227,7 +5152,7 @@
 </p:sld>
 </file>
 
-<file path=ppt/slides/slide15.xml><?xml version="1.0" encoding="utf-8"?>
+<file path=ppt/slides/slide12.xml><?xml version="1.0" encoding="utf-8"?>
 <p:sld xmlns:a="http://schemas.openxmlformats.org/drawingml/2006/main" xmlns:r="http://schemas.openxmlformats.org/officeDocument/2006/relationships" xmlns:p="http://schemas.openxmlformats.org/presentationml/2006/main">
   <p:cSld>
     <p:spTree>
@@ -8476,7 +5401,7 @@
 </p:sld>
 </file>
 
-<file path=ppt/slides/slide16.xml><?xml version="1.0" encoding="utf-8"?>
+<file path=ppt/slides/slide13.xml><?xml version="1.0" encoding="utf-8"?>
 <p:sld xmlns:a="http://schemas.openxmlformats.org/drawingml/2006/main" xmlns:r="http://schemas.openxmlformats.org/officeDocument/2006/relationships" xmlns:p="http://schemas.openxmlformats.org/presentationml/2006/main">
   <p:cSld>
     <p:spTree>
@@ -8923,7 +5848,7 @@
 </p:sld>
 </file>
 
-<file path=ppt/slides/slide17.xml><?xml version="1.0" encoding="utf-8"?>
+<file path=ppt/slides/slide14.xml><?xml version="1.0" encoding="utf-8"?>
 <p:sld xmlns:a="http://schemas.openxmlformats.org/drawingml/2006/main" xmlns:r="http://schemas.openxmlformats.org/officeDocument/2006/relationships" xmlns:p="http://schemas.openxmlformats.org/presentationml/2006/main">
   <p:cSld>
     <p:spTree>
@@ -9193,7 +6118,7 @@
 </p:sld>
 </file>
 
-<file path=ppt/slides/slide18.xml><?xml version="1.0" encoding="utf-8"?>
+<file path=ppt/slides/slide15.xml><?xml version="1.0" encoding="utf-8"?>
 <p:sld xmlns:a="http://schemas.openxmlformats.org/drawingml/2006/main" xmlns:r="http://schemas.openxmlformats.org/officeDocument/2006/relationships" xmlns:p="http://schemas.openxmlformats.org/presentationml/2006/main">
   <p:cSld>
     <p:spTree>
@@ -9504,7 +6429,7 @@
             <a:pPr lvl="1"/>
             <a:r>
               <a:rPr lang="en-US" dirty="0"/>
-              <a:t>Design Problem</a:t>
+              <a:t>Design Problem: Dungeon Escape</a:t>
             </a:r>
           </a:p>
         </p:txBody>
@@ -9570,2622 +6495,6 @@
 </file>
 
 <file path=ppt/slides/slide3.xml><?xml version="1.0" encoding="utf-8"?>
-<p:sld xmlns:a="http://schemas.openxmlformats.org/drawingml/2006/main" xmlns:r="http://schemas.openxmlformats.org/officeDocument/2006/relationships" xmlns:p="http://schemas.openxmlformats.org/presentationml/2006/main">
-  <p:cSld>
-    <p:spTree>
-      <p:nvGrpSpPr>
-        <p:cNvPr id="1" name=""/>
-        <p:cNvGrpSpPr/>
-        <p:nvPr/>
-      </p:nvGrpSpPr>
-      <p:grpSpPr>
-        <a:xfrm>
-          <a:off x="0" y="0"/>
-          <a:ext cx="0" cy="0"/>
-          <a:chOff x="0" y="0"/>
-          <a:chExt cx="0" cy="0"/>
-        </a:xfrm>
-      </p:grpSpPr>
-      <p:sp>
-        <p:nvSpPr>
-          <p:cNvPr id="2" name="Title 1">
-            <a:extLst>
-              <a:ext uri="{FF2B5EF4-FFF2-40B4-BE49-F238E27FC236}">
-                <a16:creationId xmlns:a16="http://schemas.microsoft.com/office/drawing/2014/main" id="{9CFA7ECA-E2FE-C443-935A-9744B8368542}"/>
-              </a:ext>
-            </a:extLst>
-          </p:cNvPr>
-          <p:cNvSpPr>
-            <a:spLocks noGrp="1"/>
-          </p:cNvSpPr>
-          <p:nvPr>
-            <p:ph type="title"/>
-          </p:nvPr>
-        </p:nvSpPr>
-        <p:spPr>
-          <a:xfrm>
-            <a:off x="838200" y="942666"/>
-            <a:ext cx="10515600" cy="1000434"/>
-          </a:xfrm>
-        </p:spPr>
-        <p:txBody>
-          <a:bodyPr>
-            <a:normAutofit fontScale="90000"/>
-          </a:bodyPr>
-          <a:lstStyle/>
-          <a:p>
-            <a:r>
-              <a:rPr lang="en-US" dirty="0">
-                <a:solidFill>
-                  <a:srgbClr val="FFFF00"/>
-                </a:solidFill>
-              </a:rPr>
-              <a:t>Exam: April 15, 2:00 PM </a:t>
-            </a:r>
-            <a:br>
-              <a:rPr lang="en-US" dirty="0"/>
-            </a:br>
-            <a:r>
-              <a:rPr lang="en-US" dirty="0"/>
-              <a:t>Bahen (1), Myhal (1), Wallberg (2)</a:t>
-            </a:r>
-          </a:p>
-        </p:txBody>
-      </p:sp>
-      <p:pic>
-        <p:nvPicPr>
-          <p:cNvPr id="7170" name="Picture 2" descr="10 Final Exam Memes By People Wasting More Time Than You">
-            <a:extLst>
-              <a:ext uri="{FF2B5EF4-FFF2-40B4-BE49-F238E27FC236}">
-                <a16:creationId xmlns:a16="http://schemas.microsoft.com/office/drawing/2014/main" id="{5C61C0AB-213A-E640-B9A0-1D0BDC710B82}"/>
-              </a:ext>
-            </a:extLst>
-          </p:cNvPr>
-          <p:cNvPicPr>
-            <a:picLocks noChangeAspect="1" noChangeArrowheads="1"/>
-          </p:cNvPicPr>
-          <p:nvPr/>
-        </p:nvPicPr>
-        <p:blipFill rotWithShape="1">
-          <a:blip r:embed="rId2">
-            <a:extLst>
-              <a:ext uri="{28A0092B-C50C-407E-A947-70E740481C1C}">
-                <a14:useLocalDpi xmlns:a14="http://schemas.microsoft.com/office/drawing/2010/main" val="0"/>
-              </a:ext>
-            </a:extLst>
-          </a:blip>
-          <a:srcRect t="8744" r="6659" b="8821"/>
-          <a:stretch/>
-        </p:blipFill>
-        <p:spPr bwMode="auto">
-          <a:xfrm>
-            <a:off x="1203774" y="2464494"/>
-            <a:ext cx="5721503" cy="3991942"/>
-          </a:xfrm>
-          <a:prstGeom prst="rect">
-            <a:avLst/>
-          </a:prstGeom>
-          <a:noFill/>
-          <a:extLst>
-            <a:ext uri="{909E8E84-426E-40DD-AFC4-6F175D3DCCD1}">
-              <a14:hiddenFill xmlns:a14="http://schemas.microsoft.com/office/drawing/2010/main">
-                <a:solidFill>
-                  <a:srgbClr val="FFFFFF"/>
-                </a:solidFill>
-              </a14:hiddenFill>
-            </a:ext>
-          </a:extLst>
-        </p:spPr>
-      </p:pic>
-      <p:pic>
-        <p:nvPicPr>
-          <p:cNvPr id="7" name="Picture 2" descr="Meme Creator - Funny studying 1 day before exam Meme Generator at  MemeCreator.org!">
-            <a:extLst>
-              <a:ext uri="{FF2B5EF4-FFF2-40B4-BE49-F238E27FC236}">
-                <a16:creationId xmlns:a16="http://schemas.microsoft.com/office/drawing/2014/main" id="{C0D9B1FB-8B02-7741-BADE-CE14E3515C33}"/>
-              </a:ext>
-            </a:extLst>
-          </p:cNvPr>
-          <p:cNvPicPr>
-            <a:picLocks noChangeAspect="1" noChangeArrowheads="1"/>
-          </p:cNvPicPr>
-          <p:nvPr/>
-        </p:nvPicPr>
-        <p:blipFill>
-          <a:blip r:embed="rId3">
-            <a:extLst>
-              <a:ext uri="{28A0092B-C50C-407E-A947-70E740481C1C}">
-                <a14:useLocalDpi xmlns:a14="http://schemas.microsoft.com/office/drawing/2010/main" val="0"/>
-              </a:ext>
-            </a:extLst>
-          </a:blip>
-          <a:srcRect/>
-          <a:stretch>
-            <a:fillRect/>
-          </a:stretch>
-        </p:blipFill>
-        <p:spPr bwMode="auto">
-          <a:xfrm>
-            <a:off x="7301720" y="2950192"/>
-            <a:ext cx="3686506" cy="2789522"/>
-          </a:xfrm>
-          <a:prstGeom prst="rect">
-            <a:avLst/>
-          </a:prstGeom>
-          <a:noFill/>
-          <a:extLst>
-            <a:ext uri="{909E8E84-426E-40DD-AFC4-6F175D3DCCD1}">
-              <a14:hiddenFill xmlns:a14="http://schemas.microsoft.com/office/drawing/2010/main">
-                <a:solidFill>
-                  <a:srgbClr val="FFFFFF"/>
-                </a:solidFill>
-              </a14:hiddenFill>
-            </a:ext>
-          </a:extLst>
-        </p:spPr>
-      </p:pic>
-    </p:spTree>
-    <p:extLst>
-      <p:ext uri="{BB962C8B-B14F-4D97-AF65-F5344CB8AC3E}">
-        <p14:creationId xmlns:p14="http://schemas.microsoft.com/office/powerpoint/2010/main" val="739362371"/>
-      </p:ext>
-    </p:extLst>
-  </p:cSld>
-  <p:clrMapOvr>
-    <a:masterClrMapping/>
-  </p:clrMapOvr>
-</p:sld>
-</file>
-
-<file path=ppt/slides/slide4.xml><?xml version="1.0" encoding="utf-8"?>
-<p:sld xmlns:a="http://schemas.openxmlformats.org/drawingml/2006/main" xmlns:r="http://schemas.openxmlformats.org/officeDocument/2006/relationships" xmlns:p="http://schemas.openxmlformats.org/presentationml/2006/main">
-  <p:cSld>
-    <p:spTree>
-      <p:nvGrpSpPr>
-        <p:cNvPr id="1" name=""/>
-        <p:cNvGrpSpPr/>
-        <p:nvPr/>
-      </p:nvGrpSpPr>
-      <p:grpSpPr>
-        <a:xfrm>
-          <a:off x="0" y="0"/>
-          <a:ext cx="0" cy="0"/>
-          <a:chOff x="0" y="0"/>
-          <a:chExt cx="0" cy="0"/>
-        </a:xfrm>
-      </p:grpSpPr>
-      <p:sp>
-        <p:nvSpPr>
-          <p:cNvPr id="2" name="Title 1">
-            <a:extLst>
-              <a:ext uri="{FF2B5EF4-FFF2-40B4-BE49-F238E27FC236}">
-                <a16:creationId xmlns:a16="http://schemas.microsoft.com/office/drawing/2014/main" id="{1AC6F16E-A41C-FF43-B7FB-848C939BF2B9}"/>
-              </a:ext>
-            </a:extLst>
-          </p:cNvPr>
-          <p:cNvSpPr>
-            <a:spLocks noGrp="1"/>
-          </p:cNvSpPr>
-          <p:nvPr>
-            <p:ph type="title"/>
-          </p:nvPr>
-        </p:nvSpPr>
-        <p:spPr/>
-        <p:txBody>
-          <a:bodyPr>
-            <a:normAutofit fontScale="90000"/>
-          </a:bodyPr>
-          <a:lstStyle/>
-          <a:p>
-            <a:r>
-              <a:rPr lang="en-US" dirty="0"/>
-              <a:t>Online Tutorial</a:t>
-            </a:r>
-          </a:p>
-        </p:txBody>
-      </p:sp>
-      <p:graphicFrame>
-        <p:nvGraphicFramePr>
-          <p:cNvPr id="4" name="Content Placeholder 3">
-            <a:extLst>
-              <a:ext uri="{FF2B5EF4-FFF2-40B4-BE49-F238E27FC236}">
-                <a16:creationId xmlns:a16="http://schemas.microsoft.com/office/drawing/2014/main" id="{33480E74-8034-EF44-BDEE-9AE91F328285}"/>
-              </a:ext>
-            </a:extLst>
-          </p:cNvPr>
-          <p:cNvGraphicFramePr>
-            <a:graphicFrameLocks noGrp="1"/>
-          </p:cNvGraphicFramePr>
-          <p:nvPr>
-            <p:ph idx="1"/>
-          </p:nvPr>
-        </p:nvGraphicFramePr>
-        <p:xfrm>
-          <a:off x="243059" y="4276377"/>
-          <a:ext cx="7540282" cy="807720"/>
-        </p:xfrm>
-        <a:graphic>
-          <a:graphicData uri="http://schemas.openxmlformats.org/drawingml/2006/table">
-            <a:tbl>
-              <a:tblPr>
-                <a:tableStyleId>{638B1855-1B75-4FBE-930C-398BA8C253C6}</a:tableStyleId>
-              </a:tblPr>
-              <a:tblGrid>
-                <a:gridCol w="2686831">
-                  <a:extLst>
-                    <a:ext uri="{9D8B030D-6E8A-4147-A177-3AD203B41FA5}">
-                      <a16:colId xmlns:a16="http://schemas.microsoft.com/office/drawing/2014/main" val="1777798719"/>
-                    </a:ext>
-                  </a:extLst>
-                </a:gridCol>
-                <a:gridCol w="4853451">
-                  <a:extLst>
-                    <a:ext uri="{9D8B030D-6E8A-4147-A177-3AD203B41FA5}">
-                      <a16:colId xmlns:a16="http://schemas.microsoft.com/office/drawing/2014/main" val="1920957893"/>
-                    </a:ext>
-                  </a:extLst>
-                </a:gridCol>
-              </a:tblGrid>
-              <a:tr h="266700">
-                <a:tc>
-                  <a:txBody>
-                    <a:bodyPr/>
-                    <a:lstStyle/>
-                    <a:p>
-                      <a:pPr algn="ctr"/>
-                      <a:endParaRPr lang="en-CA" sz="2400" dirty="0">
-                        <a:effectLst/>
-                      </a:endParaRPr>
-                    </a:p>
-                  </a:txBody>
-                  <a:tcPr marL="19050" marR="19050" marT="19050" marB="19050" anchor="ctr">
-                    <a:lnL w="12700" cap="flat" cmpd="sng" algn="ctr">
-                      <a:solidFill>
-                        <a:schemeClr val="tx1"/>
-                      </a:solidFill>
-                      <a:prstDash val="solid"/>
-                      <a:round/>
-                      <a:headEnd type="none" w="med" len="med"/>
-                      <a:tailEnd type="none" w="med" len="med"/>
-                    </a:lnL>
-                    <a:lnR w="12700" cap="flat" cmpd="sng" algn="ctr">
-                      <a:solidFill>
-                        <a:schemeClr val="tx1"/>
-                      </a:solidFill>
-                      <a:prstDash val="solid"/>
-                      <a:round/>
-                      <a:headEnd type="none" w="med" len="med"/>
-                      <a:tailEnd type="none" w="med" len="med"/>
-                    </a:lnR>
-                    <a:lnT w="12700" cap="flat" cmpd="sng" algn="ctr">
-                      <a:solidFill>
-                        <a:schemeClr val="tx1"/>
-                      </a:solidFill>
-                      <a:prstDash val="solid"/>
-                      <a:round/>
-                      <a:headEnd type="none" w="med" len="med"/>
-                      <a:tailEnd type="none" w="med" len="med"/>
-                    </a:lnT>
-                    <a:lnB w="12700" cap="flat" cmpd="sng" algn="ctr">
-                      <a:solidFill>
-                        <a:schemeClr val="tx1"/>
-                      </a:solidFill>
-                      <a:prstDash val="solid"/>
-                      <a:round/>
-                      <a:headEnd type="none" w="med" len="med"/>
-                      <a:tailEnd type="none" w="med" len="med"/>
-                    </a:lnB>
-                  </a:tcPr>
-                </a:tc>
-                <a:tc>
-                  <a:txBody>
-                    <a:bodyPr/>
-                    <a:lstStyle/>
-                    <a:p>
-                      <a:pPr algn="ctr"/>
-                      <a:r>
-                        <a:rPr lang="en-CA" sz="2400" b="1" dirty="0">
-                          <a:effectLst/>
-                        </a:rPr>
-                        <a:t>Time</a:t>
-                      </a:r>
-                      <a:endParaRPr lang="en-CA" sz="2400" dirty="0">
-                        <a:effectLst/>
-                      </a:endParaRPr>
-                    </a:p>
-                  </a:txBody>
-                  <a:tcPr marL="19050" marR="19050" marT="19050" marB="19050" anchor="ctr">
-                    <a:lnL w="12700" cap="flat" cmpd="sng" algn="ctr">
-                      <a:solidFill>
-                        <a:schemeClr val="tx1"/>
-                      </a:solidFill>
-                      <a:prstDash val="solid"/>
-                      <a:round/>
-                      <a:headEnd type="none" w="med" len="med"/>
-                      <a:tailEnd type="none" w="med" len="med"/>
-                    </a:lnL>
-                    <a:lnR w="12700" cap="flat" cmpd="sng" algn="ctr">
-                      <a:solidFill>
-                        <a:schemeClr val="tx1"/>
-                      </a:solidFill>
-                      <a:prstDash val="solid"/>
-                      <a:round/>
-                      <a:headEnd type="none" w="med" len="med"/>
-                      <a:tailEnd type="none" w="med" len="med"/>
-                    </a:lnR>
-                    <a:lnT w="12700" cap="flat" cmpd="sng" algn="ctr">
-                      <a:solidFill>
-                        <a:schemeClr val="tx1"/>
-                      </a:solidFill>
-                      <a:prstDash val="solid"/>
-                      <a:round/>
-                      <a:headEnd type="none" w="med" len="med"/>
-                      <a:tailEnd type="none" w="med" len="med"/>
-                    </a:lnT>
-                    <a:lnB w="12700" cap="flat" cmpd="sng" algn="ctr">
-                      <a:solidFill>
-                        <a:schemeClr val="tx1"/>
-                      </a:solidFill>
-                      <a:prstDash val="solid"/>
-                      <a:round/>
-                      <a:headEnd type="none" w="med" len="med"/>
-                      <a:tailEnd type="none" w="med" len="med"/>
-                    </a:lnB>
-                  </a:tcPr>
-                </a:tc>
-                <a:extLst>
-                  <a:ext uri="{0D108BD9-81ED-4DB2-BD59-A6C34878D82A}">
-                    <a16:rowId xmlns:a16="http://schemas.microsoft.com/office/drawing/2014/main" val="3386890843"/>
-                  </a:ext>
-                </a:extLst>
-              </a:tr>
-              <a:tr h="266700">
-                <a:tc>
-                  <a:txBody>
-                    <a:bodyPr/>
-                    <a:lstStyle/>
-                    <a:p>
-                      <a:pPr algn="ctr"/>
-                      <a:r>
-                        <a:rPr lang="en-CA" sz="2400" dirty="0">
-                          <a:effectLst/>
-                        </a:rPr>
-                        <a:t>Tutorial</a:t>
-                      </a:r>
-                    </a:p>
-                  </a:txBody>
-                  <a:tcPr marL="19050" marR="19050" marT="19050" marB="19050" anchor="ctr">
-                    <a:lnL w="12700" cap="flat" cmpd="sng" algn="ctr">
-                      <a:solidFill>
-                        <a:schemeClr val="tx1"/>
-                      </a:solidFill>
-                      <a:prstDash val="solid"/>
-                      <a:round/>
-                      <a:headEnd type="none" w="med" len="med"/>
-                      <a:tailEnd type="none" w="med" len="med"/>
-                    </a:lnL>
-                    <a:lnR w="12700" cap="flat" cmpd="sng" algn="ctr">
-                      <a:solidFill>
-                        <a:schemeClr val="tx1"/>
-                      </a:solidFill>
-                      <a:prstDash val="solid"/>
-                      <a:round/>
-                      <a:headEnd type="none" w="med" len="med"/>
-                      <a:tailEnd type="none" w="med" len="med"/>
-                    </a:lnR>
-                    <a:lnT w="12700" cap="flat" cmpd="sng" algn="ctr">
-                      <a:solidFill>
-                        <a:schemeClr val="tx1"/>
-                      </a:solidFill>
-                      <a:prstDash val="solid"/>
-                      <a:round/>
-                      <a:headEnd type="none" w="med" len="med"/>
-                      <a:tailEnd type="none" w="med" len="med"/>
-                    </a:lnT>
-                    <a:lnB w="12700" cap="flat" cmpd="sng" algn="ctr">
-                      <a:solidFill>
-                        <a:schemeClr val="tx1"/>
-                      </a:solidFill>
-                      <a:prstDash val="solid"/>
-                      <a:round/>
-                      <a:headEnd type="none" w="med" len="med"/>
-                      <a:tailEnd type="none" w="med" len="med"/>
-                    </a:lnB>
-                  </a:tcPr>
-                </a:tc>
-                <a:tc>
-                  <a:txBody>
-                    <a:bodyPr/>
-                    <a:lstStyle/>
-                    <a:p>
-                      <a:pPr algn="ctr"/>
-                      <a:r>
-                        <a:rPr lang="en-CA" sz="2400" dirty="0">
-                          <a:effectLst/>
-                        </a:rPr>
-                        <a:t>Wednesday 7 – 8 PM</a:t>
-                      </a:r>
-                    </a:p>
-                  </a:txBody>
-                  <a:tcPr marL="19050" marR="19050" marT="19050" marB="19050" anchor="ctr">
-                    <a:lnL w="12700" cap="flat" cmpd="sng" algn="ctr">
-                      <a:solidFill>
-                        <a:schemeClr val="tx1"/>
-                      </a:solidFill>
-                      <a:prstDash val="solid"/>
-                      <a:round/>
-                      <a:headEnd type="none" w="med" len="med"/>
-                      <a:tailEnd type="none" w="med" len="med"/>
-                    </a:lnL>
-                    <a:lnR w="12700" cap="flat" cmpd="sng" algn="ctr">
-                      <a:solidFill>
-                        <a:schemeClr val="tx1"/>
-                      </a:solidFill>
-                      <a:prstDash val="solid"/>
-                      <a:round/>
-                      <a:headEnd type="none" w="med" len="med"/>
-                      <a:tailEnd type="none" w="med" len="med"/>
-                    </a:lnR>
-                    <a:lnT w="12700" cap="flat" cmpd="sng" algn="ctr">
-                      <a:solidFill>
-                        <a:schemeClr val="tx1"/>
-                      </a:solidFill>
-                      <a:prstDash val="solid"/>
-                      <a:round/>
-                      <a:headEnd type="none" w="med" len="med"/>
-                      <a:tailEnd type="none" w="med" len="med"/>
-                    </a:lnT>
-                    <a:lnB w="12700" cap="flat" cmpd="sng" algn="ctr">
-                      <a:solidFill>
-                        <a:schemeClr val="tx1"/>
-                      </a:solidFill>
-                      <a:prstDash val="solid"/>
-                      <a:round/>
-                      <a:headEnd type="none" w="med" len="med"/>
-                      <a:tailEnd type="none" w="med" len="med"/>
-                    </a:lnB>
-                  </a:tcPr>
-                </a:tc>
-                <a:extLst>
-                  <a:ext uri="{0D108BD9-81ED-4DB2-BD59-A6C34878D82A}">
-                    <a16:rowId xmlns:a16="http://schemas.microsoft.com/office/drawing/2014/main" val="201774030"/>
-                  </a:ext>
-                </a:extLst>
-              </a:tr>
-            </a:tbl>
-          </a:graphicData>
-        </a:graphic>
-      </p:graphicFrame>
-      <p:sp>
-        <p:nvSpPr>
-          <p:cNvPr id="7" name="Content Placeholder 2">
-            <a:extLst>
-              <a:ext uri="{FF2B5EF4-FFF2-40B4-BE49-F238E27FC236}">
-                <a16:creationId xmlns:a16="http://schemas.microsoft.com/office/drawing/2014/main" id="{DB9245E3-752D-1D4D-9D33-21C8A2B686B7}"/>
-              </a:ext>
-            </a:extLst>
-          </p:cNvPr>
-          <p:cNvSpPr txBox="1">
-            <a:spLocks/>
-          </p:cNvSpPr>
-          <p:nvPr/>
-        </p:nvSpPr>
-        <p:spPr>
-          <a:xfrm>
-            <a:off x="78836" y="1566885"/>
-            <a:ext cx="11274963" cy="2544301"/>
-          </a:xfrm>
-          <a:prstGeom prst="rect">
-            <a:avLst/>
-          </a:prstGeom>
-        </p:spPr>
-        <p:txBody>
-          <a:bodyPr vert="horz" lIns="91440" tIns="45720" rIns="91440" bIns="45720" rtlCol="0">
-            <a:normAutofit/>
-          </a:bodyPr>
-          <a:lstStyle>
-            <a:lvl1pPr marL="228600" indent="-228600" algn="l" defTabSz="914400" rtl="0" eaLnBrk="1" latinLnBrk="0" hangingPunct="1">
-              <a:lnSpc>
-                <a:spcPct val="90000"/>
-              </a:lnSpc>
-              <a:spcBef>
-                <a:spcPts val="1000"/>
-              </a:spcBef>
-              <a:buClr>
-                <a:srgbClr val="007EE5"/>
-              </a:buClr>
-              <a:buFont typeface="Wingdings" panose="05000000000000000000" pitchFamily="2" charset="2"/>
-              <a:buChar char="§"/>
-              <a:defRPr sz="2800" kern="1200">
-                <a:solidFill>
-                  <a:srgbClr val="FFFFFF"/>
-                </a:solidFill>
-                <a:latin typeface="+mn-lt"/>
-                <a:ea typeface="+mn-ea"/>
-                <a:cs typeface="+mn-cs"/>
-              </a:defRPr>
-            </a:lvl1pPr>
-            <a:lvl2pPr marL="685800" indent="-228600" algn="l" defTabSz="914400" rtl="0" eaLnBrk="1" latinLnBrk="0" hangingPunct="1">
-              <a:lnSpc>
-                <a:spcPct val="90000"/>
-              </a:lnSpc>
-              <a:spcBef>
-                <a:spcPts val="500"/>
-              </a:spcBef>
-              <a:buClr>
-                <a:srgbClr val="007EE5"/>
-              </a:buClr>
-              <a:buFont typeface="Wingdings" panose="05000000000000000000" pitchFamily="2" charset="2"/>
-              <a:buChar char="§"/>
-              <a:defRPr sz="2400" kern="1200">
-                <a:solidFill>
-                  <a:srgbClr val="FFFFFF"/>
-                </a:solidFill>
-                <a:latin typeface="+mn-lt"/>
-                <a:ea typeface="+mn-ea"/>
-                <a:cs typeface="+mn-cs"/>
-              </a:defRPr>
-            </a:lvl2pPr>
-            <a:lvl3pPr marL="1143000" indent="-228600" algn="l" defTabSz="914400" rtl="0" eaLnBrk="1" latinLnBrk="0" hangingPunct="1">
-              <a:lnSpc>
-                <a:spcPct val="90000"/>
-              </a:lnSpc>
-              <a:spcBef>
-                <a:spcPts val="500"/>
-              </a:spcBef>
-              <a:buClr>
-                <a:srgbClr val="007EE5"/>
-              </a:buClr>
-              <a:buFont typeface="Wingdings" panose="05000000000000000000" pitchFamily="2" charset="2"/>
-              <a:buChar char="§"/>
-              <a:defRPr sz="2000" kern="1200">
-                <a:solidFill>
-                  <a:srgbClr val="FFFFFF"/>
-                </a:solidFill>
-                <a:latin typeface="+mn-lt"/>
-                <a:ea typeface="+mn-ea"/>
-                <a:cs typeface="+mn-cs"/>
-              </a:defRPr>
-            </a:lvl3pPr>
-            <a:lvl4pPr marL="1600200" indent="-228600" algn="l" defTabSz="914400" rtl="0" eaLnBrk="1" latinLnBrk="0" hangingPunct="1">
-              <a:lnSpc>
-                <a:spcPct val="90000"/>
-              </a:lnSpc>
-              <a:spcBef>
-                <a:spcPts val="500"/>
-              </a:spcBef>
-              <a:buClr>
-                <a:srgbClr val="007EE5"/>
-              </a:buClr>
-              <a:buFont typeface="Wingdings" panose="05000000000000000000" pitchFamily="2" charset="2"/>
-              <a:buChar char="§"/>
-              <a:defRPr sz="1800" kern="1200">
-                <a:solidFill>
-                  <a:srgbClr val="FFFFFF"/>
-                </a:solidFill>
-                <a:latin typeface="+mn-lt"/>
-                <a:ea typeface="+mn-ea"/>
-                <a:cs typeface="+mn-cs"/>
-              </a:defRPr>
-            </a:lvl4pPr>
-            <a:lvl5pPr marL="2057400" indent="-228600" algn="l" defTabSz="914400" rtl="0" eaLnBrk="1" latinLnBrk="0" hangingPunct="1">
-              <a:lnSpc>
-                <a:spcPct val="90000"/>
-              </a:lnSpc>
-              <a:spcBef>
-                <a:spcPts val="500"/>
-              </a:spcBef>
-              <a:buClr>
-                <a:srgbClr val="007EE5"/>
-              </a:buClr>
-              <a:buFont typeface="Wingdings" panose="05000000000000000000" pitchFamily="2" charset="2"/>
-              <a:buChar char="§"/>
-              <a:defRPr sz="1800" kern="1200">
-                <a:solidFill>
-                  <a:srgbClr val="FFFFFF"/>
-                </a:solidFill>
-                <a:latin typeface="+mn-lt"/>
-                <a:ea typeface="+mn-ea"/>
-                <a:cs typeface="+mn-cs"/>
-              </a:defRPr>
-            </a:lvl5pPr>
-            <a:lvl6pPr marL="2514600" indent="-228600" algn="l" defTabSz="914400" rtl="0" eaLnBrk="1" latinLnBrk="0" hangingPunct="1">
-              <a:lnSpc>
-                <a:spcPct val="90000"/>
-              </a:lnSpc>
-              <a:spcBef>
-                <a:spcPts val="500"/>
-              </a:spcBef>
-              <a:buFont typeface="Arial" panose="020B0604020202020204" pitchFamily="34" charset="0"/>
-              <a:buChar char="•"/>
-              <a:defRPr sz="1800" kern="1200">
-                <a:solidFill>
-                  <a:schemeClr val="tx1"/>
-                </a:solidFill>
-                <a:latin typeface="+mn-lt"/>
-                <a:ea typeface="+mn-ea"/>
-                <a:cs typeface="+mn-cs"/>
-              </a:defRPr>
-            </a:lvl6pPr>
-            <a:lvl7pPr marL="2971800" indent="-228600" algn="l" defTabSz="914400" rtl="0" eaLnBrk="1" latinLnBrk="0" hangingPunct="1">
-              <a:lnSpc>
-                <a:spcPct val="90000"/>
-              </a:lnSpc>
-              <a:spcBef>
-                <a:spcPts val="500"/>
-              </a:spcBef>
-              <a:buFont typeface="Arial" panose="020B0604020202020204" pitchFamily="34" charset="0"/>
-              <a:buChar char="•"/>
-              <a:defRPr sz="1800" kern="1200">
-                <a:solidFill>
-                  <a:schemeClr val="tx1"/>
-                </a:solidFill>
-                <a:latin typeface="+mn-lt"/>
-                <a:ea typeface="+mn-ea"/>
-                <a:cs typeface="+mn-cs"/>
-              </a:defRPr>
-            </a:lvl7pPr>
-            <a:lvl8pPr marL="3429000" indent="-228600" algn="l" defTabSz="914400" rtl="0" eaLnBrk="1" latinLnBrk="0" hangingPunct="1">
-              <a:lnSpc>
-                <a:spcPct val="90000"/>
-              </a:lnSpc>
-              <a:spcBef>
-                <a:spcPts val="500"/>
-              </a:spcBef>
-              <a:buFont typeface="Arial" panose="020B0604020202020204" pitchFamily="34" charset="0"/>
-              <a:buChar char="•"/>
-              <a:defRPr sz="1800" kern="1200">
-                <a:solidFill>
-                  <a:schemeClr val="tx1"/>
-                </a:solidFill>
-                <a:latin typeface="+mn-lt"/>
-                <a:ea typeface="+mn-ea"/>
-                <a:cs typeface="+mn-cs"/>
-              </a:defRPr>
-            </a:lvl8pPr>
-            <a:lvl9pPr marL="3886200" indent="-228600" algn="l" defTabSz="914400" rtl="0" eaLnBrk="1" latinLnBrk="0" hangingPunct="1">
-              <a:lnSpc>
-                <a:spcPct val="90000"/>
-              </a:lnSpc>
-              <a:spcBef>
-                <a:spcPts val="500"/>
-              </a:spcBef>
-              <a:buFont typeface="Arial" panose="020B0604020202020204" pitchFamily="34" charset="0"/>
-              <a:buChar char="•"/>
-              <a:defRPr sz="1800" kern="1200">
-                <a:solidFill>
-                  <a:schemeClr val="tx1"/>
-                </a:solidFill>
-                <a:latin typeface="+mn-lt"/>
-                <a:ea typeface="+mn-ea"/>
-                <a:cs typeface="+mn-cs"/>
-              </a:defRPr>
-            </a:lvl9pPr>
-          </a:lstStyle>
-          <a:p>
-            <a:r>
-              <a:rPr lang="en-CA" dirty="0"/>
-              <a:t>These times worked best for you! </a:t>
-            </a:r>
-          </a:p>
-          <a:p>
-            <a:pPr lvl="1"/>
-            <a:r>
-              <a:rPr lang="en-CA" dirty="0">
-                <a:solidFill>
-                  <a:srgbClr val="00B050"/>
-                </a:solidFill>
-              </a:rPr>
-              <a:t>TIP FOR SUCCESS</a:t>
-            </a:r>
-            <a:r>
-              <a:rPr lang="en-CA" dirty="0"/>
-              <a:t>: Put these in your calendar!   Labs are due Friday night! </a:t>
-            </a:r>
-          </a:p>
-          <a:p>
-            <a:r>
-              <a:rPr lang="en-CA" dirty="0"/>
-              <a:t>Schedule and Zoom Links are on Quercus</a:t>
-            </a:r>
-          </a:p>
-          <a:p>
-            <a:pPr lvl="1"/>
-            <a:r>
-              <a:rPr lang="en-CA" dirty="0"/>
-              <a:t>“Tutorial Homepage”</a:t>
-            </a:r>
-          </a:p>
-        </p:txBody>
-      </p:sp>
-      <p:pic>
-        <p:nvPicPr>
-          <p:cNvPr id="1029" name="Picture 5" descr="Drake Hotline Bling Meme Generator - Imgflip">
-            <a:extLst>
-              <a:ext uri="{FF2B5EF4-FFF2-40B4-BE49-F238E27FC236}">
-                <a16:creationId xmlns:a16="http://schemas.microsoft.com/office/drawing/2014/main" id="{2804BB82-9DB1-0142-875A-473DC8894D62}"/>
-              </a:ext>
-            </a:extLst>
-          </p:cNvPr>
-          <p:cNvPicPr>
-            <a:picLocks noChangeAspect="1" noChangeArrowheads="1"/>
-          </p:cNvPicPr>
-          <p:nvPr/>
-        </p:nvPicPr>
-        <p:blipFill>
-          <a:blip r:embed="rId3">
-            <a:extLst>
-              <a:ext uri="{28A0092B-C50C-407E-A947-70E740481C1C}">
-                <a14:useLocalDpi xmlns:a14="http://schemas.microsoft.com/office/drawing/2010/main" val="0"/>
-              </a:ext>
-            </a:extLst>
-          </a:blip>
-          <a:srcRect/>
-          <a:stretch>
-            <a:fillRect/>
-          </a:stretch>
-        </p:blipFill>
-        <p:spPr bwMode="auto">
-          <a:xfrm>
-            <a:off x="8178801" y="2623381"/>
-            <a:ext cx="3934362" cy="3934362"/>
-          </a:xfrm>
-          <a:prstGeom prst="rect">
-            <a:avLst/>
-          </a:prstGeom>
-          <a:noFill/>
-          <a:extLst>
-            <a:ext uri="{909E8E84-426E-40DD-AFC4-6F175D3DCCD1}">
-              <a14:hiddenFill xmlns:a14="http://schemas.microsoft.com/office/drawing/2010/main">
-                <a:solidFill>
-                  <a:srgbClr val="FFFFFF"/>
-                </a:solidFill>
-              </a14:hiddenFill>
-            </a:ext>
-          </a:extLst>
-        </p:spPr>
-      </p:pic>
-      <p:sp>
-        <p:nvSpPr>
-          <p:cNvPr id="10" name="TextBox 9">
-            <a:extLst>
-              <a:ext uri="{FF2B5EF4-FFF2-40B4-BE49-F238E27FC236}">
-                <a16:creationId xmlns:a16="http://schemas.microsoft.com/office/drawing/2014/main" id="{D5175649-4AED-AE4C-96D2-D435897609F1}"/>
-              </a:ext>
-            </a:extLst>
-          </p:cNvPr>
-          <p:cNvSpPr txBox="1"/>
-          <p:nvPr/>
-        </p:nvSpPr>
-        <p:spPr>
-          <a:xfrm>
-            <a:off x="10160093" y="3391178"/>
-            <a:ext cx="1981013" cy="830997"/>
-          </a:xfrm>
-          <a:prstGeom prst="rect">
-            <a:avLst/>
-          </a:prstGeom>
-          <a:noFill/>
-        </p:spPr>
-        <p:txBody>
-          <a:bodyPr wrap="square" rtlCol="0">
-            <a:spAutoFit/>
-          </a:bodyPr>
-          <a:lstStyle/>
-          <a:p>
-            <a:pPr algn="ctr"/>
-            <a:r>
-              <a:rPr lang="en-US" sz="2400" b="1" dirty="0">
-                <a:solidFill>
-                  <a:schemeClr val="bg1"/>
-                </a:solidFill>
-              </a:rPr>
-              <a:t>Commuting</a:t>
-            </a:r>
-            <a:br>
-              <a:rPr lang="en-US" sz="2400" b="1" dirty="0">
-                <a:solidFill>
-                  <a:schemeClr val="bg1"/>
-                </a:solidFill>
-              </a:rPr>
-            </a:br>
-            <a:endParaRPr lang="en-US" sz="2400" b="1" dirty="0">
-              <a:solidFill>
-                <a:schemeClr val="bg1"/>
-              </a:solidFill>
-            </a:endParaRPr>
-          </a:p>
-        </p:txBody>
-      </p:sp>
-      <p:sp>
-        <p:nvSpPr>
-          <p:cNvPr id="11" name="TextBox 10">
-            <a:extLst>
-              <a:ext uri="{FF2B5EF4-FFF2-40B4-BE49-F238E27FC236}">
-                <a16:creationId xmlns:a16="http://schemas.microsoft.com/office/drawing/2014/main" id="{72AE69D3-E6B7-FB43-927D-DCC75C187041}"/>
-              </a:ext>
-            </a:extLst>
-          </p:cNvPr>
-          <p:cNvSpPr txBox="1"/>
-          <p:nvPr/>
-        </p:nvSpPr>
-        <p:spPr>
-          <a:xfrm>
-            <a:off x="10210986" y="5084097"/>
-            <a:ext cx="1879226" cy="1077218"/>
-          </a:xfrm>
-          <a:prstGeom prst="rect">
-            <a:avLst/>
-          </a:prstGeom>
-          <a:noFill/>
-        </p:spPr>
-        <p:txBody>
-          <a:bodyPr wrap="square" rtlCol="0">
-            <a:spAutoFit/>
-          </a:bodyPr>
-          <a:lstStyle/>
-          <a:p>
-            <a:pPr algn="ctr"/>
-            <a:r>
-              <a:rPr lang="en-US" sz="3200" b="1" dirty="0">
-                <a:solidFill>
-                  <a:schemeClr val="bg1"/>
-                </a:solidFill>
-              </a:rPr>
-              <a:t>Online</a:t>
-            </a:r>
-            <a:br>
-              <a:rPr lang="en-US" sz="3200" b="1" dirty="0">
-                <a:solidFill>
-                  <a:schemeClr val="bg1"/>
-                </a:solidFill>
-              </a:rPr>
-            </a:br>
-            <a:r>
-              <a:rPr lang="en-US" sz="3200" b="1" dirty="0">
-                <a:solidFill>
-                  <a:schemeClr val="bg1"/>
-                </a:solidFill>
-              </a:rPr>
-              <a:t>Tutorials</a:t>
-            </a:r>
-          </a:p>
-        </p:txBody>
-      </p:sp>
-    </p:spTree>
-    <p:extLst>
-      <p:ext uri="{BB962C8B-B14F-4D97-AF65-F5344CB8AC3E}">
-        <p14:creationId xmlns:p14="http://schemas.microsoft.com/office/powerpoint/2010/main" val="1103642560"/>
-      </p:ext>
-    </p:extLst>
-  </p:cSld>
-  <p:clrMapOvr>
-    <a:masterClrMapping/>
-  </p:clrMapOvr>
-</p:sld>
-</file>
-
-<file path=ppt/slides/slide5.xml><?xml version="1.0" encoding="utf-8"?>
-<p:sld xmlns:a="http://schemas.openxmlformats.org/drawingml/2006/main" xmlns:r="http://schemas.openxmlformats.org/officeDocument/2006/relationships" xmlns:p="http://schemas.openxmlformats.org/presentationml/2006/main">
-  <p:cSld>
-    <p:spTree>
-      <p:nvGrpSpPr>
-        <p:cNvPr id="1" name=""/>
-        <p:cNvGrpSpPr/>
-        <p:nvPr/>
-      </p:nvGrpSpPr>
-      <p:grpSpPr>
-        <a:xfrm>
-          <a:off x="0" y="0"/>
-          <a:ext cx="0" cy="0"/>
-          <a:chOff x="0" y="0"/>
-          <a:chExt cx="0" cy="0"/>
-        </a:xfrm>
-      </p:grpSpPr>
-      <p:sp>
-        <p:nvSpPr>
-          <p:cNvPr id="2" name="Title 1">
-            <a:extLst>
-              <a:ext uri="{FF2B5EF4-FFF2-40B4-BE49-F238E27FC236}">
-                <a16:creationId xmlns:a16="http://schemas.microsoft.com/office/drawing/2014/main" id="{1AC6F16E-A41C-FF43-B7FB-848C939BF2B9}"/>
-              </a:ext>
-            </a:extLst>
-          </p:cNvPr>
-          <p:cNvSpPr>
-            <a:spLocks noGrp="1"/>
-          </p:cNvSpPr>
-          <p:nvPr>
-            <p:ph type="title"/>
-          </p:nvPr>
-        </p:nvSpPr>
-        <p:spPr/>
-        <p:txBody>
-          <a:bodyPr>
-            <a:normAutofit fontScale="90000"/>
-          </a:bodyPr>
-          <a:lstStyle/>
-          <a:p>
-            <a:r>
-              <a:rPr lang="en-US" dirty="0"/>
-              <a:t>Coffee Break with a TA!</a:t>
-            </a:r>
-          </a:p>
-        </p:txBody>
-      </p:sp>
-      <p:graphicFrame>
-        <p:nvGraphicFramePr>
-          <p:cNvPr id="3" name="Content Placeholder 3">
-            <a:extLst>
-              <a:ext uri="{FF2B5EF4-FFF2-40B4-BE49-F238E27FC236}">
-                <a16:creationId xmlns:a16="http://schemas.microsoft.com/office/drawing/2014/main" id="{3518B242-4036-E5CD-4828-41B98F2B7FE7}"/>
-              </a:ext>
-            </a:extLst>
-          </p:cNvPr>
-          <p:cNvGraphicFramePr>
-            <a:graphicFrameLocks noGrp="1"/>
-          </p:cNvGraphicFramePr>
-          <p:nvPr>
-            <p:ph idx="1"/>
-          </p:nvPr>
-        </p:nvGraphicFramePr>
-        <p:xfrm>
-          <a:off x="220299" y="3907301"/>
-          <a:ext cx="8269627" cy="2278380"/>
-        </p:xfrm>
-        <a:graphic>
-          <a:graphicData uri="http://schemas.openxmlformats.org/drawingml/2006/table">
-            <a:tbl>
-              <a:tblPr>
-                <a:tableStyleId>{638B1855-1B75-4FBE-930C-398BA8C253C6}</a:tableStyleId>
-              </a:tblPr>
-              <a:tblGrid>
-                <a:gridCol w="3112702">
-                  <a:extLst>
-                    <a:ext uri="{9D8B030D-6E8A-4147-A177-3AD203B41FA5}">
-                      <a16:colId xmlns:a16="http://schemas.microsoft.com/office/drawing/2014/main" val="1777798719"/>
-                    </a:ext>
-                  </a:extLst>
-                </a:gridCol>
-                <a:gridCol w="2938944">
-                  <a:extLst>
-                    <a:ext uri="{9D8B030D-6E8A-4147-A177-3AD203B41FA5}">
-                      <a16:colId xmlns:a16="http://schemas.microsoft.com/office/drawing/2014/main" val="1920957893"/>
-                    </a:ext>
-                  </a:extLst>
-                </a:gridCol>
-                <a:gridCol w="2217981">
-                  <a:extLst>
-                    <a:ext uri="{9D8B030D-6E8A-4147-A177-3AD203B41FA5}">
-                      <a16:colId xmlns:a16="http://schemas.microsoft.com/office/drawing/2014/main" val="3231986606"/>
-                    </a:ext>
-                  </a:extLst>
-                </a:gridCol>
-              </a:tblGrid>
-              <a:tr h="266700">
-                <a:tc>
-                  <a:txBody>
-                    <a:bodyPr/>
-                    <a:lstStyle/>
-                    <a:p>
-                      <a:pPr algn="ctr"/>
-                      <a:r>
-                        <a:rPr lang="en-CA" sz="2400" b="1" dirty="0">
-                          <a:effectLst/>
-                        </a:rPr>
-                        <a:t>Teaching Team</a:t>
-                      </a:r>
-                    </a:p>
-                  </a:txBody>
-                  <a:tcPr marL="19050" marR="19050" marT="19050" marB="19050" anchor="ctr">
-                    <a:lnL w="12700" cap="flat" cmpd="sng" algn="ctr">
-                      <a:solidFill>
-                        <a:schemeClr val="tx1"/>
-                      </a:solidFill>
-                      <a:prstDash val="solid"/>
-                      <a:round/>
-                      <a:headEnd type="none" w="med" len="med"/>
-                      <a:tailEnd type="none" w="med" len="med"/>
-                    </a:lnL>
-                    <a:lnR w="12700" cap="flat" cmpd="sng" algn="ctr">
-                      <a:solidFill>
-                        <a:schemeClr val="tx1"/>
-                      </a:solidFill>
-                      <a:prstDash val="solid"/>
-                      <a:round/>
-                      <a:headEnd type="none" w="med" len="med"/>
-                      <a:tailEnd type="none" w="med" len="med"/>
-                    </a:lnR>
-                    <a:lnT w="12700" cap="flat" cmpd="sng" algn="ctr">
-                      <a:solidFill>
-                        <a:schemeClr val="tx1"/>
-                      </a:solidFill>
-                      <a:prstDash val="solid"/>
-                      <a:round/>
-                      <a:headEnd type="none" w="med" len="med"/>
-                      <a:tailEnd type="none" w="med" len="med"/>
-                    </a:lnT>
-                    <a:lnB w="12700" cap="flat" cmpd="sng" algn="ctr">
-                      <a:solidFill>
-                        <a:schemeClr val="tx1"/>
-                      </a:solidFill>
-                      <a:prstDash val="solid"/>
-                      <a:round/>
-                      <a:headEnd type="none" w="med" len="med"/>
-                      <a:tailEnd type="none" w="med" len="med"/>
-                    </a:lnB>
-                  </a:tcPr>
-                </a:tc>
-                <a:tc>
-                  <a:txBody>
-                    <a:bodyPr/>
-                    <a:lstStyle/>
-                    <a:p>
-                      <a:pPr algn="ctr"/>
-                      <a:r>
-                        <a:rPr lang="en-CA" sz="2400" b="1" dirty="0">
-                          <a:effectLst/>
-                        </a:rPr>
-                        <a:t>Time</a:t>
-                      </a:r>
-                      <a:endParaRPr lang="en-CA" sz="2400" dirty="0">
-                        <a:effectLst/>
-                      </a:endParaRPr>
-                    </a:p>
-                  </a:txBody>
-                  <a:tcPr marL="19050" marR="19050" marT="19050" marB="19050" anchor="ctr">
-                    <a:lnL w="12700" cap="flat" cmpd="sng" algn="ctr">
-                      <a:solidFill>
-                        <a:schemeClr val="tx1"/>
-                      </a:solidFill>
-                      <a:prstDash val="solid"/>
-                      <a:round/>
-                      <a:headEnd type="none" w="med" len="med"/>
-                      <a:tailEnd type="none" w="med" len="med"/>
-                    </a:lnL>
-                    <a:lnR w="12700" cap="flat" cmpd="sng" algn="ctr">
-                      <a:solidFill>
-                        <a:schemeClr val="tx1"/>
-                      </a:solidFill>
-                      <a:prstDash val="solid"/>
-                      <a:round/>
-                      <a:headEnd type="none" w="med" len="med"/>
-                      <a:tailEnd type="none" w="med" len="med"/>
-                    </a:lnR>
-                    <a:lnT w="12700" cap="flat" cmpd="sng" algn="ctr">
-                      <a:solidFill>
-                        <a:schemeClr val="tx1"/>
-                      </a:solidFill>
-                      <a:prstDash val="solid"/>
-                      <a:round/>
-                      <a:headEnd type="none" w="med" len="med"/>
-                      <a:tailEnd type="none" w="med" len="med"/>
-                    </a:lnT>
-                    <a:lnB w="12700" cap="flat" cmpd="sng" algn="ctr">
-                      <a:solidFill>
-                        <a:schemeClr val="tx1"/>
-                      </a:solidFill>
-                      <a:prstDash val="solid"/>
-                      <a:round/>
-                      <a:headEnd type="none" w="med" len="med"/>
-                      <a:tailEnd type="none" w="med" len="med"/>
-                    </a:lnB>
-                  </a:tcPr>
-                </a:tc>
-                <a:tc>
-                  <a:txBody>
-                    <a:bodyPr/>
-                    <a:lstStyle/>
-                    <a:p>
-                      <a:pPr algn="ctr"/>
-                      <a:r>
-                        <a:rPr lang="en-CA" sz="2400" b="1" dirty="0">
-                          <a:effectLst/>
-                        </a:rPr>
-                        <a:t>Mode</a:t>
-                      </a:r>
-                    </a:p>
-                  </a:txBody>
-                  <a:tcPr marL="19050" marR="19050" marT="19050" marB="19050" anchor="ctr">
-                    <a:lnL w="12700" cap="flat" cmpd="sng" algn="ctr">
-                      <a:solidFill>
-                        <a:schemeClr val="tx1"/>
-                      </a:solidFill>
-                      <a:prstDash val="solid"/>
-                      <a:round/>
-                      <a:headEnd type="none" w="med" len="med"/>
-                      <a:tailEnd type="none" w="med" len="med"/>
-                    </a:lnL>
-                    <a:lnR w="12700" cap="flat" cmpd="sng" algn="ctr">
-                      <a:solidFill>
-                        <a:schemeClr val="tx1"/>
-                      </a:solidFill>
-                      <a:prstDash val="solid"/>
-                      <a:round/>
-                      <a:headEnd type="none" w="med" len="med"/>
-                      <a:tailEnd type="none" w="med" len="med"/>
-                    </a:lnR>
-                    <a:lnT w="12700" cap="flat" cmpd="sng" algn="ctr">
-                      <a:solidFill>
-                        <a:schemeClr val="tx1"/>
-                      </a:solidFill>
-                      <a:prstDash val="solid"/>
-                      <a:round/>
-                      <a:headEnd type="none" w="med" len="med"/>
-                      <a:tailEnd type="none" w="med" len="med"/>
-                    </a:lnT>
-                    <a:lnB w="12700" cap="flat" cmpd="sng" algn="ctr">
-                      <a:solidFill>
-                        <a:schemeClr val="tx1"/>
-                      </a:solidFill>
-                      <a:prstDash val="solid"/>
-                      <a:round/>
-                      <a:headEnd type="none" w="med" len="med"/>
-                      <a:tailEnd type="none" w="med" len="med"/>
-                    </a:lnB>
-                  </a:tcPr>
-                </a:tc>
-                <a:extLst>
-                  <a:ext uri="{0D108BD9-81ED-4DB2-BD59-A6C34878D82A}">
-                    <a16:rowId xmlns:a16="http://schemas.microsoft.com/office/drawing/2014/main" val="3386890843"/>
-                  </a:ext>
-                </a:extLst>
-              </a:tr>
-              <a:tr h="266700">
-                <a:tc>
-                  <a:txBody>
-                    <a:bodyPr/>
-                    <a:lstStyle/>
-                    <a:p>
-                      <a:pPr algn="ctr"/>
-                      <a:r>
-                        <a:rPr lang="en-GB" dirty="0">
-                          <a:effectLst/>
-                        </a:rPr>
-                        <a:t>Ben &amp; Seb</a:t>
-                      </a:r>
-                    </a:p>
-                  </a:txBody>
-                  <a:tcPr marL="19050" marR="19050" marT="19050" marB="19050" anchor="ctr">
-                    <a:lnL w="12700" cap="flat" cmpd="sng" algn="ctr">
-                      <a:solidFill>
-                        <a:schemeClr val="tx1"/>
-                      </a:solidFill>
-                      <a:prstDash val="solid"/>
-                      <a:round/>
-                      <a:headEnd type="none" w="med" len="med"/>
-                      <a:tailEnd type="none" w="med" len="med"/>
-                    </a:lnL>
-                    <a:lnR w="12700" cap="flat" cmpd="sng" algn="ctr">
-                      <a:solidFill>
-                        <a:schemeClr val="tx1"/>
-                      </a:solidFill>
-                      <a:prstDash val="solid"/>
-                      <a:round/>
-                      <a:headEnd type="none" w="med" len="med"/>
-                      <a:tailEnd type="none" w="med" len="med"/>
-                    </a:lnR>
-                    <a:lnT w="12700" cap="flat" cmpd="sng" algn="ctr">
-                      <a:solidFill>
-                        <a:schemeClr val="tx1"/>
-                      </a:solidFill>
-                      <a:prstDash val="solid"/>
-                      <a:round/>
-                      <a:headEnd type="none" w="med" len="med"/>
-                      <a:tailEnd type="none" w="med" len="med"/>
-                    </a:lnT>
-                    <a:lnB w="12700" cap="flat" cmpd="sng" algn="ctr">
-                      <a:solidFill>
-                        <a:schemeClr val="tx1"/>
-                      </a:solidFill>
-                      <a:prstDash val="solid"/>
-                      <a:round/>
-                      <a:headEnd type="none" w="med" len="med"/>
-                      <a:tailEnd type="none" w="med" len="med"/>
-                    </a:lnB>
-                  </a:tcPr>
-                </a:tc>
-                <a:tc>
-                  <a:txBody>
-                    <a:bodyPr/>
-                    <a:lstStyle/>
-                    <a:p>
-                      <a:pPr algn="ctr"/>
-                      <a:r>
-                        <a:rPr lang="en-GB" dirty="0">
-                          <a:effectLst/>
-                        </a:rPr>
-                        <a:t>Fridays 2 - 3 PM</a:t>
-                      </a:r>
-                    </a:p>
-                  </a:txBody>
-                  <a:tcPr marL="19050" marR="19050" marT="19050" marB="19050" anchor="ctr">
-                    <a:lnL w="12700" cap="flat" cmpd="sng" algn="ctr">
-                      <a:solidFill>
-                        <a:schemeClr val="tx1"/>
-                      </a:solidFill>
-                      <a:prstDash val="solid"/>
-                      <a:round/>
-                      <a:headEnd type="none" w="med" len="med"/>
-                      <a:tailEnd type="none" w="med" len="med"/>
-                    </a:lnL>
-                    <a:lnR w="12700" cap="flat" cmpd="sng" algn="ctr">
-                      <a:solidFill>
-                        <a:schemeClr val="tx1"/>
-                      </a:solidFill>
-                      <a:prstDash val="solid"/>
-                      <a:round/>
-                      <a:headEnd type="none" w="med" len="med"/>
-                      <a:tailEnd type="none" w="med" len="med"/>
-                    </a:lnR>
-                    <a:lnT w="12700" cap="flat" cmpd="sng" algn="ctr">
-                      <a:solidFill>
-                        <a:schemeClr val="tx1"/>
-                      </a:solidFill>
-                      <a:prstDash val="solid"/>
-                      <a:round/>
-                      <a:headEnd type="none" w="med" len="med"/>
-                      <a:tailEnd type="none" w="med" len="med"/>
-                    </a:lnT>
-                    <a:lnB w="12700" cap="flat" cmpd="sng" algn="ctr">
-                      <a:solidFill>
-                        <a:schemeClr val="tx1"/>
-                      </a:solidFill>
-                      <a:prstDash val="solid"/>
-                      <a:round/>
-                      <a:headEnd type="none" w="med" len="med"/>
-                      <a:tailEnd type="none" w="med" len="med"/>
-                    </a:lnB>
-                  </a:tcPr>
-                </a:tc>
-                <a:tc>
-                  <a:txBody>
-                    <a:bodyPr/>
-                    <a:lstStyle/>
-                    <a:p>
-                      <a:pPr algn="ctr"/>
-                      <a:r>
-                        <a:rPr lang="en-GB" dirty="0">
-                          <a:effectLst/>
-                        </a:rPr>
-                        <a:t>MY765</a:t>
-                      </a:r>
-                    </a:p>
-                  </a:txBody>
-                  <a:tcPr marL="19050" marR="19050" marT="19050" marB="19050" anchor="ctr">
-                    <a:lnL w="12700" cap="flat" cmpd="sng" algn="ctr">
-                      <a:solidFill>
-                        <a:schemeClr val="tx1"/>
-                      </a:solidFill>
-                      <a:prstDash val="solid"/>
-                      <a:round/>
-                      <a:headEnd type="none" w="med" len="med"/>
-                      <a:tailEnd type="none" w="med" len="med"/>
-                    </a:lnL>
-                    <a:lnR w="12700" cap="flat" cmpd="sng" algn="ctr">
-                      <a:solidFill>
-                        <a:schemeClr val="tx1"/>
-                      </a:solidFill>
-                      <a:prstDash val="solid"/>
-                      <a:round/>
-                      <a:headEnd type="none" w="med" len="med"/>
-                      <a:tailEnd type="none" w="med" len="med"/>
-                    </a:lnR>
-                    <a:lnT w="12700" cap="flat" cmpd="sng" algn="ctr">
-                      <a:solidFill>
-                        <a:schemeClr val="tx1"/>
-                      </a:solidFill>
-                      <a:prstDash val="solid"/>
-                      <a:round/>
-                      <a:headEnd type="none" w="med" len="med"/>
-                      <a:tailEnd type="none" w="med" len="med"/>
-                    </a:lnT>
-                    <a:lnB w="12700" cap="flat" cmpd="sng" algn="ctr">
-                      <a:solidFill>
-                        <a:schemeClr val="tx1"/>
-                      </a:solidFill>
-                      <a:prstDash val="solid"/>
-                      <a:round/>
-                      <a:headEnd type="none" w="med" len="med"/>
-                      <a:tailEnd type="none" w="med" len="med"/>
-                    </a:lnB>
-                  </a:tcPr>
-                </a:tc>
-                <a:extLst>
-                  <a:ext uri="{0D108BD9-81ED-4DB2-BD59-A6C34878D82A}">
-                    <a16:rowId xmlns:a16="http://schemas.microsoft.com/office/drawing/2014/main" val="578743435"/>
-                  </a:ext>
-                </a:extLst>
-              </a:tr>
-              <a:tr h="266700">
-                <a:tc>
-                  <a:txBody>
-                    <a:bodyPr/>
-                    <a:lstStyle/>
-                    <a:p>
-                      <a:pPr algn="ctr"/>
-                      <a:r>
-                        <a:rPr lang="en-GB" dirty="0">
-                          <a:effectLst/>
-                        </a:rPr>
-                        <a:t>Michael </a:t>
-                      </a:r>
-                      <a:r>
-                        <a:rPr lang="en-GB" dirty="0" err="1">
-                          <a:effectLst/>
-                        </a:rPr>
-                        <a:t>Tisi</a:t>
-                      </a:r>
-                      <a:endParaRPr lang="en-GB" dirty="0">
-                        <a:effectLst/>
-                      </a:endParaRPr>
-                    </a:p>
-                  </a:txBody>
-                  <a:tcPr marL="19050" marR="19050" marT="19050" marB="19050" anchor="ctr">
-                    <a:lnL w="12700" cap="flat" cmpd="sng" algn="ctr">
-                      <a:solidFill>
-                        <a:schemeClr val="tx1"/>
-                      </a:solidFill>
-                      <a:prstDash val="solid"/>
-                      <a:round/>
-                      <a:headEnd type="none" w="med" len="med"/>
-                      <a:tailEnd type="none" w="med" len="med"/>
-                    </a:lnL>
-                    <a:lnR w="12700" cap="flat" cmpd="sng" algn="ctr">
-                      <a:solidFill>
-                        <a:schemeClr val="tx1"/>
-                      </a:solidFill>
-                      <a:prstDash val="solid"/>
-                      <a:round/>
-                      <a:headEnd type="none" w="med" len="med"/>
-                      <a:tailEnd type="none" w="med" len="med"/>
-                    </a:lnR>
-                    <a:lnT w="12700" cap="flat" cmpd="sng" algn="ctr">
-                      <a:solidFill>
-                        <a:schemeClr val="tx1"/>
-                      </a:solidFill>
-                      <a:prstDash val="solid"/>
-                      <a:round/>
-                      <a:headEnd type="none" w="med" len="med"/>
-                      <a:tailEnd type="none" w="med" len="med"/>
-                    </a:lnT>
-                    <a:lnB w="12700" cap="flat" cmpd="sng" algn="ctr">
-                      <a:solidFill>
-                        <a:schemeClr val="tx1"/>
-                      </a:solidFill>
-                      <a:prstDash val="solid"/>
-                      <a:round/>
-                      <a:headEnd type="none" w="med" len="med"/>
-                      <a:tailEnd type="none" w="med" len="med"/>
-                    </a:lnB>
-                  </a:tcPr>
-                </a:tc>
-                <a:tc>
-                  <a:txBody>
-                    <a:bodyPr/>
-                    <a:lstStyle/>
-                    <a:p>
-                      <a:pPr algn="ctr"/>
-                      <a:r>
-                        <a:rPr lang="en-GB" dirty="0">
-                          <a:effectLst/>
-                        </a:rPr>
-                        <a:t>Fridays 10 - 11 AM</a:t>
-                      </a:r>
-                    </a:p>
-                  </a:txBody>
-                  <a:tcPr marL="19050" marR="19050" marT="19050" marB="19050" anchor="ctr">
-                    <a:lnL w="12700" cap="flat" cmpd="sng" algn="ctr">
-                      <a:solidFill>
-                        <a:schemeClr val="tx1"/>
-                      </a:solidFill>
-                      <a:prstDash val="solid"/>
-                      <a:round/>
-                      <a:headEnd type="none" w="med" len="med"/>
-                      <a:tailEnd type="none" w="med" len="med"/>
-                    </a:lnL>
-                    <a:lnR w="12700" cap="flat" cmpd="sng" algn="ctr">
-                      <a:solidFill>
-                        <a:schemeClr val="tx1"/>
-                      </a:solidFill>
-                      <a:prstDash val="solid"/>
-                      <a:round/>
-                      <a:headEnd type="none" w="med" len="med"/>
-                      <a:tailEnd type="none" w="med" len="med"/>
-                    </a:lnR>
-                    <a:lnT w="12700" cap="flat" cmpd="sng" algn="ctr">
-                      <a:solidFill>
-                        <a:schemeClr val="tx1"/>
-                      </a:solidFill>
-                      <a:prstDash val="solid"/>
-                      <a:round/>
-                      <a:headEnd type="none" w="med" len="med"/>
-                      <a:tailEnd type="none" w="med" len="med"/>
-                    </a:lnT>
-                    <a:lnB w="12700" cap="flat" cmpd="sng" algn="ctr">
-                      <a:solidFill>
-                        <a:schemeClr val="tx1"/>
-                      </a:solidFill>
-                      <a:prstDash val="solid"/>
-                      <a:round/>
-                      <a:headEnd type="none" w="med" len="med"/>
-                      <a:tailEnd type="none" w="med" len="med"/>
-                    </a:lnB>
-                  </a:tcPr>
-                </a:tc>
-                <a:tc>
-                  <a:txBody>
-                    <a:bodyPr/>
-                    <a:lstStyle/>
-                    <a:p>
-                      <a:pPr algn="ctr"/>
-                      <a:r>
-                        <a:rPr lang="en-GB" dirty="0">
-                          <a:effectLst/>
-                        </a:rPr>
-                        <a:t>Online</a:t>
-                      </a:r>
-                    </a:p>
-                  </a:txBody>
-                  <a:tcPr marL="19050" marR="19050" marT="19050" marB="19050" anchor="ctr">
-                    <a:lnL w="12700" cap="flat" cmpd="sng" algn="ctr">
-                      <a:solidFill>
-                        <a:schemeClr val="tx1"/>
-                      </a:solidFill>
-                      <a:prstDash val="solid"/>
-                      <a:round/>
-                      <a:headEnd type="none" w="med" len="med"/>
-                      <a:tailEnd type="none" w="med" len="med"/>
-                    </a:lnL>
-                    <a:lnR w="12700" cap="flat" cmpd="sng" algn="ctr">
-                      <a:solidFill>
-                        <a:schemeClr val="tx1"/>
-                      </a:solidFill>
-                      <a:prstDash val="solid"/>
-                      <a:round/>
-                      <a:headEnd type="none" w="med" len="med"/>
-                      <a:tailEnd type="none" w="med" len="med"/>
-                    </a:lnR>
-                    <a:lnT w="12700" cap="flat" cmpd="sng" algn="ctr">
-                      <a:solidFill>
-                        <a:schemeClr val="tx1"/>
-                      </a:solidFill>
-                      <a:prstDash val="solid"/>
-                      <a:round/>
-                      <a:headEnd type="none" w="med" len="med"/>
-                      <a:tailEnd type="none" w="med" len="med"/>
-                    </a:lnT>
-                    <a:lnB w="12700" cap="flat" cmpd="sng" algn="ctr">
-                      <a:solidFill>
-                        <a:schemeClr val="tx1"/>
-                      </a:solidFill>
-                      <a:prstDash val="solid"/>
-                      <a:round/>
-                      <a:headEnd type="none" w="med" len="med"/>
-                      <a:tailEnd type="none" w="med" len="med"/>
-                    </a:lnB>
-                  </a:tcPr>
-                </a:tc>
-                <a:extLst>
-                  <a:ext uri="{0D108BD9-81ED-4DB2-BD59-A6C34878D82A}">
-                    <a16:rowId xmlns:a16="http://schemas.microsoft.com/office/drawing/2014/main" val="1980024727"/>
-                  </a:ext>
-                </a:extLst>
-              </a:tr>
-              <a:tr h="266700">
-                <a:tc>
-                  <a:txBody>
-                    <a:bodyPr/>
-                    <a:lstStyle/>
-                    <a:p>
-                      <a:pPr algn="ctr"/>
-                      <a:r>
-                        <a:rPr lang="en-GB">
-                          <a:effectLst/>
-                        </a:rPr>
-                        <a:t>Thomas Pruyn</a:t>
-                      </a:r>
-                    </a:p>
-                  </a:txBody>
-                  <a:tcPr marL="19050" marR="19050" marT="19050" marB="19050" anchor="ctr">
-                    <a:lnL w="12700" cap="flat" cmpd="sng" algn="ctr">
-                      <a:solidFill>
-                        <a:schemeClr val="tx1"/>
-                      </a:solidFill>
-                      <a:prstDash val="solid"/>
-                      <a:round/>
-                      <a:headEnd type="none" w="med" len="med"/>
-                      <a:tailEnd type="none" w="med" len="med"/>
-                    </a:lnL>
-                    <a:lnR w="12700" cap="flat" cmpd="sng" algn="ctr">
-                      <a:solidFill>
-                        <a:schemeClr val="tx1"/>
-                      </a:solidFill>
-                      <a:prstDash val="solid"/>
-                      <a:round/>
-                      <a:headEnd type="none" w="med" len="med"/>
-                      <a:tailEnd type="none" w="med" len="med"/>
-                    </a:lnR>
-                    <a:lnT w="12700" cap="flat" cmpd="sng" algn="ctr">
-                      <a:solidFill>
-                        <a:schemeClr val="tx1"/>
-                      </a:solidFill>
-                      <a:prstDash val="solid"/>
-                      <a:round/>
-                      <a:headEnd type="none" w="med" len="med"/>
-                      <a:tailEnd type="none" w="med" len="med"/>
-                    </a:lnT>
-                    <a:lnB w="12700" cap="flat" cmpd="sng" algn="ctr">
-                      <a:solidFill>
-                        <a:schemeClr val="tx1"/>
-                      </a:solidFill>
-                      <a:prstDash val="solid"/>
-                      <a:round/>
-                      <a:headEnd type="none" w="med" len="med"/>
-                      <a:tailEnd type="none" w="med" len="med"/>
-                    </a:lnB>
-                  </a:tcPr>
-                </a:tc>
-                <a:tc>
-                  <a:txBody>
-                    <a:bodyPr/>
-                    <a:lstStyle/>
-                    <a:p>
-                      <a:pPr algn="ctr"/>
-                      <a:r>
-                        <a:rPr lang="en-GB" dirty="0">
-                          <a:effectLst/>
-                        </a:rPr>
-                        <a:t>Mondays 3-4 PM</a:t>
-                      </a:r>
-                    </a:p>
-                  </a:txBody>
-                  <a:tcPr marL="19050" marR="19050" marT="19050" marB="19050" anchor="ctr">
-                    <a:lnL w="12700" cap="flat" cmpd="sng" algn="ctr">
-                      <a:solidFill>
-                        <a:schemeClr val="tx1"/>
-                      </a:solidFill>
-                      <a:prstDash val="solid"/>
-                      <a:round/>
-                      <a:headEnd type="none" w="med" len="med"/>
-                      <a:tailEnd type="none" w="med" len="med"/>
-                    </a:lnL>
-                    <a:lnR w="12700" cap="flat" cmpd="sng" algn="ctr">
-                      <a:solidFill>
-                        <a:schemeClr val="tx1"/>
-                      </a:solidFill>
-                      <a:prstDash val="solid"/>
-                      <a:round/>
-                      <a:headEnd type="none" w="med" len="med"/>
-                      <a:tailEnd type="none" w="med" len="med"/>
-                    </a:lnR>
-                    <a:lnT w="12700" cap="flat" cmpd="sng" algn="ctr">
-                      <a:solidFill>
-                        <a:schemeClr val="tx1"/>
-                      </a:solidFill>
-                      <a:prstDash val="solid"/>
-                      <a:round/>
-                      <a:headEnd type="none" w="med" len="med"/>
-                      <a:tailEnd type="none" w="med" len="med"/>
-                    </a:lnT>
-                    <a:lnB w="12700" cap="flat" cmpd="sng" algn="ctr">
-                      <a:solidFill>
-                        <a:schemeClr val="tx1"/>
-                      </a:solidFill>
-                      <a:prstDash val="solid"/>
-                      <a:round/>
-                      <a:headEnd type="none" w="med" len="med"/>
-                      <a:tailEnd type="none" w="med" len="med"/>
-                    </a:lnB>
-                  </a:tcPr>
-                </a:tc>
-                <a:tc>
-                  <a:txBody>
-                    <a:bodyPr/>
-                    <a:lstStyle/>
-                    <a:p>
-                      <a:pPr algn="ctr"/>
-                      <a:r>
-                        <a:rPr lang="en-GB" dirty="0">
-                          <a:effectLst/>
-                        </a:rPr>
-                        <a:t>WB255 and Online</a:t>
-                      </a:r>
-                    </a:p>
-                  </a:txBody>
-                  <a:tcPr marL="19050" marR="19050" marT="19050" marB="19050" anchor="ctr">
-                    <a:lnL w="12700" cap="flat" cmpd="sng" algn="ctr">
-                      <a:solidFill>
-                        <a:schemeClr val="tx1"/>
-                      </a:solidFill>
-                      <a:prstDash val="solid"/>
-                      <a:round/>
-                      <a:headEnd type="none" w="med" len="med"/>
-                      <a:tailEnd type="none" w="med" len="med"/>
-                    </a:lnL>
-                    <a:lnR w="12700" cap="flat" cmpd="sng" algn="ctr">
-                      <a:solidFill>
-                        <a:schemeClr val="tx1"/>
-                      </a:solidFill>
-                      <a:prstDash val="solid"/>
-                      <a:round/>
-                      <a:headEnd type="none" w="med" len="med"/>
-                      <a:tailEnd type="none" w="med" len="med"/>
-                    </a:lnR>
-                    <a:lnT w="12700" cap="flat" cmpd="sng" algn="ctr">
-                      <a:solidFill>
-                        <a:schemeClr val="tx1"/>
-                      </a:solidFill>
-                      <a:prstDash val="solid"/>
-                      <a:round/>
-                      <a:headEnd type="none" w="med" len="med"/>
-                      <a:tailEnd type="none" w="med" len="med"/>
-                    </a:lnT>
-                    <a:lnB w="12700" cap="flat" cmpd="sng" algn="ctr">
-                      <a:solidFill>
-                        <a:schemeClr val="tx1"/>
-                      </a:solidFill>
-                      <a:prstDash val="solid"/>
-                      <a:round/>
-                      <a:headEnd type="none" w="med" len="med"/>
-                      <a:tailEnd type="none" w="med" len="med"/>
-                    </a:lnB>
-                  </a:tcPr>
-                </a:tc>
-                <a:extLst>
-                  <a:ext uri="{0D108BD9-81ED-4DB2-BD59-A6C34878D82A}">
-                    <a16:rowId xmlns:a16="http://schemas.microsoft.com/office/drawing/2014/main" val="201774030"/>
-                  </a:ext>
-                </a:extLst>
-              </a:tr>
-              <a:tr h="266700">
-                <a:tc>
-                  <a:txBody>
-                    <a:bodyPr/>
-                    <a:lstStyle/>
-                    <a:p>
-                      <a:pPr algn="ctr"/>
-                      <a:r>
-                        <a:rPr lang="en-GB">
-                          <a:effectLst/>
-                        </a:rPr>
-                        <a:t>Mo Saneii</a:t>
-                      </a:r>
-                    </a:p>
-                  </a:txBody>
-                  <a:tcPr marL="19050" marR="19050" marT="19050" marB="19050" anchor="ctr">
-                    <a:lnL w="12700" cap="flat" cmpd="sng" algn="ctr">
-                      <a:solidFill>
-                        <a:schemeClr val="tx1"/>
-                      </a:solidFill>
-                      <a:prstDash val="solid"/>
-                      <a:round/>
-                      <a:headEnd type="none" w="med" len="med"/>
-                      <a:tailEnd type="none" w="med" len="med"/>
-                    </a:lnL>
-                    <a:lnR w="12700" cap="flat" cmpd="sng" algn="ctr">
-                      <a:solidFill>
-                        <a:schemeClr val="tx1"/>
-                      </a:solidFill>
-                      <a:prstDash val="solid"/>
-                      <a:round/>
-                      <a:headEnd type="none" w="med" len="med"/>
-                      <a:tailEnd type="none" w="med" len="med"/>
-                    </a:lnR>
-                    <a:lnT w="12700" cap="flat" cmpd="sng" algn="ctr">
-                      <a:solidFill>
-                        <a:schemeClr val="tx1"/>
-                      </a:solidFill>
-                      <a:prstDash val="solid"/>
-                      <a:round/>
-                      <a:headEnd type="none" w="med" len="med"/>
-                      <a:tailEnd type="none" w="med" len="med"/>
-                    </a:lnT>
-                    <a:lnB w="12700" cap="flat" cmpd="sng" algn="ctr">
-                      <a:solidFill>
-                        <a:schemeClr val="tx1"/>
-                      </a:solidFill>
-                      <a:prstDash val="solid"/>
-                      <a:round/>
-                      <a:headEnd type="none" w="med" len="med"/>
-                      <a:tailEnd type="none" w="med" len="med"/>
-                    </a:lnB>
-                  </a:tcPr>
-                </a:tc>
-                <a:tc>
-                  <a:txBody>
-                    <a:bodyPr/>
-                    <a:lstStyle/>
-                    <a:p>
-                      <a:pPr algn="ctr">
-                        <a:spcBef>
-                          <a:spcPts val="900"/>
-                        </a:spcBef>
-                        <a:spcAft>
-                          <a:spcPts val="900"/>
-                        </a:spcAft>
-                      </a:pPr>
-                      <a:r>
-                        <a:rPr lang="en-GB" dirty="0">
-                          <a:effectLst/>
-                        </a:rPr>
-                        <a:t>Tuesdays 3 - 4 PM</a:t>
-                      </a:r>
-                    </a:p>
-                  </a:txBody>
-                  <a:tcPr marL="19050" marR="19050" marT="19050" marB="19050" anchor="ctr">
-                    <a:lnL w="12700" cap="flat" cmpd="sng" algn="ctr">
-                      <a:solidFill>
-                        <a:schemeClr val="tx1"/>
-                      </a:solidFill>
-                      <a:prstDash val="solid"/>
-                      <a:round/>
-                      <a:headEnd type="none" w="med" len="med"/>
-                      <a:tailEnd type="none" w="med" len="med"/>
-                    </a:lnL>
-                    <a:lnR w="12700" cap="flat" cmpd="sng" algn="ctr">
-                      <a:solidFill>
-                        <a:schemeClr val="tx1"/>
-                      </a:solidFill>
-                      <a:prstDash val="solid"/>
-                      <a:round/>
-                      <a:headEnd type="none" w="med" len="med"/>
-                      <a:tailEnd type="none" w="med" len="med"/>
-                    </a:lnR>
-                    <a:lnT w="12700" cap="flat" cmpd="sng" algn="ctr">
-                      <a:solidFill>
-                        <a:schemeClr val="tx1"/>
-                      </a:solidFill>
-                      <a:prstDash val="solid"/>
-                      <a:round/>
-                      <a:headEnd type="none" w="med" len="med"/>
-                      <a:tailEnd type="none" w="med" len="med"/>
-                    </a:lnT>
-                    <a:lnB w="12700" cap="flat" cmpd="sng" algn="ctr">
-                      <a:solidFill>
-                        <a:schemeClr val="tx1"/>
-                      </a:solidFill>
-                      <a:prstDash val="solid"/>
-                      <a:round/>
-                      <a:headEnd type="none" w="med" len="med"/>
-                      <a:tailEnd type="none" w="med" len="med"/>
-                    </a:lnB>
-                  </a:tcPr>
-                </a:tc>
-                <a:tc>
-                  <a:txBody>
-                    <a:bodyPr/>
-                    <a:lstStyle/>
-                    <a:p>
-                      <a:pPr algn="ctr">
-                        <a:spcBef>
-                          <a:spcPts val="900"/>
-                        </a:spcBef>
-                        <a:spcAft>
-                          <a:spcPts val="900"/>
-                        </a:spcAft>
-                      </a:pPr>
-                      <a:r>
-                        <a:rPr lang="en-GB" dirty="0">
-                          <a:effectLst/>
-                        </a:rPr>
-                        <a:t>Online</a:t>
-                      </a:r>
-                    </a:p>
-                  </a:txBody>
-                  <a:tcPr marL="19050" marR="19050" marT="19050" marB="19050" anchor="ctr">
-                    <a:lnL w="12700" cap="flat" cmpd="sng" algn="ctr">
-                      <a:solidFill>
-                        <a:schemeClr val="tx1"/>
-                      </a:solidFill>
-                      <a:prstDash val="solid"/>
-                      <a:round/>
-                      <a:headEnd type="none" w="med" len="med"/>
-                      <a:tailEnd type="none" w="med" len="med"/>
-                    </a:lnL>
-                    <a:lnR w="12700" cap="flat" cmpd="sng" algn="ctr">
-                      <a:solidFill>
-                        <a:schemeClr val="tx1"/>
-                      </a:solidFill>
-                      <a:prstDash val="solid"/>
-                      <a:round/>
-                      <a:headEnd type="none" w="med" len="med"/>
-                      <a:tailEnd type="none" w="med" len="med"/>
-                    </a:lnR>
-                    <a:lnT w="12700" cap="flat" cmpd="sng" algn="ctr">
-                      <a:solidFill>
-                        <a:schemeClr val="tx1"/>
-                      </a:solidFill>
-                      <a:prstDash val="solid"/>
-                      <a:round/>
-                      <a:headEnd type="none" w="med" len="med"/>
-                      <a:tailEnd type="none" w="med" len="med"/>
-                    </a:lnT>
-                    <a:lnB w="12700" cap="flat" cmpd="sng" algn="ctr">
-                      <a:solidFill>
-                        <a:schemeClr val="tx1"/>
-                      </a:solidFill>
-                      <a:prstDash val="solid"/>
-                      <a:round/>
-                      <a:headEnd type="none" w="med" len="med"/>
-                      <a:tailEnd type="none" w="med" len="med"/>
-                    </a:lnB>
-                  </a:tcPr>
-                </a:tc>
-                <a:extLst>
-                  <a:ext uri="{0D108BD9-81ED-4DB2-BD59-A6C34878D82A}">
-                    <a16:rowId xmlns:a16="http://schemas.microsoft.com/office/drawing/2014/main" val="980093945"/>
-                  </a:ext>
-                </a:extLst>
-              </a:tr>
-              <a:tr h="266700">
-                <a:tc>
-                  <a:txBody>
-                    <a:bodyPr/>
-                    <a:lstStyle/>
-                    <a:p>
-                      <a:pPr algn="ctr"/>
-                      <a:r>
-                        <a:rPr lang="en-GB">
-                          <a:effectLst/>
-                        </a:rPr>
-                        <a:t>Rachel Leung</a:t>
-                      </a:r>
-                    </a:p>
-                  </a:txBody>
-                  <a:tcPr marL="19050" marR="19050" marT="19050" marB="19050" anchor="ctr">
-                    <a:lnL w="12700" cap="flat" cmpd="sng" algn="ctr">
-                      <a:solidFill>
-                        <a:schemeClr val="tx1"/>
-                      </a:solidFill>
-                      <a:prstDash val="solid"/>
-                      <a:round/>
-                      <a:headEnd type="none" w="med" len="med"/>
-                      <a:tailEnd type="none" w="med" len="med"/>
-                    </a:lnL>
-                    <a:lnR w="12700" cap="flat" cmpd="sng" algn="ctr">
-                      <a:solidFill>
-                        <a:schemeClr val="tx1"/>
-                      </a:solidFill>
-                      <a:prstDash val="solid"/>
-                      <a:round/>
-                      <a:headEnd type="none" w="med" len="med"/>
-                      <a:tailEnd type="none" w="med" len="med"/>
-                    </a:lnR>
-                    <a:lnT w="12700" cap="flat" cmpd="sng" algn="ctr">
-                      <a:solidFill>
-                        <a:schemeClr val="tx1"/>
-                      </a:solidFill>
-                      <a:prstDash val="solid"/>
-                      <a:round/>
-                      <a:headEnd type="none" w="med" len="med"/>
-                      <a:tailEnd type="none" w="med" len="med"/>
-                    </a:lnT>
-                    <a:lnB w="12700" cap="flat" cmpd="sng" algn="ctr">
-                      <a:solidFill>
-                        <a:schemeClr val="tx1"/>
-                      </a:solidFill>
-                      <a:prstDash val="solid"/>
-                      <a:round/>
-                      <a:headEnd type="none" w="med" len="med"/>
-                      <a:tailEnd type="none" w="med" len="med"/>
-                    </a:lnB>
-                  </a:tcPr>
-                </a:tc>
-                <a:tc>
-                  <a:txBody>
-                    <a:bodyPr/>
-                    <a:lstStyle/>
-                    <a:p>
-                      <a:pPr algn="ctr">
-                        <a:spcBef>
-                          <a:spcPts val="900"/>
-                        </a:spcBef>
-                        <a:spcAft>
-                          <a:spcPts val="900"/>
-                        </a:spcAft>
-                      </a:pPr>
-                      <a:r>
-                        <a:rPr lang="en-GB" dirty="0">
-                          <a:effectLst/>
-                        </a:rPr>
-                        <a:t>Wednesdays 2-3PM</a:t>
-                      </a:r>
-                    </a:p>
-                  </a:txBody>
-                  <a:tcPr marL="19050" marR="19050" marT="19050" marB="19050" anchor="ctr">
-                    <a:lnL w="12700" cap="flat" cmpd="sng" algn="ctr">
-                      <a:solidFill>
-                        <a:schemeClr val="tx1"/>
-                      </a:solidFill>
-                      <a:prstDash val="solid"/>
-                      <a:round/>
-                      <a:headEnd type="none" w="med" len="med"/>
-                      <a:tailEnd type="none" w="med" len="med"/>
-                    </a:lnL>
-                    <a:lnR w="12700" cap="flat" cmpd="sng" algn="ctr">
-                      <a:solidFill>
-                        <a:schemeClr val="tx1"/>
-                      </a:solidFill>
-                      <a:prstDash val="solid"/>
-                      <a:round/>
-                      <a:headEnd type="none" w="med" len="med"/>
-                      <a:tailEnd type="none" w="med" len="med"/>
-                    </a:lnR>
-                    <a:lnT w="12700" cap="flat" cmpd="sng" algn="ctr">
-                      <a:solidFill>
-                        <a:schemeClr val="tx1"/>
-                      </a:solidFill>
-                      <a:prstDash val="solid"/>
-                      <a:round/>
-                      <a:headEnd type="none" w="med" len="med"/>
-                      <a:tailEnd type="none" w="med" len="med"/>
-                    </a:lnT>
-                    <a:lnB w="12700" cap="flat" cmpd="sng" algn="ctr">
-                      <a:solidFill>
-                        <a:schemeClr val="tx1"/>
-                      </a:solidFill>
-                      <a:prstDash val="solid"/>
-                      <a:round/>
-                      <a:headEnd type="none" w="med" len="med"/>
-                      <a:tailEnd type="none" w="med" len="med"/>
-                    </a:lnB>
-                  </a:tcPr>
-                </a:tc>
-                <a:tc>
-                  <a:txBody>
-                    <a:bodyPr/>
-                    <a:lstStyle/>
-                    <a:p>
-                      <a:pPr algn="ctr">
-                        <a:spcBef>
-                          <a:spcPts val="900"/>
-                        </a:spcBef>
-                        <a:spcAft>
-                          <a:spcPts val="900"/>
-                        </a:spcAft>
-                      </a:pPr>
-                      <a:r>
-                        <a:rPr lang="en-GB" dirty="0">
-                          <a:effectLst/>
-                        </a:rPr>
-                        <a:t>GB144 and Online</a:t>
-                      </a:r>
-                    </a:p>
-                  </a:txBody>
-                  <a:tcPr marL="19050" marR="19050" marT="19050" marB="19050" anchor="ctr">
-                    <a:lnL w="12700" cap="flat" cmpd="sng" algn="ctr">
-                      <a:solidFill>
-                        <a:schemeClr val="tx1"/>
-                      </a:solidFill>
-                      <a:prstDash val="solid"/>
-                      <a:round/>
-                      <a:headEnd type="none" w="med" len="med"/>
-                      <a:tailEnd type="none" w="med" len="med"/>
-                    </a:lnL>
-                    <a:lnR w="12700" cap="flat" cmpd="sng" algn="ctr">
-                      <a:solidFill>
-                        <a:schemeClr val="tx1"/>
-                      </a:solidFill>
-                      <a:prstDash val="solid"/>
-                      <a:round/>
-                      <a:headEnd type="none" w="med" len="med"/>
-                      <a:tailEnd type="none" w="med" len="med"/>
-                    </a:lnR>
-                    <a:lnT w="12700" cap="flat" cmpd="sng" algn="ctr">
-                      <a:solidFill>
-                        <a:schemeClr val="tx1"/>
-                      </a:solidFill>
-                      <a:prstDash val="solid"/>
-                      <a:round/>
-                      <a:headEnd type="none" w="med" len="med"/>
-                      <a:tailEnd type="none" w="med" len="med"/>
-                    </a:lnT>
-                    <a:lnB w="12700" cap="flat" cmpd="sng" algn="ctr">
-                      <a:solidFill>
-                        <a:schemeClr val="tx1"/>
-                      </a:solidFill>
-                      <a:prstDash val="solid"/>
-                      <a:round/>
-                      <a:headEnd type="none" w="med" len="med"/>
-                      <a:tailEnd type="none" w="med" len="med"/>
-                    </a:lnB>
-                  </a:tcPr>
-                </a:tc>
-                <a:extLst>
-                  <a:ext uri="{0D108BD9-81ED-4DB2-BD59-A6C34878D82A}">
-                    <a16:rowId xmlns:a16="http://schemas.microsoft.com/office/drawing/2014/main" val="3082340312"/>
-                  </a:ext>
-                </a:extLst>
-              </a:tr>
-              <a:tr h="266700">
-                <a:tc>
-                  <a:txBody>
-                    <a:bodyPr/>
-                    <a:lstStyle/>
-                    <a:p>
-                      <a:pPr algn="ctr"/>
-                      <a:r>
-                        <a:rPr lang="en-GB" dirty="0">
-                          <a:effectLst/>
-                        </a:rPr>
-                        <a:t>Hosein Seyed </a:t>
-                      </a:r>
-                      <a:r>
-                        <a:rPr lang="en-GB" dirty="0" err="1">
-                          <a:effectLst/>
-                        </a:rPr>
-                        <a:t>Ghafouri</a:t>
-                      </a:r>
-                      <a:endParaRPr lang="en-GB" dirty="0">
-                        <a:effectLst/>
-                      </a:endParaRPr>
-                    </a:p>
-                  </a:txBody>
-                  <a:tcPr marL="19050" marR="19050" marT="19050" marB="19050" anchor="ctr">
-                    <a:lnL w="12700" cap="flat" cmpd="sng" algn="ctr">
-                      <a:solidFill>
-                        <a:schemeClr val="tx1"/>
-                      </a:solidFill>
-                      <a:prstDash val="solid"/>
-                      <a:round/>
-                      <a:headEnd type="none" w="med" len="med"/>
-                      <a:tailEnd type="none" w="med" len="med"/>
-                    </a:lnL>
-                    <a:lnR w="12700" cap="flat" cmpd="sng" algn="ctr">
-                      <a:solidFill>
-                        <a:schemeClr val="tx1"/>
-                      </a:solidFill>
-                      <a:prstDash val="solid"/>
-                      <a:round/>
-                      <a:headEnd type="none" w="med" len="med"/>
-                      <a:tailEnd type="none" w="med" len="med"/>
-                    </a:lnR>
-                    <a:lnT w="12700" cap="flat" cmpd="sng" algn="ctr">
-                      <a:solidFill>
-                        <a:schemeClr val="tx1"/>
-                      </a:solidFill>
-                      <a:prstDash val="solid"/>
-                      <a:round/>
-                      <a:headEnd type="none" w="med" len="med"/>
-                      <a:tailEnd type="none" w="med" len="med"/>
-                    </a:lnT>
-                    <a:lnB w="12700" cap="flat" cmpd="sng" algn="ctr">
-                      <a:solidFill>
-                        <a:schemeClr val="tx1"/>
-                      </a:solidFill>
-                      <a:prstDash val="solid"/>
-                      <a:round/>
-                      <a:headEnd type="none" w="med" len="med"/>
-                      <a:tailEnd type="none" w="med" len="med"/>
-                    </a:lnB>
-                  </a:tcPr>
-                </a:tc>
-                <a:tc>
-                  <a:txBody>
-                    <a:bodyPr/>
-                    <a:lstStyle/>
-                    <a:p>
-                      <a:pPr algn="ctr">
-                        <a:spcBef>
-                          <a:spcPts val="900"/>
-                        </a:spcBef>
-                        <a:spcAft>
-                          <a:spcPts val="900"/>
-                        </a:spcAft>
-                      </a:pPr>
-                      <a:r>
-                        <a:rPr lang="en-GB" dirty="0">
-                          <a:effectLst/>
-                        </a:rPr>
-                        <a:t>Mondays 5 - 6 PM</a:t>
-                      </a:r>
-                    </a:p>
-                  </a:txBody>
-                  <a:tcPr marL="19050" marR="19050" marT="19050" marB="19050" anchor="ctr">
-                    <a:lnL w="12700" cap="flat" cmpd="sng" algn="ctr">
-                      <a:solidFill>
-                        <a:schemeClr val="tx1"/>
-                      </a:solidFill>
-                      <a:prstDash val="solid"/>
-                      <a:round/>
-                      <a:headEnd type="none" w="med" len="med"/>
-                      <a:tailEnd type="none" w="med" len="med"/>
-                    </a:lnL>
-                    <a:lnR w="12700" cap="flat" cmpd="sng" algn="ctr">
-                      <a:solidFill>
-                        <a:schemeClr val="tx1"/>
-                      </a:solidFill>
-                      <a:prstDash val="solid"/>
-                      <a:round/>
-                      <a:headEnd type="none" w="med" len="med"/>
-                      <a:tailEnd type="none" w="med" len="med"/>
-                    </a:lnR>
-                    <a:lnT w="12700" cap="flat" cmpd="sng" algn="ctr">
-                      <a:solidFill>
-                        <a:schemeClr val="tx1"/>
-                      </a:solidFill>
-                      <a:prstDash val="solid"/>
-                      <a:round/>
-                      <a:headEnd type="none" w="med" len="med"/>
-                      <a:tailEnd type="none" w="med" len="med"/>
-                    </a:lnT>
-                    <a:lnB w="12700" cap="flat" cmpd="sng" algn="ctr">
-                      <a:solidFill>
-                        <a:schemeClr val="tx1"/>
-                      </a:solidFill>
-                      <a:prstDash val="solid"/>
-                      <a:round/>
-                      <a:headEnd type="none" w="med" len="med"/>
-                      <a:tailEnd type="none" w="med" len="med"/>
-                    </a:lnB>
-                  </a:tcPr>
-                </a:tc>
-                <a:tc>
-                  <a:txBody>
-                    <a:bodyPr/>
-                    <a:lstStyle/>
-                    <a:p>
-                      <a:pPr algn="ctr">
-                        <a:spcBef>
-                          <a:spcPts val="900"/>
-                        </a:spcBef>
-                        <a:spcAft>
-                          <a:spcPts val="900"/>
-                        </a:spcAft>
-                      </a:pPr>
-                      <a:r>
-                        <a:rPr lang="en-GB" dirty="0">
-                          <a:effectLst/>
-                        </a:rPr>
-                        <a:t>Online</a:t>
-                      </a:r>
-                    </a:p>
-                  </a:txBody>
-                  <a:tcPr marL="19050" marR="19050" marT="19050" marB="19050" anchor="ctr">
-                    <a:lnL w="12700" cap="flat" cmpd="sng" algn="ctr">
-                      <a:solidFill>
-                        <a:schemeClr val="tx1"/>
-                      </a:solidFill>
-                      <a:prstDash val="solid"/>
-                      <a:round/>
-                      <a:headEnd type="none" w="med" len="med"/>
-                      <a:tailEnd type="none" w="med" len="med"/>
-                    </a:lnL>
-                    <a:lnR w="12700" cap="flat" cmpd="sng" algn="ctr">
-                      <a:solidFill>
-                        <a:schemeClr val="tx1"/>
-                      </a:solidFill>
-                      <a:prstDash val="solid"/>
-                      <a:round/>
-                      <a:headEnd type="none" w="med" len="med"/>
-                      <a:tailEnd type="none" w="med" len="med"/>
-                    </a:lnR>
-                    <a:lnT w="12700" cap="flat" cmpd="sng" algn="ctr">
-                      <a:solidFill>
-                        <a:schemeClr val="tx1"/>
-                      </a:solidFill>
-                      <a:prstDash val="solid"/>
-                      <a:round/>
-                      <a:headEnd type="none" w="med" len="med"/>
-                      <a:tailEnd type="none" w="med" len="med"/>
-                    </a:lnT>
-                    <a:lnB w="12700" cap="flat" cmpd="sng" algn="ctr">
-                      <a:solidFill>
-                        <a:schemeClr val="tx1"/>
-                      </a:solidFill>
-                      <a:prstDash val="solid"/>
-                      <a:round/>
-                      <a:headEnd type="none" w="med" len="med"/>
-                      <a:tailEnd type="none" w="med" len="med"/>
-                    </a:lnB>
-                  </a:tcPr>
-                </a:tc>
-                <a:extLst>
-                  <a:ext uri="{0D108BD9-81ED-4DB2-BD59-A6C34878D82A}">
-                    <a16:rowId xmlns:a16="http://schemas.microsoft.com/office/drawing/2014/main" val="3555011976"/>
-                  </a:ext>
-                </a:extLst>
-              </a:tr>
-            </a:tbl>
-          </a:graphicData>
-        </a:graphic>
-      </p:graphicFrame>
-      <p:pic>
-        <p:nvPicPr>
-          <p:cNvPr id="1026" name="Picture 2" descr="Break time Memes">
-            <a:extLst>
-              <a:ext uri="{FF2B5EF4-FFF2-40B4-BE49-F238E27FC236}">
-                <a16:creationId xmlns:a16="http://schemas.microsoft.com/office/drawing/2014/main" id="{98148F9B-6B16-8340-B346-C606A44D8E39}"/>
-              </a:ext>
-            </a:extLst>
-          </p:cNvPr>
-          <p:cNvPicPr>
-            <a:picLocks noChangeAspect="1" noChangeArrowheads="1"/>
-          </p:cNvPicPr>
-          <p:nvPr/>
-        </p:nvPicPr>
-        <p:blipFill>
-          <a:blip r:embed="rId3">
-            <a:extLst>
-              <a:ext uri="{28A0092B-C50C-407E-A947-70E740481C1C}">
-                <a14:useLocalDpi xmlns:a14="http://schemas.microsoft.com/office/drawing/2010/main" val="0"/>
-              </a:ext>
-            </a:extLst>
-          </a:blip>
-          <a:srcRect/>
-          <a:stretch>
-            <a:fillRect/>
-          </a:stretch>
-        </p:blipFill>
-        <p:spPr bwMode="auto">
-          <a:xfrm>
-            <a:off x="9457889" y="653851"/>
-            <a:ext cx="2472787" cy="1642442"/>
-          </a:xfrm>
-          <a:prstGeom prst="rect">
-            <a:avLst/>
-          </a:prstGeom>
-          <a:noFill/>
-          <a:extLst>
-            <a:ext uri="{909E8E84-426E-40DD-AFC4-6F175D3DCCD1}">
-              <a14:hiddenFill xmlns:a14="http://schemas.microsoft.com/office/drawing/2010/main">
-                <a:solidFill>
-                  <a:srgbClr val="FFFFFF"/>
-                </a:solidFill>
-              </a14:hiddenFill>
-            </a:ext>
-          </a:extLst>
-        </p:spPr>
-      </p:pic>
-      <p:sp>
-        <p:nvSpPr>
-          <p:cNvPr id="7" name="Content Placeholder 2">
-            <a:extLst>
-              <a:ext uri="{FF2B5EF4-FFF2-40B4-BE49-F238E27FC236}">
-                <a16:creationId xmlns:a16="http://schemas.microsoft.com/office/drawing/2014/main" id="{DB9245E3-752D-1D4D-9D33-21C8A2B686B7}"/>
-              </a:ext>
-            </a:extLst>
-          </p:cNvPr>
-          <p:cNvSpPr txBox="1">
-            <a:spLocks/>
-          </p:cNvSpPr>
-          <p:nvPr/>
-        </p:nvSpPr>
-        <p:spPr>
-          <a:xfrm>
-            <a:off x="78836" y="1566885"/>
-            <a:ext cx="9160667" cy="4563601"/>
-          </a:xfrm>
-          <a:prstGeom prst="rect">
-            <a:avLst/>
-          </a:prstGeom>
-        </p:spPr>
-        <p:txBody>
-          <a:bodyPr vert="horz" lIns="91440" tIns="45720" rIns="91440" bIns="45720" rtlCol="0">
-            <a:normAutofit/>
-          </a:bodyPr>
-          <a:lstStyle>
-            <a:lvl1pPr marL="228600" indent="-228600" algn="l" defTabSz="914400" rtl="0" eaLnBrk="1" latinLnBrk="0" hangingPunct="1">
-              <a:lnSpc>
-                <a:spcPct val="90000"/>
-              </a:lnSpc>
-              <a:spcBef>
-                <a:spcPts val="1000"/>
-              </a:spcBef>
-              <a:buClr>
-                <a:srgbClr val="007EE5"/>
-              </a:buClr>
-              <a:buFont typeface="Wingdings" panose="05000000000000000000" pitchFamily="2" charset="2"/>
-              <a:buChar char="§"/>
-              <a:defRPr sz="2800" kern="1200">
-                <a:solidFill>
-                  <a:srgbClr val="FFFFFF"/>
-                </a:solidFill>
-                <a:latin typeface="+mn-lt"/>
-                <a:ea typeface="+mn-ea"/>
-                <a:cs typeface="+mn-cs"/>
-              </a:defRPr>
-            </a:lvl1pPr>
-            <a:lvl2pPr marL="685800" indent="-228600" algn="l" defTabSz="914400" rtl="0" eaLnBrk="1" latinLnBrk="0" hangingPunct="1">
-              <a:lnSpc>
-                <a:spcPct val="90000"/>
-              </a:lnSpc>
-              <a:spcBef>
-                <a:spcPts val="500"/>
-              </a:spcBef>
-              <a:buClr>
-                <a:srgbClr val="007EE5"/>
-              </a:buClr>
-              <a:buFont typeface="Wingdings" panose="05000000000000000000" pitchFamily="2" charset="2"/>
-              <a:buChar char="§"/>
-              <a:defRPr sz="2400" kern="1200">
-                <a:solidFill>
-                  <a:srgbClr val="FFFFFF"/>
-                </a:solidFill>
-                <a:latin typeface="+mn-lt"/>
-                <a:ea typeface="+mn-ea"/>
-                <a:cs typeface="+mn-cs"/>
-              </a:defRPr>
-            </a:lvl2pPr>
-            <a:lvl3pPr marL="1143000" indent="-228600" algn="l" defTabSz="914400" rtl="0" eaLnBrk="1" latinLnBrk="0" hangingPunct="1">
-              <a:lnSpc>
-                <a:spcPct val="90000"/>
-              </a:lnSpc>
-              <a:spcBef>
-                <a:spcPts val="500"/>
-              </a:spcBef>
-              <a:buClr>
-                <a:srgbClr val="007EE5"/>
-              </a:buClr>
-              <a:buFont typeface="Wingdings" panose="05000000000000000000" pitchFamily="2" charset="2"/>
-              <a:buChar char="§"/>
-              <a:defRPr sz="2000" kern="1200">
-                <a:solidFill>
-                  <a:srgbClr val="FFFFFF"/>
-                </a:solidFill>
-                <a:latin typeface="+mn-lt"/>
-                <a:ea typeface="+mn-ea"/>
-                <a:cs typeface="+mn-cs"/>
-              </a:defRPr>
-            </a:lvl3pPr>
-            <a:lvl4pPr marL="1600200" indent="-228600" algn="l" defTabSz="914400" rtl="0" eaLnBrk="1" latinLnBrk="0" hangingPunct="1">
-              <a:lnSpc>
-                <a:spcPct val="90000"/>
-              </a:lnSpc>
-              <a:spcBef>
-                <a:spcPts val="500"/>
-              </a:spcBef>
-              <a:buClr>
-                <a:srgbClr val="007EE5"/>
-              </a:buClr>
-              <a:buFont typeface="Wingdings" panose="05000000000000000000" pitchFamily="2" charset="2"/>
-              <a:buChar char="§"/>
-              <a:defRPr sz="1800" kern="1200">
-                <a:solidFill>
-                  <a:srgbClr val="FFFFFF"/>
-                </a:solidFill>
-                <a:latin typeface="+mn-lt"/>
-                <a:ea typeface="+mn-ea"/>
-                <a:cs typeface="+mn-cs"/>
-              </a:defRPr>
-            </a:lvl4pPr>
-            <a:lvl5pPr marL="2057400" indent="-228600" algn="l" defTabSz="914400" rtl="0" eaLnBrk="1" latinLnBrk="0" hangingPunct="1">
-              <a:lnSpc>
-                <a:spcPct val="90000"/>
-              </a:lnSpc>
-              <a:spcBef>
-                <a:spcPts val="500"/>
-              </a:spcBef>
-              <a:buClr>
-                <a:srgbClr val="007EE5"/>
-              </a:buClr>
-              <a:buFont typeface="Wingdings" panose="05000000000000000000" pitchFamily="2" charset="2"/>
-              <a:buChar char="§"/>
-              <a:defRPr sz="1800" kern="1200">
-                <a:solidFill>
-                  <a:srgbClr val="FFFFFF"/>
-                </a:solidFill>
-                <a:latin typeface="+mn-lt"/>
-                <a:ea typeface="+mn-ea"/>
-                <a:cs typeface="+mn-cs"/>
-              </a:defRPr>
-            </a:lvl5pPr>
-            <a:lvl6pPr marL="2514600" indent="-228600" algn="l" defTabSz="914400" rtl="0" eaLnBrk="1" latinLnBrk="0" hangingPunct="1">
-              <a:lnSpc>
-                <a:spcPct val="90000"/>
-              </a:lnSpc>
-              <a:spcBef>
-                <a:spcPts val="500"/>
-              </a:spcBef>
-              <a:buFont typeface="Arial" panose="020B0604020202020204" pitchFamily="34" charset="0"/>
-              <a:buChar char="•"/>
-              <a:defRPr sz="1800" kern="1200">
-                <a:solidFill>
-                  <a:schemeClr val="tx1"/>
-                </a:solidFill>
-                <a:latin typeface="+mn-lt"/>
-                <a:ea typeface="+mn-ea"/>
-                <a:cs typeface="+mn-cs"/>
-              </a:defRPr>
-            </a:lvl6pPr>
-            <a:lvl7pPr marL="2971800" indent="-228600" algn="l" defTabSz="914400" rtl="0" eaLnBrk="1" latinLnBrk="0" hangingPunct="1">
-              <a:lnSpc>
-                <a:spcPct val="90000"/>
-              </a:lnSpc>
-              <a:spcBef>
-                <a:spcPts val="500"/>
-              </a:spcBef>
-              <a:buFont typeface="Arial" panose="020B0604020202020204" pitchFamily="34" charset="0"/>
-              <a:buChar char="•"/>
-              <a:defRPr sz="1800" kern="1200">
-                <a:solidFill>
-                  <a:schemeClr val="tx1"/>
-                </a:solidFill>
-                <a:latin typeface="+mn-lt"/>
-                <a:ea typeface="+mn-ea"/>
-                <a:cs typeface="+mn-cs"/>
-              </a:defRPr>
-            </a:lvl7pPr>
-            <a:lvl8pPr marL="3429000" indent="-228600" algn="l" defTabSz="914400" rtl="0" eaLnBrk="1" latinLnBrk="0" hangingPunct="1">
-              <a:lnSpc>
-                <a:spcPct val="90000"/>
-              </a:lnSpc>
-              <a:spcBef>
-                <a:spcPts val="500"/>
-              </a:spcBef>
-              <a:buFont typeface="Arial" panose="020B0604020202020204" pitchFamily="34" charset="0"/>
-              <a:buChar char="•"/>
-              <a:defRPr sz="1800" kern="1200">
-                <a:solidFill>
-                  <a:schemeClr val="tx1"/>
-                </a:solidFill>
-                <a:latin typeface="+mn-lt"/>
-                <a:ea typeface="+mn-ea"/>
-                <a:cs typeface="+mn-cs"/>
-              </a:defRPr>
-            </a:lvl8pPr>
-            <a:lvl9pPr marL="3886200" indent="-228600" algn="l" defTabSz="914400" rtl="0" eaLnBrk="1" latinLnBrk="0" hangingPunct="1">
-              <a:lnSpc>
-                <a:spcPct val="90000"/>
-              </a:lnSpc>
-              <a:spcBef>
-                <a:spcPts val="500"/>
-              </a:spcBef>
-              <a:buFont typeface="Arial" panose="020B0604020202020204" pitchFamily="34" charset="0"/>
-              <a:buChar char="•"/>
-              <a:defRPr sz="1800" kern="1200">
-                <a:solidFill>
-                  <a:schemeClr val="tx1"/>
-                </a:solidFill>
-                <a:latin typeface="+mn-lt"/>
-                <a:ea typeface="+mn-ea"/>
-                <a:cs typeface="+mn-cs"/>
-              </a:defRPr>
-            </a:lvl9pPr>
-          </a:lstStyle>
-          <a:p>
-            <a:r>
-              <a:rPr lang="en-CA" dirty="0"/>
-              <a:t>Extra help hours! </a:t>
-            </a:r>
-          </a:p>
-          <a:p>
-            <a:pPr lvl="1"/>
-            <a:r>
-              <a:rPr lang="en-CA" dirty="0">
-                <a:solidFill>
-                  <a:srgbClr val="00B050"/>
-                </a:solidFill>
-              </a:rPr>
-              <a:t>TIP FOR SUCCESS</a:t>
-            </a:r>
-            <a:r>
-              <a:rPr lang="en-CA" dirty="0"/>
-              <a:t>: Put in calendar, treat as a scheduled class</a:t>
-            </a:r>
-          </a:p>
-          <a:p>
-            <a:r>
-              <a:rPr lang="en-CA" dirty="0"/>
-              <a:t>Schedule and Zoom Links are on Quercus</a:t>
-            </a:r>
-          </a:p>
-          <a:p>
-            <a:pPr lvl="1"/>
-            <a:r>
-              <a:rPr lang="en-CA" dirty="0"/>
-              <a:t>”Coffee Break (Office Hours)”</a:t>
-            </a:r>
-          </a:p>
-          <a:p>
-            <a:pPr marL="0" indent="0">
-              <a:buNone/>
-            </a:pPr>
-            <a:endParaRPr lang="en-CA" dirty="0"/>
-          </a:p>
-        </p:txBody>
-      </p:sp>
-      <p:pic>
-        <p:nvPicPr>
-          <p:cNvPr id="4" name="Picture 3" descr="A collage of a person&#10;&#10;Description automatically generated">
-            <a:extLst>
-              <a:ext uri="{FF2B5EF4-FFF2-40B4-BE49-F238E27FC236}">
-                <a16:creationId xmlns:a16="http://schemas.microsoft.com/office/drawing/2014/main" id="{FC1B2542-8CCE-BDD4-072B-2E72D99251EB}"/>
-              </a:ext>
-            </a:extLst>
-          </p:cNvPr>
-          <p:cNvPicPr>
-            <a:picLocks noChangeAspect="1"/>
-          </p:cNvPicPr>
-          <p:nvPr/>
-        </p:nvPicPr>
-        <p:blipFill>
-          <a:blip r:embed="rId4">
-            <a:extLst>
-              <a:ext uri="{28A0092B-C50C-407E-A947-70E740481C1C}">
-                <a14:useLocalDpi xmlns:a14="http://schemas.microsoft.com/office/drawing/2010/main" val="0"/>
-              </a:ext>
-            </a:extLst>
-          </a:blip>
-          <a:stretch>
-            <a:fillRect/>
-          </a:stretch>
-        </p:blipFill>
-        <p:spPr>
-          <a:xfrm>
-            <a:off x="8885753" y="3324431"/>
-            <a:ext cx="3044923" cy="2994174"/>
-          </a:xfrm>
-          <a:prstGeom prst="rect">
-            <a:avLst/>
-          </a:prstGeom>
-        </p:spPr>
-      </p:pic>
-      <p:sp>
-        <p:nvSpPr>
-          <p:cNvPr id="5" name="TextBox 4">
-            <a:extLst>
-              <a:ext uri="{FF2B5EF4-FFF2-40B4-BE49-F238E27FC236}">
-                <a16:creationId xmlns:a16="http://schemas.microsoft.com/office/drawing/2014/main" id="{6AF5B371-7DD2-2E71-0140-E1D245F301CE}"/>
-              </a:ext>
-            </a:extLst>
-          </p:cNvPr>
-          <p:cNvSpPr txBox="1"/>
-          <p:nvPr/>
-        </p:nvSpPr>
-        <p:spPr>
-          <a:xfrm>
-            <a:off x="8794509" y="2605965"/>
-            <a:ext cx="3227409" cy="769441"/>
-          </a:xfrm>
-          <a:prstGeom prst="rect">
-            <a:avLst/>
-          </a:prstGeom>
-          <a:solidFill>
-            <a:srgbClr val="FFFFFF"/>
-          </a:solidFill>
-        </p:spPr>
-        <p:txBody>
-          <a:bodyPr wrap="square" rtlCol="0">
-            <a:spAutoFit/>
-          </a:bodyPr>
-          <a:lstStyle/>
-          <a:p>
-            <a:pPr algn="ctr"/>
-            <a:r>
-              <a:rPr lang="en-CA" sz="2200" dirty="0">
-                <a:latin typeface="Impact" panose="020B0806030902050204" pitchFamily="34" charset="0"/>
-              </a:rPr>
-              <a:t>WAITING FOR STUDENTS </a:t>
-            </a:r>
-            <a:br>
-              <a:rPr lang="en-CA" sz="2200" dirty="0">
-                <a:latin typeface="Impact" panose="020B0806030902050204" pitchFamily="34" charset="0"/>
-              </a:rPr>
-            </a:br>
-            <a:r>
-              <a:rPr lang="en-CA" sz="2200" dirty="0">
-                <a:latin typeface="Impact" panose="020B0806030902050204" pitchFamily="34" charset="0"/>
-              </a:rPr>
-              <a:t>TO COME TO OFFICE HOURS</a:t>
-            </a:r>
-          </a:p>
-        </p:txBody>
-      </p:sp>
-    </p:spTree>
-    <p:extLst>
-      <p:ext uri="{BB962C8B-B14F-4D97-AF65-F5344CB8AC3E}">
-        <p14:creationId xmlns:p14="http://schemas.microsoft.com/office/powerpoint/2010/main" val="2356464089"/>
-      </p:ext>
-    </p:extLst>
-  </p:cSld>
-  <p:clrMapOvr>
-    <a:masterClrMapping/>
-  </p:clrMapOvr>
-</p:sld>
-</file>
-
-<file path=ppt/slides/slide6.xml><?xml version="1.0" encoding="utf-8"?>
 <p:sld xmlns:a="http://schemas.openxmlformats.org/drawingml/2006/main" xmlns:r="http://schemas.openxmlformats.org/officeDocument/2006/relationships" xmlns:p="http://schemas.openxmlformats.org/presentationml/2006/main">
   <p:cSld>
     <p:spTree>
@@ -12770,7 +7079,7 @@
 </p:sld>
 </file>
 
-<file path=ppt/slides/slide7.xml><?xml version="1.0" encoding="utf-8"?>
+<file path=ppt/slides/slide4.xml><?xml version="1.0" encoding="utf-8"?>
 <p:sld xmlns:a="http://schemas.openxmlformats.org/drawingml/2006/main" xmlns:r="http://schemas.openxmlformats.org/officeDocument/2006/relationships" xmlns:p="http://schemas.openxmlformats.org/presentationml/2006/main">
   <p:cSld>
     <p:spTree>
@@ -13456,7 +7765,7 @@
 </p:sld>
 </file>
 
-<file path=ppt/slides/slide8.xml><?xml version="1.0" encoding="utf-8"?>
+<file path=ppt/slides/slide5.xml><?xml version="1.0" encoding="utf-8"?>
 <p:sld xmlns:a="http://schemas.openxmlformats.org/drawingml/2006/main" xmlns:r="http://schemas.openxmlformats.org/officeDocument/2006/relationships" xmlns:p="http://schemas.openxmlformats.org/presentationml/2006/main">
   <p:cSld>
     <p:spTree>
@@ -14036,7 +8345,7 @@
 </p:sld>
 </file>
 
-<file path=ppt/slides/slide9.xml><?xml version="1.0" encoding="utf-8"?>
+<file path=ppt/slides/slide6.xml><?xml version="1.0" encoding="utf-8"?>
 <p:sld xmlns:a="http://schemas.openxmlformats.org/drawingml/2006/main" xmlns:r="http://schemas.openxmlformats.org/officeDocument/2006/relationships" xmlns:p="http://schemas.openxmlformats.org/presentationml/2006/main">
   <p:cSld>
     <p:spTree>
@@ -14413,6 +8722,2910 @@
         </p:cTn>
       </p:par>
     </p:tnLst>
+  </p:timing>
+</p:sld>
+</file>
+
+<file path=ppt/slides/slide7.xml><?xml version="1.0" encoding="utf-8"?>
+<p:sld xmlns:a="http://schemas.openxmlformats.org/drawingml/2006/main" xmlns:r="http://schemas.openxmlformats.org/officeDocument/2006/relationships" xmlns:p="http://schemas.openxmlformats.org/presentationml/2006/main">
+  <p:cSld>
+    <p:spTree>
+      <p:nvGrpSpPr>
+        <p:cNvPr id="1" name=""/>
+        <p:cNvGrpSpPr/>
+        <p:nvPr/>
+      </p:nvGrpSpPr>
+      <p:grpSpPr>
+        <a:xfrm>
+          <a:off x="0" y="0"/>
+          <a:ext cx="0" cy="0"/>
+          <a:chOff x="0" y="0"/>
+          <a:chExt cx="0" cy="0"/>
+        </a:xfrm>
+      </p:grpSpPr>
+      <p:sp>
+        <p:nvSpPr>
+          <p:cNvPr id="2" name="Title 1">
+            <a:extLst>
+              <a:ext uri="{FF2B5EF4-FFF2-40B4-BE49-F238E27FC236}">
+                <a16:creationId xmlns:a16="http://schemas.microsoft.com/office/drawing/2014/main" id="{9FD3E942-D48A-CF4F-BAD4-22FE8605A580}"/>
+              </a:ext>
+            </a:extLst>
+          </p:cNvPr>
+          <p:cNvSpPr>
+            <a:spLocks noGrp="1"/>
+          </p:cNvSpPr>
+          <p:nvPr>
+            <p:ph type="title"/>
+          </p:nvPr>
+        </p:nvSpPr>
+        <p:spPr/>
+        <p:txBody>
+          <a:bodyPr>
+            <a:normAutofit fontScale="90000"/>
+          </a:bodyPr>
+          <a:lstStyle/>
+          <a:p>
+            <a:r>
+              <a:rPr lang="en-US" dirty="0"/>
+              <a:t>Let’s Code!</a:t>
+            </a:r>
+          </a:p>
+        </p:txBody>
+      </p:sp>
+      <p:sp>
+        <p:nvSpPr>
+          <p:cNvPr id="3" name="Content Placeholder 2">
+            <a:extLst>
+              <a:ext uri="{FF2B5EF4-FFF2-40B4-BE49-F238E27FC236}">
+                <a16:creationId xmlns:a16="http://schemas.microsoft.com/office/drawing/2014/main" id="{66A3DF1E-F240-BC41-B313-3625DDE1D979}"/>
+              </a:ext>
+            </a:extLst>
+          </p:cNvPr>
+          <p:cNvSpPr>
+            <a:spLocks noGrp="1"/>
+          </p:cNvSpPr>
+          <p:nvPr>
+            <p:ph idx="1"/>
+          </p:nvPr>
+        </p:nvSpPr>
+        <p:spPr>
+          <a:xfrm>
+            <a:off x="400050" y="1532292"/>
+            <a:ext cx="7025986" cy="4835479"/>
+          </a:xfrm>
+        </p:spPr>
+        <p:txBody>
+          <a:bodyPr>
+            <a:normAutofit/>
+          </a:bodyPr>
+          <a:lstStyle/>
+          <a:p>
+            <a:r>
+              <a:rPr lang="en-CA" dirty="0"/>
+              <a:t>Let’s look at how this works in Python!</a:t>
+            </a:r>
+          </a:p>
+          <a:p>
+            <a:pPr lvl="1"/>
+            <a:r>
+              <a:rPr lang="en-CA" dirty="0"/>
+              <a:t>Point Class Recap</a:t>
+            </a:r>
+          </a:p>
+          <a:p>
+            <a:pPr lvl="1"/>
+            <a:r>
+              <a:rPr lang="en-CA" dirty="0"/>
+              <a:t>Rectangle Class</a:t>
+            </a:r>
+          </a:p>
+          <a:p>
+            <a:endParaRPr lang="en-CA" dirty="0"/>
+          </a:p>
+        </p:txBody>
+      </p:sp>
+      <p:sp>
+        <p:nvSpPr>
+          <p:cNvPr id="4" name="Rectangle: Rounded Corners 5">
+            <a:extLst>
+              <a:ext uri="{FF2B5EF4-FFF2-40B4-BE49-F238E27FC236}">
+                <a16:creationId xmlns:a16="http://schemas.microsoft.com/office/drawing/2014/main" id="{9BD5FBCF-8C94-E44C-BBC9-C128207E6FA0}"/>
+              </a:ext>
+            </a:extLst>
+          </p:cNvPr>
+          <p:cNvSpPr/>
+          <p:nvPr/>
+        </p:nvSpPr>
+        <p:spPr>
+          <a:xfrm>
+            <a:off x="7664115" y="1949006"/>
+            <a:ext cx="3958389" cy="4418765"/>
+          </a:xfrm>
+          <a:prstGeom prst="roundRect">
+            <a:avLst/>
+          </a:prstGeom>
+          <a:noFill/>
+          <a:ln w="76200">
+            <a:solidFill>
+              <a:schemeClr val="accent2"/>
+            </a:solidFill>
+          </a:ln>
+        </p:spPr>
+        <p:style>
+          <a:lnRef idx="2">
+            <a:schemeClr val="accent1">
+              <a:shade val="50000"/>
+            </a:schemeClr>
+          </a:lnRef>
+          <a:fillRef idx="1">
+            <a:schemeClr val="accent1"/>
+          </a:fillRef>
+          <a:effectRef idx="0">
+            <a:schemeClr val="accent1"/>
+          </a:effectRef>
+          <a:fontRef idx="minor">
+            <a:schemeClr val="lt1"/>
+          </a:fontRef>
+        </p:style>
+        <p:txBody>
+          <a:bodyPr rtlCol="0" anchor="ctr"/>
+          <a:lstStyle/>
+          <a:p>
+            <a:r>
+              <a:rPr lang="en-US" sz="4400" b="1" dirty="0">
+                <a:solidFill>
+                  <a:srgbClr val="FFFFFF"/>
+                </a:solidFill>
+              </a:rPr>
+              <a:t>Open your notebook</a:t>
+            </a:r>
+          </a:p>
+          <a:p>
+            <a:endParaRPr lang="en-US" sz="4400" b="1" dirty="0">
+              <a:solidFill>
+                <a:srgbClr val="FFFFFF"/>
+              </a:solidFill>
+            </a:endParaRPr>
+          </a:p>
+          <a:p>
+            <a:r>
+              <a:rPr lang="en-US" sz="2800" b="1" dirty="0">
+                <a:solidFill>
+                  <a:srgbClr val="FFFFFF"/>
+                </a:solidFill>
+              </a:rPr>
+              <a:t>Click Link</a:t>
+            </a:r>
+            <a:r>
+              <a:rPr lang="en-US" sz="2800" b="1" dirty="0">
+                <a:solidFill>
+                  <a:schemeClr val="accent6"/>
+                </a:solidFill>
+              </a:rPr>
+              <a:t>:</a:t>
+            </a:r>
+          </a:p>
+          <a:p>
+            <a:r>
+              <a:rPr lang="en-US" sz="2800" b="1" dirty="0">
+                <a:solidFill>
+                  <a:schemeClr val="accent6"/>
+                </a:solidFill>
+              </a:rPr>
+              <a:t>1. Encapsulation</a:t>
+            </a:r>
+          </a:p>
+        </p:txBody>
+      </p:sp>
+      <p:pic>
+        <p:nvPicPr>
+          <p:cNvPr id="5" name="Picture 2" descr="Pretty layers of encapsulation : r/ProgrammerHumor">
+            <a:extLst>
+              <a:ext uri="{FF2B5EF4-FFF2-40B4-BE49-F238E27FC236}">
+                <a16:creationId xmlns:a16="http://schemas.microsoft.com/office/drawing/2014/main" id="{50471478-DAE1-3341-B655-F3D05BDDFAD7}"/>
+              </a:ext>
+            </a:extLst>
+          </p:cNvPr>
+          <p:cNvPicPr>
+            <a:picLocks noChangeAspect="1" noChangeArrowheads="1"/>
+          </p:cNvPicPr>
+          <p:nvPr/>
+        </p:nvPicPr>
+        <p:blipFill>
+          <a:blip r:embed="rId3">
+            <a:extLst>
+              <a:ext uri="{28A0092B-C50C-407E-A947-70E740481C1C}">
+                <a14:useLocalDpi xmlns:a14="http://schemas.microsoft.com/office/drawing/2010/main" val="0"/>
+              </a:ext>
+            </a:extLst>
+          </a:blip>
+          <a:srcRect/>
+          <a:stretch>
+            <a:fillRect/>
+          </a:stretch>
+        </p:blipFill>
+        <p:spPr bwMode="auto">
+          <a:xfrm>
+            <a:off x="1143001" y="3028181"/>
+            <a:ext cx="4786745" cy="3339590"/>
+          </a:xfrm>
+          <a:prstGeom prst="rect">
+            <a:avLst/>
+          </a:prstGeom>
+          <a:noFill/>
+          <a:extLst>
+            <a:ext uri="{909E8E84-426E-40DD-AFC4-6F175D3DCCD1}">
+              <a14:hiddenFill xmlns:a14="http://schemas.microsoft.com/office/drawing/2010/main">
+                <a:solidFill>
+                  <a:srgbClr val="FFFFFF"/>
+                </a:solidFill>
+              </a14:hiddenFill>
+            </a:ext>
+          </a:extLst>
+        </p:spPr>
+      </p:pic>
+    </p:spTree>
+    <p:extLst>
+      <p:ext uri="{BB962C8B-B14F-4D97-AF65-F5344CB8AC3E}">
+        <p14:creationId xmlns:p14="http://schemas.microsoft.com/office/powerpoint/2010/main" val="3744884758"/>
+      </p:ext>
+    </p:extLst>
+  </p:cSld>
+  <p:clrMapOvr>
+    <a:masterClrMapping/>
+  </p:clrMapOvr>
+</p:sld>
+</file>
+
+<file path=ppt/slides/slide8.xml><?xml version="1.0" encoding="utf-8"?>
+<p:sld xmlns:a="http://schemas.openxmlformats.org/drawingml/2006/main" xmlns:r="http://schemas.openxmlformats.org/officeDocument/2006/relationships" xmlns:p="http://schemas.openxmlformats.org/presentationml/2006/main">
+  <p:cSld>
+    <p:spTree>
+      <p:nvGrpSpPr>
+        <p:cNvPr id="1" name=""/>
+        <p:cNvGrpSpPr/>
+        <p:nvPr/>
+      </p:nvGrpSpPr>
+      <p:grpSpPr>
+        <a:xfrm>
+          <a:off x="0" y="0"/>
+          <a:ext cx="0" cy="0"/>
+          <a:chOff x="0" y="0"/>
+          <a:chExt cx="0" cy="0"/>
+        </a:xfrm>
+      </p:grpSpPr>
+      <p:sp>
+        <p:nvSpPr>
+          <p:cNvPr id="2" name="Title 1">
+            <a:extLst>
+              <a:ext uri="{FF2B5EF4-FFF2-40B4-BE49-F238E27FC236}">
+                <a16:creationId xmlns:a16="http://schemas.microsoft.com/office/drawing/2014/main" id="{277B8662-D2F9-454D-8182-0E3A3A7F69EC}"/>
+              </a:ext>
+            </a:extLst>
+          </p:cNvPr>
+          <p:cNvSpPr>
+            <a:spLocks noGrp="1"/>
+          </p:cNvSpPr>
+          <p:nvPr>
+            <p:ph type="title"/>
+          </p:nvPr>
+        </p:nvSpPr>
+        <p:spPr/>
+        <p:txBody>
+          <a:bodyPr>
+            <a:normAutofit fontScale="90000"/>
+          </a:bodyPr>
+          <a:lstStyle/>
+          <a:p>
+            <a:r>
+              <a:rPr lang="en-US" dirty="0"/>
+              <a:t>Printing Information</a:t>
+            </a:r>
+          </a:p>
+        </p:txBody>
+      </p:sp>
+      <p:sp>
+        <p:nvSpPr>
+          <p:cNvPr id="3" name="Content Placeholder 2">
+            <a:extLst>
+              <a:ext uri="{FF2B5EF4-FFF2-40B4-BE49-F238E27FC236}">
+                <a16:creationId xmlns:a16="http://schemas.microsoft.com/office/drawing/2014/main" id="{816DE886-4A89-AD42-9138-CE102F1D6C87}"/>
+              </a:ext>
+            </a:extLst>
+          </p:cNvPr>
+          <p:cNvSpPr>
+            <a:spLocks noGrp="1"/>
+          </p:cNvSpPr>
+          <p:nvPr>
+            <p:ph idx="1"/>
+          </p:nvPr>
+        </p:nvSpPr>
+        <p:spPr/>
+        <p:txBody>
+          <a:bodyPr/>
+          <a:lstStyle/>
+          <a:p>
+            <a:r>
+              <a:rPr lang="en-US" dirty="0"/>
+              <a:t>It would be nice to not have to write a print statement when we want to display attribute information:</a:t>
+            </a:r>
+          </a:p>
+          <a:p>
+            <a:endParaRPr lang="en-US" dirty="0"/>
+          </a:p>
+          <a:p>
+            <a:endParaRPr lang="en-US" dirty="0"/>
+          </a:p>
+          <a:p>
+            <a:r>
+              <a:rPr lang="en-US" dirty="0"/>
+              <a:t>Is there a better way to encapsulate this? How about a method?</a:t>
+            </a:r>
+          </a:p>
+        </p:txBody>
+      </p:sp>
+      <p:sp>
+        <p:nvSpPr>
+          <p:cNvPr id="4" name="object 5">
+            <a:extLst>
+              <a:ext uri="{FF2B5EF4-FFF2-40B4-BE49-F238E27FC236}">
+                <a16:creationId xmlns:a16="http://schemas.microsoft.com/office/drawing/2014/main" id="{DD78018B-EE42-7446-A316-AC67025A187A}"/>
+              </a:ext>
+            </a:extLst>
+          </p:cNvPr>
+          <p:cNvSpPr txBox="1"/>
+          <p:nvPr/>
+        </p:nvSpPr>
+        <p:spPr>
+          <a:xfrm>
+            <a:off x="4064635" y="2778242"/>
+            <a:ext cx="8127365" cy="3539430"/>
+          </a:xfrm>
+          <a:prstGeom prst="rect">
+            <a:avLst/>
+          </a:prstGeom>
+        </p:spPr>
+        <p:txBody>
+          <a:bodyPr vert="horz" wrap="square" lIns="0" tIns="0" rIns="0" bIns="0" rtlCol="0">
+            <a:spAutoFit/>
+          </a:bodyPr>
+          <a:lstStyle/>
+          <a:p>
+            <a:pPr marL="1765300" marR="0" lvl="0" indent="0" algn="l" defTabSz="914400" rtl="0" eaLnBrk="1" fontAlgn="auto" latinLnBrk="0" hangingPunct="1">
+              <a:lnSpc>
+                <a:spcPct val="100000"/>
+              </a:lnSpc>
+              <a:spcBef>
+                <a:spcPts val="1865"/>
+              </a:spcBef>
+              <a:spcAft>
+                <a:spcPts val="0"/>
+              </a:spcAft>
+              <a:buClrTx/>
+              <a:buSzTx/>
+              <a:buFontTx/>
+              <a:buNone/>
+              <a:tabLst/>
+              <a:defRPr/>
+            </a:pPr>
+            <a:r>
+              <a:rPr kumimoji="0" sz="2000" b="0" i="0" u="none" strike="noStrike" kern="1200" cap="none" spc="-5" normalizeH="0" baseline="0" noProof="0" dirty="0">
+                <a:ln>
+                  <a:noFill/>
+                </a:ln>
+                <a:solidFill>
+                  <a:srgbClr val="00FF00"/>
+                </a:solidFill>
+                <a:effectLst/>
+                <a:uLnTx/>
+                <a:uFillTx/>
+                <a:latin typeface="Courier New"/>
+                <a:ea typeface="+mn-ea"/>
+                <a:cs typeface="Courier New"/>
+              </a:rPr>
+              <a:t>&gt;&gt;</a:t>
+            </a:r>
+            <a:r>
+              <a:rPr kumimoji="0" sz="2000" b="0" i="0" u="none" strike="noStrike" kern="1200" cap="none" spc="0" normalizeH="0" baseline="0" noProof="0" dirty="0">
+                <a:ln>
+                  <a:noFill/>
+                </a:ln>
+                <a:solidFill>
+                  <a:srgbClr val="00FF00"/>
+                </a:solidFill>
+                <a:effectLst/>
+                <a:uLnTx/>
+                <a:uFillTx/>
+                <a:latin typeface="Courier New"/>
+                <a:ea typeface="+mn-ea"/>
+                <a:cs typeface="Courier New"/>
+              </a:rPr>
+              <a:t>&gt;</a:t>
+            </a:r>
+            <a:r>
+              <a:rPr kumimoji="0" sz="2000" b="0" i="0" u="none" strike="noStrike" kern="1200" cap="none" spc="-5" normalizeH="0" baseline="0" noProof="0" dirty="0">
+                <a:ln>
+                  <a:noFill/>
+                </a:ln>
+                <a:solidFill>
+                  <a:srgbClr val="00FF00"/>
+                </a:solidFill>
+                <a:effectLst/>
+                <a:uLnTx/>
+                <a:uFillTx/>
+                <a:latin typeface="Courier New"/>
+                <a:ea typeface="+mn-ea"/>
+                <a:cs typeface="Courier New"/>
+              </a:rPr>
+              <a:t> </a:t>
+            </a:r>
+            <a:r>
+              <a:rPr kumimoji="0" sz="2000" b="0" i="0" u="none" strike="noStrike" kern="1200" cap="none" spc="0" normalizeH="0" baseline="0" noProof="0" dirty="0">
+                <a:ln>
+                  <a:noFill/>
+                </a:ln>
+                <a:solidFill>
+                  <a:srgbClr val="00FF00"/>
+                </a:solidFill>
+                <a:effectLst/>
+                <a:uLnTx/>
+                <a:uFillTx/>
+                <a:latin typeface="Courier New"/>
+                <a:ea typeface="+mn-ea"/>
+                <a:cs typeface="Courier New"/>
+              </a:rPr>
+              <a:t>p</a:t>
+            </a:r>
+            <a:r>
+              <a:rPr kumimoji="0" sz="2000" b="0" i="0" u="none" strike="noStrike" kern="1200" cap="none" spc="-5" normalizeH="0" baseline="0" noProof="0" dirty="0">
+                <a:ln>
+                  <a:noFill/>
+                </a:ln>
+                <a:solidFill>
+                  <a:srgbClr val="00FF00"/>
+                </a:solidFill>
+                <a:effectLst/>
+                <a:uLnTx/>
+                <a:uFillTx/>
+                <a:latin typeface="Courier New"/>
+                <a:ea typeface="+mn-ea"/>
+                <a:cs typeface="Courier New"/>
+              </a:rPr>
+              <a:t> </a:t>
+            </a:r>
+            <a:r>
+              <a:rPr kumimoji="0" sz="2000" b="0" i="0" u="none" strike="noStrike" kern="1200" cap="none" spc="0" normalizeH="0" baseline="0" noProof="0" dirty="0">
+                <a:ln>
+                  <a:noFill/>
+                </a:ln>
+                <a:solidFill>
+                  <a:srgbClr val="00FF00"/>
+                </a:solidFill>
+                <a:effectLst/>
+                <a:uLnTx/>
+                <a:uFillTx/>
+                <a:latin typeface="Courier New"/>
+                <a:ea typeface="+mn-ea"/>
+                <a:cs typeface="Courier New"/>
+              </a:rPr>
+              <a:t>=</a:t>
+            </a:r>
+            <a:r>
+              <a:rPr kumimoji="0" sz="2000" b="0" i="0" u="none" strike="noStrike" kern="1200" cap="none" spc="-5" normalizeH="0" baseline="0" noProof="0" dirty="0">
+                <a:ln>
+                  <a:noFill/>
+                </a:ln>
+                <a:solidFill>
+                  <a:srgbClr val="00FF00"/>
+                </a:solidFill>
+                <a:effectLst/>
+                <a:uLnTx/>
+                <a:uFillTx/>
+                <a:latin typeface="Courier New"/>
+                <a:ea typeface="+mn-ea"/>
+                <a:cs typeface="Courier New"/>
+              </a:rPr>
+              <a:t> Point(3,</a:t>
+            </a:r>
+            <a:r>
+              <a:rPr kumimoji="0" sz="2000" b="0" i="0" u="none" strike="noStrike" kern="1200" cap="none" spc="0" normalizeH="0" baseline="0" noProof="0" dirty="0">
+                <a:ln>
+                  <a:noFill/>
+                </a:ln>
+                <a:solidFill>
+                  <a:srgbClr val="00FF00"/>
+                </a:solidFill>
+                <a:effectLst/>
+                <a:uLnTx/>
+                <a:uFillTx/>
+                <a:latin typeface="Courier New"/>
+                <a:ea typeface="+mn-ea"/>
+                <a:cs typeface="Courier New"/>
+              </a:rPr>
+              <a:t>4)</a:t>
+            </a:r>
+          </a:p>
+          <a:p>
+            <a:pPr marL="1765300" marR="0" lvl="0" indent="0" algn="l" defTabSz="914400" rtl="0" eaLnBrk="1" fontAlgn="auto" latinLnBrk="0" hangingPunct="1">
+              <a:lnSpc>
+                <a:spcPct val="100000"/>
+              </a:lnSpc>
+              <a:spcBef>
+                <a:spcPts val="0"/>
+              </a:spcBef>
+              <a:spcAft>
+                <a:spcPts val="0"/>
+              </a:spcAft>
+              <a:buClrTx/>
+              <a:buSzTx/>
+              <a:buFontTx/>
+              <a:buNone/>
+              <a:tabLst/>
+              <a:defRPr/>
+            </a:pPr>
+            <a:r>
+              <a:rPr kumimoji="0" sz="2000" b="0" i="0" u="none" strike="noStrike" kern="1200" cap="none" spc="-5" normalizeH="0" baseline="0" noProof="0" dirty="0">
+                <a:ln>
+                  <a:noFill/>
+                </a:ln>
+                <a:solidFill>
+                  <a:srgbClr val="00FF00"/>
+                </a:solidFill>
+                <a:effectLst/>
+                <a:uLnTx/>
+                <a:uFillTx/>
+                <a:latin typeface="Courier New"/>
+                <a:ea typeface="+mn-ea"/>
+                <a:cs typeface="Courier New"/>
+              </a:rPr>
+              <a:t>&gt;&gt;</a:t>
+            </a:r>
+            <a:r>
+              <a:rPr kumimoji="0" sz="2000" b="0" i="0" u="none" strike="noStrike" kern="1200" cap="none" spc="0" normalizeH="0" baseline="0" noProof="0" dirty="0">
+                <a:ln>
+                  <a:noFill/>
+                </a:ln>
+                <a:solidFill>
+                  <a:srgbClr val="00FF00"/>
+                </a:solidFill>
+                <a:effectLst/>
+                <a:uLnTx/>
+                <a:uFillTx/>
+                <a:latin typeface="Courier New"/>
+                <a:ea typeface="+mn-ea"/>
+                <a:cs typeface="Courier New"/>
+              </a:rPr>
+              <a:t>&gt;</a:t>
+            </a:r>
+            <a:r>
+              <a:rPr kumimoji="0" sz="2000" b="0" i="0" u="none" strike="noStrike" kern="1200" cap="none" spc="-5" normalizeH="0" baseline="0" noProof="0" dirty="0">
+                <a:ln>
+                  <a:noFill/>
+                </a:ln>
+                <a:solidFill>
+                  <a:srgbClr val="00FF00"/>
+                </a:solidFill>
+                <a:effectLst/>
+                <a:uLnTx/>
+                <a:uFillTx/>
+                <a:latin typeface="Courier New"/>
+                <a:ea typeface="+mn-ea"/>
+                <a:cs typeface="Courier New"/>
+              </a:rPr>
+              <a:t> print</a:t>
+            </a:r>
+            <a:r>
+              <a:rPr kumimoji="0" sz="2000" b="0" i="0" u="none" strike="noStrike" kern="1200" cap="none" spc="0" normalizeH="0" baseline="0" noProof="0" dirty="0">
+                <a:ln>
+                  <a:noFill/>
+                </a:ln>
+                <a:solidFill>
+                  <a:srgbClr val="00FF00"/>
+                </a:solidFill>
+                <a:effectLst/>
+                <a:uLnTx/>
+                <a:uFillTx/>
+                <a:latin typeface="Courier New"/>
+                <a:ea typeface="+mn-ea"/>
+                <a:cs typeface="Courier New"/>
+              </a:rPr>
+              <a:t>(</a:t>
+            </a:r>
+            <a:r>
+              <a:rPr lang="en-US" sz="2000" spc="-5" dirty="0">
+                <a:solidFill>
+                  <a:srgbClr val="00FF00"/>
+                </a:solidFill>
+                <a:latin typeface="Courier New"/>
+                <a:cs typeface="Courier New"/>
+              </a:rPr>
+              <a:t>p</a:t>
+            </a:r>
+            <a:r>
+              <a:rPr kumimoji="0" sz="2000" b="0" i="0" u="none" strike="noStrike" kern="1200" cap="none" spc="-5" normalizeH="0" baseline="0" noProof="0" dirty="0">
+                <a:ln>
+                  <a:noFill/>
+                </a:ln>
+                <a:solidFill>
+                  <a:srgbClr val="00FF00"/>
+                </a:solidFill>
+                <a:effectLst/>
+                <a:uLnTx/>
+                <a:uFillTx/>
+                <a:latin typeface="Courier New"/>
+                <a:ea typeface="+mn-ea"/>
+                <a:cs typeface="Courier New"/>
+              </a:rPr>
+              <a:t>.x</a:t>
+            </a:r>
+            <a:r>
+              <a:rPr kumimoji="0" sz="2000" b="0" i="0" u="none" strike="noStrike" kern="1200" cap="none" spc="0" normalizeH="0" baseline="0" noProof="0" dirty="0">
+                <a:ln>
+                  <a:noFill/>
+                </a:ln>
+                <a:solidFill>
+                  <a:srgbClr val="00FF00"/>
+                </a:solidFill>
+                <a:effectLst/>
+                <a:uLnTx/>
+                <a:uFillTx/>
+                <a:latin typeface="Courier New"/>
+                <a:ea typeface="+mn-ea"/>
+                <a:cs typeface="Courier New"/>
+              </a:rPr>
+              <a:t>,</a:t>
+            </a:r>
+            <a:r>
+              <a:rPr kumimoji="0" sz="2000" b="0" i="0" u="none" strike="noStrike" kern="1200" cap="none" spc="-5" normalizeH="0" baseline="0" noProof="0" dirty="0">
+                <a:ln>
+                  <a:noFill/>
+                </a:ln>
+                <a:solidFill>
+                  <a:srgbClr val="00FF00"/>
+                </a:solidFill>
+                <a:effectLst/>
+                <a:uLnTx/>
+                <a:uFillTx/>
+                <a:latin typeface="Courier New"/>
+                <a:ea typeface="+mn-ea"/>
+                <a:cs typeface="Courier New"/>
+              </a:rPr>
+              <a:t> </a:t>
+            </a:r>
+            <a:r>
+              <a:rPr kumimoji="0" lang="en-US" sz="2000" b="0" i="0" u="none" strike="noStrike" kern="1200" cap="none" spc="-5" normalizeH="0" baseline="0" noProof="0" dirty="0" err="1">
+                <a:ln>
+                  <a:noFill/>
+                </a:ln>
+                <a:solidFill>
+                  <a:srgbClr val="00FF00"/>
+                </a:solidFill>
+                <a:effectLst/>
+                <a:uLnTx/>
+                <a:uFillTx/>
+                <a:latin typeface="Courier New"/>
+                <a:ea typeface="+mn-ea"/>
+                <a:cs typeface="Courier New"/>
+              </a:rPr>
+              <a:t>p</a:t>
+            </a:r>
+            <a:r>
+              <a:rPr kumimoji="0" sz="2000" b="0" i="0" u="none" strike="noStrike" kern="1200" cap="none" spc="-5" normalizeH="0" baseline="0" noProof="0" dirty="0" err="1">
+                <a:ln>
+                  <a:noFill/>
+                </a:ln>
+                <a:solidFill>
+                  <a:srgbClr val="00FF00"/>
+                </a:solidFill>
+                <a:effectLst/>
+                <a:uLnTx/>
+                <a:uFillTx/>
+                <a:latin typeface="Courier New"/>
+                <a:ea typeface="+mn-ea"/>
+                <a:cs typeface="Courier New"/>
+              </a:rPr>
+              <a:t>.y</a:t>
+            </a:r>
+            <a:r>
+              <a:rPr kumimoji="0" sz="2000" b="0" i="0" u="none" strike="noStrike" kern="1200" cap="none" spc="0" normalizeH="0" baseline="0" noProof="0" dirty="0">
+                <a:ln>
+                  <a:noFill/>
+                </a:ln>
+                <a:solidFill>
+                  <a:srgbClr val="00FF00"/>
+                </a:solidFill>
+                <a:effectLst/>
+                <a:uLnTx/>
+                <a:uFillTx/>
+                <a:latin typeface="Courier New"/>
+                <a:ea typeface="+mn-ea"/>
+                <a:cs typeface="Courier New"/>
+              </a:rPr>
+              <a:t>)</a:t>
+            </a:r>
+          </a:p>
+          <a:p>
+            <a:pPr marL="1765300" marR="0" lvl="0" indent="0" algn="l" defTabSz="914400" rtl="0" eaLnBrk="1" fontAlgn="auto" latinLnBrk="0" hangingPunct="1">
+              <a:lnSpc>
+                <a:spcPct val="100000"/>
+              </a:lnSpc>
+              <a:spcBef>
+                <a:spcPts val="0"/>
+              </a:spcBef>
+              <a:spcAft>
+                <a:spcPts val="0"/>
+              </a:spcAft>
+              <a:buClrTx/>
+              <a:buSzTx/>
+              <a:buFontTx/>
+              <a:buNone/>
+              <a:tabLst/>
+              <a:defRPr/>
+            </a:pPr>
+            <a:r>
+              <a:rPr kumimoji="0" sz="2000" b="1" i="0" u="none" strike="noStrike" kern="1200" cap="none" spc="0" normalizeH="0" baseline="0" noProof="0" dirty="0">
+                <a:ln>
+                  <a:noFill/>
+                </a:ln>
+                <a:solidFill>
+                  <a:srgbClr val="00FF00"/>
+                </a:solidFill>
+                <a:effectLst/>
+                <a:uLnTx/>
+                <a:uFillTx/>
+                <a:latin typeface="Courier New"/>
+                <a:ea typeface="+mn-ea"/>
+                <a:cs typeface="Courier New"/>
+              </a:rPr>
+              <a:t>3</a:t>
+            </a:r>
+            <a:r>
+              <a:rPr kumimoji="0" sz="2000" b="1" i="0" u="none" strike="noStrike" kern="1200" cap="none" spc="-5" normalizeH="0" baseline="0" noProof="0" dirty="0">
+                <a:ln>
+                  <a:noFill/>
+                </a:ln>
+                <a:solidFill>
+                  <a:srgbClr val="00FF00"/>
+                </a:solidFill>
+                <a:effectLst/>
+                <a:uLnTx/>
+                <a:uFillTx/>
+                <a:latin typeface="Courier New"/>
+                <a:ea typeface="+mn-ea"/>
+                <a:cs typeface="Courier New"/>
+              </a:rPr>
+              <a:t> </a:t>
+            </a:r>
+            <a:r>
+              <a:rPr kumimoji="0" sz="2000" b="1" i="0" u="none" strike="noStrike" kern="1200" cap="none" spc="0" normalizeH="0" baseline="0" noProof="0" dirty="0">
+                <a:ln>
+                  <a:noFill/>
+                </a:ln>
+                <a:solidFill>
+                  <a:srgbClr val="00FF00"/>
+                </a:solidFill>
+                <a:effectLst/>
+                <a:uLnTx/>
+                <a:uFillTx/>
+                <a:latin typeface="Courier New"/>
+                <a:ea typeface="+mn-ea"/>
+                <a:cs typeface="Courier New"/>
+              </a:rPr>
+              <a:t>4</a:t>
+            </a:r>
+            <a:endParaRPr kumimoji="0" lang="en-US" sz="2000" b="1" i="0" u="none" strike="noStrike" kern="1200" cap="none" spc="0" normalizeH="0" baseline="0" noProof="0" dirty="0">
+              <a:ln>
+                <a:noFill/>
+              </a:ln>
+              <a:solidFill>
+                <a:srgbClr val="00FF00"/>
+              </a:solidFill>
+              <a:effectLst/>
+              <a:uLnTx/>
+              <a:uFillTx/>
+              <a:latin typeface="Courier New"/>
+              <a:ea typeface="+mn-ea"/>
+              <a:cs typeface="Courier New"/>
+            </a:endParaRPr>
+          </a:p>
+          <a:p>
+            <a:pPr marL="1765300" marR="0" lvl="0" indent="0" algn="l" defTabSz="914400" rtl="0" eaLnBrk="1" fontAlgn="auto" latinLnBrk="0" hangingPunct="1">
+              <a:lnSpc>
+                <a:spcPct val="100000"/>
+              </a:lnSpc>
+              <a:spcBef>
+                <a:spcPts val="0"/>
+              </a:spcBef>
+              <a:spcAft>
+                <a:spcPts val="0"/>
+              </a:spcAft>
+              <a:buClrTx/>
+              <a:buSzTx/>
+              <a:buFontTx/>
+              <a:buNone/>
+              <a:tabLst/>
+              <a:defRPr/>
+            </a:pPr>
+            <a:endParaRPr kumimoji="0" lang="en-US" sz="2000" b="0" i="0" u="none" strike="noStrike" kern="1200" cap="none" spc="0" normalizeH="0" baseline="0" noProof="0" dirty="0">
+              <a:ln>
+                <a:noFill/>
+              </a:ln>
+              <a:solidFill>
+                <a:srgbClr val="00FF00"/>
+              </a:solidFill>
+              <a:effectLst/>
+              <a:uLnTx/>
+              <a:uFillTx/>
+              <a:latin typeface="Courier New"/>
+              <a:ea typeface="+mn-ea"/>
+              <a:cs typeface="Courier New"/>
+            </a:endParaRPr>
+          </a:p>
+          <a:p>
+            <a:pPr marL="1765300" marR="0" lvl="0" indent="0" algn="l" defTabSz="914400" rtl="0" eaLnBrk="1" fontAlgn="auto" latinLnBrk="0" hangingPunct="1">
+              <a:lnSpc>
+                <a:spcPct val="100000"/>
+              </a:lnSpc>
+              <a:spcBef>
+                <a:spcPts val="0"/>
+              </a:spcBef>
+              <a:spcAft>
+                <a:spcPts val="0"/>
+              </a:spcAft>
+              <a:buClrTx/>
+              <a:buSzTx/>
+              <a:buFontTx/>
+              <a:buNone/>
+              <a:tabLst/>
+              <a:defRPr/>
+            </a:pPr>
+            <a:endParaRPr kumimoji="0" lang="en-US" sz="2000" b="0" i="0" u="none" strike="noStrike" kern="1200" cap="none" spc="0" normalizeH="0" baseline="0" noProof="0" dirty="0">
+              <a:ln>
+                <a:noFill/>
+              </a:ln>
+              <a:solidFill>
+                <a:srgbClr val="00FF00"/>
+              </a:solidFill>
+              <a:effectLst/>
+              <a:uLnTx/>
+              <a:uFillTx/>
+              <a:latin typeface="Courier New"/>
+              <a:ea typeface="+mn-ea"/>
+              <a:cs typeface="Courier New"/>
+            </a:endParaRPr>
+          </a:p>
+          <a:p>
+            <a:pPr marL="1765300" marR="0" lvl="0" indent="0" algn="l" defTabSz="914400" rtl="0" eaLnBrk="1" fontAlgn="auto" latinLnBrk="0" hangingPunct="1">
+              <a:lnSpc>
+                <a:spcPct val="100000"/>
+              </a:lnSpc>
+              <a:spcBef>
+                <a:spcPts val="1215"/>
+              </a:spcBef>
+              <a:spcAft>
+                <a:spcPts val="0"/>
+              </a:spcAft>
+              <a:buClrTx/>
+              <a:buSzTx/>
+              <a:buFontTx/>
+              <a:buNone/>
+              <a:tabLst/>
+              <a:defRPr/>
+            </a:pPr>
+            <a:r>
+              <a:rPr kumimoji="0" sz="2000" b="0" i="0" u="none" strike="noStrike" kern="1200" cap="none" spc="-5" normalizeH="0" baseline="0" noProof="0" dirty="0">
+                <a:ln>
+                  <a:noFill/>
+                </a:ln>
+                <a:solidFill>
+                  <a:srgbClr val="00FF00"/>
+                </a:solidFill>
+                <a:effectLst/>
+                <a:uLnTx/>
+                <a:uFillTx/>
+                <a:latin typeface="Courier New"/>
+                <a:ea typeface="+mn-ea"/>
+                <a:cs typeface="Courier New"/>
+              </a:rPr>
+              <a:t>&gt;&gt;</a:t>
+            </a:r>
+            <a:r>
+              <a:rPr kumimoji="0" sz="2000" b="0" i="0" u="none" strike="noStrike" kern="1200" cap="none" spc="0" normalizeH="0" baseline="0" noProof="0" dirty="0">
+                <a:ln>
+                  <a:noFill/>
+                </a:ln>
+                <a:solidFill>
+                  <a:srgbClr val="00FF00"/>
+                </a:solidFill>
+                <a:effectLst/>
+                <a:uLnTx/>
+                <a:uFillTx/>
+                <a:latin typeface="Courier New"/>
+                <a:ea typeface="+mn-ea"/>
+                <a:cs typeface="Courier New"/>
+              </a:rPr>
+              <a:t>&gt;</a:t>
+            </a:r>
+            <a:r>
+              <a:rPr kumimoji="0" sz="2000" b="0" i="0" u="none" strike="noStrike" kern="1200" cap="none" spc="-5" normalizeH="0" baseline="0" noProof="0" dirty="0">
+                <a:ln>
+                  <a:noFill/>
+                </a:ln>
+                <a:solidFill>
+                  <a:srgbClr val="00FF00"/>
+                </a:solidFill>
+                <a:effectLst/>
+                <a:uLnTx/>
+                <a:uFillTx/>
+                <a:latin typeface="Courier New"/>
+                <a:ea typeface="+mn-ea"/>
+                <a:cs typeface="Courier New"/>
+              </a:rPr>
+              <a:t> </a:t>
+            </a:r>
+            <a:r>
+              <a:rPr kumimoji="0" sz="2000" b="0" i="0" u="none" strike="noStrike" kern="1200" cap="none" spc="0" normalizeH="0" baseline="0" noProof="0" dirty="0">
+                <a:ln>
+                  <a:noFill/>
+                </a:ln>
+                <a:solidFill>
+                  <a:srgbClr val="00FF00"/>
+                </a:solidFill>
+                <a:effectLst/>
+                <a:uLnTx/>
+                <a:uFillTx/>
+                <a:latin typeface="Courier New"/>
+                <a:ea typeface="+mn-ea"/>
+                <a:cs typeface="Courier New"/>
+              </a:rPr>
+              <a:t>p</a:t>
+            </a:r>
+            <a:r>
+              <a:rPr kumimoji="0" sz="2000" b="0" i="0" u="none" strike="noStrike" kern="1200" cap="none" spc="-5" normalizeH="0" baseline="0" noProof="0" dirty="0">
+                <a:ln>
+                  <a:noFill/>
+                </a:ln>
+                <a:solidFill>
+                  <a:srgbClr val="00FF00"/>
+                </a:solidFill>
+                <a:effectLst/>
+                <a:uLnTx/>
+                <a:uFillTx/>
+                <a:latin typeface="Courier New"/>
+                <a:ea typeface="+mn-ea"/>
+                <a:cs typeface="Courier New"/>
+              </a:rPr>
+              <a:t> </a:t>
+            </a:r>
+            <a:r>
+              <a:rPr kumimoji="0" sz="2000" b="0" i="0" u="none" strike="noStrike" kern="1200" cap="none" spc="0" normalizeH="0" baseline="0" noProof="0" dirty="0">
+                <a:ln>
+                  <a:noFill/>
+                </a:ln>
+                <a:solidFill>
+                  <a:srgbClr val="00FF00"/>
+                </a:solidFill>
+                <a:effectLst/>
+                <a:uLnTx/>
+                <a:uFillTx/>
+                <a:latin typeface="Courier New"/>
+                <a:ea typeface="+mn-ea"/>
+                <a:cs typeface="Courier New"/>
+              </a:rPr>
+              <a:t>=</a:t>
+            </a:r>
+            <a:r>
+              <a:rPr kumimoji="0" sz="2000" b="0" i="0" u="none" strike="noStrike" kern="1200" cap="none" spc="-5" normalizeH="0" baseline="0" noProof="0" dirty="0">
+                <a:ln>
+                  <a:noFill/>
+                </a:ln>
+                <a:solidFill>
+                  <a:srgbClr val="00FF00"/>
+                </a:solidFill>
+                <a:effectLst/>
+                <a:uLnTx/>
+                <a:uFillTx/>
+                <a:latin typeface="Courier New"/>
+                <a:ea typeface="+mn-ea"/>
+                <a:cs typeface="Courier New"/>
+              </a:rPr>
+              <a:t> Point(3,</a:t>
+            </a:r>
+            <a:r>
+              <a:rPr kumimoji="0" sz="2000" b="0" i="0" u="none" strike="noStrike" kern="1200" cap="none" spc="0" normalizeH="0" baseline="0" noProof="0" dirty="0">
+                <a:ln>
+                  <a:noFill/>
+                </a:ln>
+                <a:solidFill>
+                  <a:srgbClr val="00FF00"/>
+                </a:solidFill>
+                <a:effectLst/>
+                <a:uLnTx/>
+                <a:uFillTx/>
+                <a:latin typeface="Courier New"/>
+                <a:ea typeface="+mn-ea"/>
+                <a:cs typeface="Courier New"/>
+              </a:rPr>
+              <a:t>4)</a:t>
+            </a:r>
+          </a:p>
+          <a:p>
+            <a:pPr marL="1765300" marR="0" lvl="0" indent="0" algn="l" defTabSz="914400" rtl="0" eaLnBrk="1" fontAlgn="auto" latinLnBrk="0" hangingPunct="1">
+              <a:lnSpc>
+                <a:spcPct val="100000"/>
+              </a:lnSpc>
+              <a:spcBef>
+                <a:spcPts val="0"/>
+              </a:spcBef>
+              <a:spcAft>
+                <a:spcPts val="0"/>
+              </a:spcAft>
+              <a:buClrTx/>
+              <a:buSzTx/>
+              <a:buFontTx/>
+              <a:buNone/>
+              <a:tabLst/>
+              <a:defRPr/>
+            </a:pPr>
+            <a:r>
+              <a:rPr kumimoji="0" sz="2000" b="0" i="0" u="none" strike="noStrike" kern="1200" cap="none" spc="-5" normalizeH="0" baseline="0" noProof="0" dirty="0">
+                <a:ln>
+                  <a:noFill/>
+                </a:ln>
+                <a:solidFill>
+                  <a:srgbClr val="00FF00"/>
+                </a:solidFill>
+                <a:effectLst/>
+                <a:uLnTx/>
+                <a:uFillTx/>
+                <a:latin typeface="Courier New"/>
+                <a:ea typeface="+mn-ea"/>
+                <a:cs typeface="Courier New"/>
+              </a:rPr>
+              <a:t>&gt;&gt;</a:t>
+            </a:r>
+            <a:r>
+              <a:rPr kumimoji="0" sz="2000" b="0" i="0" u="none" strike="noStrike" kern="1200" cap="none" spc="0" normalizeH="0" baseline="0" noProof="0" dirty="0">
+                <a:ln>
+                  <a:noFill/>
+                </a:ln>
+                <a:solidFill>
+                  <a:srgbClr val="00FF00"/>
+                </a:solidFill>
+                <a:effectLst/>
+                <a:uLnTx/>
+                <a:uFillTx/>
+                <a:latin typeface="Courier New"/>
+                <a:ea typeface="+mn-ea"/>
+                <a:cs typeface="Courier New"/>
+              </a:rPr>
+              <a:t>&gt; </a:t>
+            </a:r>
+            <a:r>
+              <a:rPr kumimoji="0" sz="2000" b="0" i="0" u="none" strike="noStrike" kern="1200" cap="none" spc="-5" normalizeH="0" baseline="0" noProof="0" dirty="0">
+                <a:ln>
+                  <a:noFill/>
+                </a:ln>
+                <a:solidFill>
+                  <a:srgbClr val="00FF00"/>
+                </a:solidFill>
+                <a:effectLst/>
+                <a:uLnTx/>
+                <a:uFillTx/>
+                <a:latin typeface="Courier New"/>
+                <a:ea typeface="+mn-ea"/>
+                <a:cs typeface="Courier New"/>
+              </a:rPr>
+              <a:t>p.</a:t>
+            </a:r>
+            <a:r>
+              <a:rPr lang="en-US" sz="2000" spc="-5" dirty="0" err="1">
+                <a:solidFill>
+                  <a:srgbClr val="00FF00"/>
+                </a:solidFill>
+                <a:latin typeface="Courier New"/>
+                <a:cs typeface="Courier New"/>
+              </a:rPr>
+              <a:t>to_string</a:t>
+            </a:r>
+            <a:r>
+              <a:rPr kumimoji="0" lang="en-US" sz="2000" b="0" i="0" u="none" strike="noStrike" kern="1200" cap="none" spc="-5" normalizeH="0" baseline="0" noProof="0" dirty="0">
+                <a:ln>
+                  <a:noFill/>
+                </a:ln>
+                <a:solidFill>
+                  <a:srgbClr val="00FF00"/>
+                </a:solidFill>
+                <a:effectLst/>
+                <a:uLnTx/>
+                <a:uFillTx/>
+                <a:latin typeface="Courier New"/>
+                <a:ea typeface="+mn-ea"/>
+                <a:cs typeface="Courier New"/>
+              </a:rPr>
+              <a:t>()</a:t>
+            </a:r>
+            <a:endParaRPr kumimoji="0" sz="2000" b="0" i="0" u="none" strike="noStrike" kern="1200" cap="none" spc="0" normalizeH="0" baseline="0" noProof="0" dirty="0">
+              <a:ln>
+                <a:noFill/>
+              </a:ln>
+              <a:solidFill>
+                <a:srgbClr val="00FF00"/>
+              </a:solidFill>
+              <a:effectLst/>
+              <a:uLnTx/>
+              <a:uFillTx/>
+              <a:latin typeface="Courier New"/>
+              <a:ea typeface="+mn-ea"/>
+              <a:cs typeface="Courier New"/>
+            </a:endParaRPr>
+          </a:p>
+          <a:p>
+            <a:pPr marL="1765300" marR="0" lvl="0" indent="0" algn="l" defTabSz="914400" rtl="0" eaLnBrk="1" fontAlgn="auto" latinLnBrk="0" hangingPunct="1">
+              <a:lnSpc>
+                <a:spcPct val="100000"/>
+              </a:lnSpc>
+              <a:spcBef>
+                <a:spcPts val="0"/>
+              </a:spcBef>
+              <a:spcAft>
+                <a:spcPts val="0"/>
+              </a:spcAft>
+              <a:buClrTx/>
+              <a:buSzTx/>
+              <a:buFontTx/>
+              <a:buNone/>
+              <a:tabLst/>
+              <a:defRPr/>
+            </a:pPr>
+            <a:r>
+              <a:rPr kumimoji="0" sz="2000" b="1" i="0" u="none" strike="noStrike" kern="1200" cap="none" spc="-5" normalizeH="0" baseline="0" noProof="0" dirty="0">
+                <a:ln>
+                  <a:noFill/>
+                </a:ln>
+                <a:solidFill>
+                  <a:srgbClr val="00FF00"/>
+                </a:solidFill>
+                <a:effectLst/>
+                <a:uLnTx/>
+                <a:uFillTx/>
+                <a:latin typeface="Courier New"/>
+                <a:ea typeface="+mn-ea"/>
+                <a:cs typeface="Courier New"/>
+              </a:rPr>
+              <a:t>'(3,4)'</a:t>
+            </a:r>
+            <a:endParaRPr kumimoji="0" sz="2000" b="0" i="0" u="none" strike="noStrike" kern="1200" cap="none" spc="0" normalizeH="0" baseline="0" noProof="0" dirty="0">
+              <a:ln>
+                <a:noFill/>
+              </a:ln>
+              <a:solidFill>
+                <a:srgbClr val="00FF00"/>
+              </a:solidFill>
+              <a:effectLst/>
+              <a:uLnTx/>
+              <a:uFillTx/>
+              <a:latin typeface="Courier New"/>
+              <a:ea typeface="+mn-ea"/>
+              <a:cs typeface="Courier New"/>
+            </a:endParaRPr>
+          </a:p>
+          <a:p>
+            <a:pPr marL="1765300" marR="0" lvl="0" indent="0" algn="l" defTabSz="914400" rtl="0" eaLnBrk="1" fontAlgn="auto" latinLnBrk="0" hangingPunct="1">
+              <a:lnSpc>
+                <a:spcPct val="100000"/>
+              </a:lnSpc>
+              <a:spcBef>
+                <a:spcPts val="0"/>
+              </a:spcBef>
+              <a:spcAft>
+                <a:spcPts val="0"/>
+              </a:spcAft>
+              <a:buClrTx/>
+              <a:buSzTx/>
+              <a:buFontTx/>
+              <a:buNone/>
+              <a:tabLst/>
+              <a:defRPr/>
+            </a:pPr>
+            <a:r>
+              <a:rPr kumimoji="0" sz="2000" b="0" i="0" u="none" strike="noStrike" kern="1200" cap="none" spc="-5" normalizeH="0" baseline="0" noProof="0" dirty="0">
+                <a:ln>
+                  <a:noFill/>
+                </a:ln>
+                <a:solidFill>
+                  <a:srgbClr val="00FF00"/>
+                </a:solidFill>
+                <a:effectLst/>
+                <a:uLnTx/>
+                <a:uFillTx/>
+                <a:latin typeface="Courier New"/>
+                <a:ea typeface="+mn-ea"/>
+                <a:cs typeface="Courier New"/>
+              </a:rPr>
+              <a:t>&gt;&gt;</a:t>
+            </a:r>
+            <a:r>
+              <a:rPr kumimoji="0" sz="2000" b="0" i="0" u="none" strike="noStrike" kern="1200" cap="none" spc="0" normalizeH="0" baseline="0" noProof="0" dirty="0">
+                <a:ln>
+                  <a:noFill/>
+                </a:ln>
+                <a:solidFill>
+                  <a:srgbClr val="00FF00"/>
+                </a:solidFill>
+                <a:effectLst/>
+                <a:uLnTx/>
+                <a:uFillTx/>
+                <a:latin typeface="Courier New"/>
+                <a:ea typeface="+mn-ea"/>
+                <a:cs typeface="Courier New"/>
+              </a:rPr>
+              <a:t>&gt;</a:t>
+            </a:r>
+            <a:r>
+              <a:rPr kumimoji="0" sz="2000" b="0" i="0" u="none" strike="noStrike" kern="1200" cap="none" spc="-5" normalizeH="0" baseline="0" noProof="0" dirty="0">
+                <a:ln>
+                  <a:noFill/>
+                </a:ln>
+                <a:solidFill>
+                  <a:srgbClr val="00FF00"/>
+                </a:solidFill>
+                <a:effectLst/>
+                <a:uLnTx/>
+                <a:uFillTx/>
+                <a:latin typeface="Courier New"/>
+                <a:ea typeface="+mn-ea"/>
+                <a:cs typeface="Courier New"/>
+              </a:rPr>
+              <a:t> </a:t>
+            </a:r>
+            <a:r>
+              <a:rPr kumimoji="0" sz="2000" b="0" i="0" u="none" strike="noStrike" kern="1200" cap="none" spc="0" normalizeH="0" baseline="0" noProof="0" dirty="0">
+                <a:ln>
+                  <a:noFill/>
+                </a:ln>
+                <a:solidFill>
+                  <a:srgbClr val="00FF00"/>
+                </a:solidFill>
+                <a:effectLst/>
+                <a:uLnTx/>
+                <a:uFillTx/>
+                <a:latin typeface="Courier New"/>
+                <a:ea typeface="+mn-ea"/>
+                <a:cs typeface="Courier New"/>
+              </a:rPr>
+              <a:t>r =</a:t>
+            </a:r>
+            <a:r>
+              <a:rPr kumimoji="0" sz="2000" b="0" i="0" u="none" strike="noStrike" kern="1200" cap="none" spc="-5" normalizeH="0" baseline="0" noProof="0" dirty="0">
+                <a:ln>
+                  <a:noFill/>
+                </a:ln>
+                <a:solidFill>
+                  <a:srgbClr val="00FF00"/>
+                </a:solidFill>
+                <a:effectLst/>
+                <a:uLnTx/>
+                <a:uFillTx/>
+                <a:latin typeface="Courier New"/>
+                <a:ea typeface="+mn-ea"/>
+                <a:cs typeface="Courier New"/>
+              </a:rPr>
+              <a:t> p.halfway(Point(5,12))</a:t>
+            </a:r>
+            <a:endParaRPr kumimoji="0" sz="2000" b="0" i="0" u="none" strike="noStrike" kern="1200" cap="none" spc="0" normalizeH="0" baseline="0" noProof="0" dirty="0">
+              <a:ln>
+                <a:noFill/>
+              </a:ln>
+              <a:solidFill>
+                <a:srgbClr val="00FF00"/>
+              </a:solidFill>
+              <a:effectLst/>
+              <a:uLnTx/>
+              <a:uFillTx/>
+              <a:latin typeface="Courier New"/>
+              <a:ea typeface="+mn-ea"/>
+              <a:cs typeface="Courier New"/>
+            </a:endParaRPr>
+          </a:p>
+          <a:p>
+            <a:pPr marL="1765300" marR="0" lvl="0" indent="0" algn="l" defTabSz="914400" rtl="0" eaLnBrk="1" fontAlgn="auto" latinLnBrk="0" hangingPunct="1">
+              <a:lnSpc>
+                <a:spcPct val="100000"/>
+              </a:lnSpc>
+              <a:spcBef>
+                <a:spcPts val="0"/>
+              </a:spcBef>
+              <a:spcAft>
+                <a:spcPts val="0"/>
+              </a:spcAft>
+              <a:buClrTx/>
+              <a:buSzTx/>
+              <a:buFontTx/>
+              <a:buNone/>
+              <a:tabLst/>
+              <a:defRPr/>
+            </a:pPr>
+            <a:r>
+              <a:rPr kumimoji="0" sz="2000" b="0" i="0" u="none" strike="noStrike" kern="1200" cap="none" spc="-5" normalizeH="0" baseline="0" noProof="0" dirty="0">
+                <a:ln>
+                  <a:noFill/>
+                </a:ln>
+                <a:solidFill>
+                  <a:srgbClr val="00FF00"/>
+                </a:solidFill>
+                <a:effectLst/>
+                <a:uLnTx/>
+                <a:uFillTx/>
+                <a:latin typeface="Courier New"/>
+                <a:ea typeface="+mn-ea"/>
+                <a:cs typeface="Courier New"/>
+              </a:rPr>
+              <a:t>&gt;&gt;</a:t>
+            </a:r>
+            <a:r>
+              <a:rPr kumimoji="0" sz="2000" b="0" i="0" u="none" strike="noStrike" kern="1200" cap="none" spc="0" normalizeH="0" baseline="0" noProof="0" dirty="0">
+                <a:ln>
+                  <a:noFill/>
+                </a:ln>
+                <a:solidFill>
+                  <a:srgbClr val="00FF00"/>
+                </a:solidFill>
+                <a:effectLst/>
+                <a:uLnTx/>
+                <a:uFillTx/>
+                <a:latin typeface="Courier New"/>
+                <a:ea typeface="+mn-ea"/>
+                <a:cs typeface="Courier New"/>
+              </a:rPr>
+              <a:t>&gt; </a:t>
+            </a:r>
+            <a:r>
+              <a:rPr kumimoji="0" sz="2000" b="0" i="0" u="none" strike="noStrike" kern="1200" cap="none" spc="-5" normalizeH="0" baseline="0" noProof="0" dirty="0">
+                <a:ln>
+                  <a:noFill/>
+                </a:ln>
+                <a:solidFill>
+                  <a:srgbClr val="00FF00"/>
+                </a:solidFill>
+                <a:effectLst/>
+                <a:uLnTx/>
+                <a:uFillTx/>
+                <a:latin typeface="Courier New"/>
+                <a:ea typeface="+mn-ea"/>
+                <a:cs typeface="Courier New"/>
+              </a:rPr>
+              <a:t>r.</a:t>
+            </a:r>
+            <a:r>
+              <a:rPr lang="en-US" sz="2000" spc="-5" dirty="0" err="1">
+                <a:solidFill>
+                  <a:srgbClr val="00FF00"/>
+                </a:solidFill>
+                <a:latin typeface="Courier New"/>
+                <a:cs typeface="Courier New"/>
+              </a:rPr>
+              <a:t>to_string</a:t>
+            </a:r>
+            <a:r>
+              <a:rPr lang="en-US" sz="2000" spc="-5" dirty="0">
+                <a:solidFill>
+                  <a:srgbClr val="00FF00"/>
+                </a:solidFill>
+                <a:latin typeface="Courier New"/>
+                <a:cs typeface="Courier New"/>
+              </a:rPr>
+              <a:t>()</a:t>
+            </a:r>
+            <a:endParaRPr kumimoji="0" sz="2000" b="0" i="0" u="none" strike="noStrike" kern="1200" cap="none" spc="0" normalizeH="0" baseline="0" noProof="0" dirty="0">
+              <a:ln>
+                <a:noFill/>
+              </a:ln>
+              <a:solidFill>
+                <a:srgbClr val="00FF00"/>
+              </a:solidFill>
+              <a:effectLst/>
+              <a:uLnTx/>
+              <a:uFillTx/>
+              <a:latin typeface="Courier New"/>
+              <a:ea typeface="+mn-ea"/>
+              <a:cs typeface="Courier New"/>
+            </a:endParaRPr>
+          </a:p>
+          <a:p>
+            <a:pPr marL="1765300" marR="0" lvl="0" indent="0" algn="l" defTabSz="914400" rtl="0" eaLnBrk="1" fontAlgn="auto" latinLnBrk="0" hangingPunct="1">
+              <a:lnSpc>
+                <a:spcPct val="100000"/>
+              </a:lnSpc>
+              <a:spcBef>
+                <a:spcPts val="0"/>
+              </a:spcBef>
+              <a:spcAft>
+                <a:spcPts val="0"/>
+              </a:spcAft>
+              <a:buClrTx/>
+              <a:buSzTx/>
+              <a:buFontTx/>
+              <a:buNone/>
+              <a:tabLst/>
+              <a:defRPr/>
+            </a:pPr>
+            <a:r>
+              <a:rPr kumimoji="0" sz="2000" b="1" i="0" u="none" strike="noStrike" kern="1200" cap="none" spc="-5" normalizeH="0" baseline="0" noProof="0" dirty="0">
+                <a:ln>
+                  <a:noFill/>
+                </a:ln>
+                <a:solidFill>
+                  <a:srgbClr val="00FF00"/>
+                </a:solidFill>
+                <a:effectLst/>
+                <a:uLnTx/>
+                <a:uFillTx/>
+                <a:latin typeface="Courier New"/>
+                <a:ea typeface="+mn-ea"/>
+                <a:cs typeface="Courier New"/>
+              </a:rPr>
+              <a:t>'(4,8)'</a:t>
+            </a:r>
+            <a:endParaRPr kumimoji="0" sz="2000" b="0" i="0" u="none" strike="noStrike" kern="1200" cap="none" spc="0" normalizeH="0" baseline="0" noProof="0" dirty="0">
+              <a:ln>
+                <a:noFill/>
+              </a:ln>
+              <a:solidFill>
+                <a:srgbClr val="00FF00"/>
+              </a:solidFill>
+              <a:effectLst/>
+              <a:uLnTx/>
+              <a:uFillTx/>
+              <a:latin typeface="Courier New"/>
+              <a:ea typeface="+mn-ea"/>
+              <a:cs typeface="Courier New"/>
+            </a:endParaRPr>
+          </a:p>
+        </p:txBody>
+      </p:sp>
+      <p:sp>
+        <p:nvSpPr>
+          <p:cNvPr id="6" name="TextBox 5">
+            <a:extLst>
+              <a:ext uri="{FF2B5EF4-FFF2-40B4-BE49-F238E27FC236}">
+                <a16:creationId xmlns:a16="http://schemas.microsoft.com/office/drawing/2014/main" id="{120E1DC6-BC1E-1849-9678-E19549819074}"/>
+              </a:ext>
+            </a:extLst>
+          </p:cNvPr>
+          <p:cNvSpPr txBox="1"/>
+          <p:nvPr/>
+        </p:nvSpPr>
+        <p:spPr>
+          <a:xfrm>
+            <a:off x="-1407320" y="2778242"/>
+            <a:ext cx="7503320" cy="923330"/>
+          </a:xfrm>
+          <a:prstGeom prst="rect">
+            <a:avLst/>
+          </a:prstGeom>
+          <a:noFill/>
+        </p:spPr>
+        <p:txBody>
+          <a:bodyPr wrap="square">
+            <a:spAutoFit/>
+          </a:bodyPr>
+          <a:lstStyle/>
+          <a:p>
+            <a:pPr marL="1765300" marR="0" lvl="0" indent="0" algn="l" defTabSz="914400" rtl="0" eaLnBrk="1" fontAlgn="auto" latinLnBrk="0" hangingPunct="1">
+              <a:lnSpc>
+                <a:spcPct val="100000"/>
+              </a:lnSpc>
+              <a:spcBef>
+                <a:spcPts val="1865"/>
+              </a:spcBef>
+              <a:spcAft>
+                <a:spcPts val="0"/>
+              </a:spcAft>
+              <a:buClrTx/>
+              <a:buSzTx/>
+              <a:buFontTx/>
+              <a:buNone/>
+              <a:tabLst/>
+              <a:defRPr/>
+            </a:pPr>
+            <a:r>
+              <a:rPr kumimoji="0" lang="en-CA" sz="1800" b="0" i="0" u="none" strike="noStrike" kern="1200" cap="none" spc="-5" normalizeH="0" baseline="0" noProof="0" dirty="0">
+                <a:ln>
+                  <a:noFill/>
+                </a:ln>
+                <a:solidFill>
+                  <a:srgbClr val="00FF00"/>
+                </a:solidFill>
+                <a:effectLst/>
+                <a:uLnTx/>
+                <a:uFillTx/>
+                <a:latin typeface="Courier New"/>
+                <a:ea typeface="+mn-ea"/>
+                <a:cs typeface="Courier New"/>
+              </a:rPr>
+              <a:t>&gt;&gt;</a:t>
+            </a:r>
+            <a:r>
+              <a:rPr kumimoji="0" lang="en-CA" sz="1800" b="0" i="0" u="none" strike="noStrike" kern="1200" cap="none" spc="0" normalizeH="0" baseline="0" noProof="0" dirty="0">
+                <a:ln>
+                  <a:noFill/>
+                </a:ln>
+                <a:solidFill>
+                  <a:srgbClr val="00FF00"/>
+                </a:solidFill>
+                <a:effectLst/>
+                <a:uLnTx/>
+                <a:uFillTx/>
+                <a:latin typeface="Courier New"/>
+                <a:ea typeface="+mn-ea"/>
+                <a:cs typeface="Courier New"/>
+              </a:rPr>
+              <a:t>&gt;</a:t>
+            </a:r>
+            <a:r>
+              <a:rPr kumimoji="0" lang="en-CA" sz="1800" b="0" i="0" u="none" strike="noStrike" kern="1200" cap="none" spc="-5" normalizeH="0" baseline="0" noProof="0" dirty="0">
+                <a:ln>
+                  <a:noFill/>
+                </a:ln>
+                <a:solidFill>
+                  <a:srgbClr val="00FF00"/>
+                </a:solidFill>
+                <a:effectLst/>
+                <a:uLnTx/>
+                <a:uFillTx/>
+                <a:latin typeface="Courier New"/>
+                <a:ea typeface="+mn-ea"/>
+                <a:cs typeface="Courier New"/>
+              </a:rPr>
+              <a:t> </a:t>
+            </a:r>
+            <a:r>
+              <a:rPr kumimoji="0" lang="en-CA" sz="1800" b="0" i="0" u="none" strike="noStrike" kern="1200" cap="none" spc="0" normalizeH="0" baseline="0" noProof="0" dirty="0">
+                <a:ln>
+                  <a:noFill/>
+                </a:ln>
+                <a:solidFill>
+                  <a:srgbClr val="00FF00"/>
+                </a:solidFill>
+                <a:effectLst/>
+                <a:uLnTx/>
+                <a:uFillTx/>
+                <a:latin typeface="Courier New"/>
+                <a:ea typeface="+mn-ea"/>
+                <a:cs typeface="Courier New"/>
+              </a:rPr>
+              <a:t>p</a:t>
+            </a:r>
+            <a:r>
+              <a:rPr kumimoji="0" lang="en-CA" sz="1800" b="0" i="0" u="none" strike="noStrike" kern="1200" cap="none" spc="-5" normalizeH="0" baseline="0" noProof="0" dirty="0">
+                <a:ln>
+                  <a:noFill/>
+                </a:ln>
+                <a:solidFill>
+                  <a:srgbClr val="00FF00"/>
+                </a:solidFill>
+                <a:effectLst/>
+                <a:uLnTx/>
+                <a:uFillTx/>
+                <a:latin typeface="Courier New"/>
+                <a:ea typeface="+mn-ea"/>
+                <a:cs typeface="Courier New"/>
+              </a:rPr>
+              <a:t> </a:t>
+            </a:r>
+            <a:r>
+              <a:rPr kumimoji="0" lang="en-CA" sz="1800" b="0" i="0" u="none" strike="noStrike" kern="1200" cap="none" spc="0" normalizeH="0" baseline="0" noProof="0" dirty="0">
+                <a:ln>
+                  <a:noFill/>
+                </a:ln>
+                <a:solidFill>
+                  <a:srgbClr val="00FF00"/>
+                </a:solidFill>
+                <a:effectLst/>
+                <a:uLnTx/>
+                <a:uFillTx/>
+                <a:latin typeface="Courier New"/>
+                <a:ea typeface="+mn-ea"/>
+                <a:cs typeface="Courier New"/>
+              </a:rPr>
+              <a:t>=</a:t>
+            </a:r>
+            <a:r>
+              <a:rPr kumimoji="0" lang="en-CA" sz="1800" b="0" i="0" u="none" strike="noStrike" kern="1200" cap="none" spc="-5" normalizeH="0" baseline="0" noProof="0" dirty="0">
+                <a:ln>
+                  <a:noFill/>
+                </a:ln>
+                <a:solidFill>
+                  <a:srgbClr val="00FF00"/>
+                </a:solidFill>
+                <a:effectLst/>
+                <a:uLnTx/>
+                <a:uFillTx/>
+                <a:latin typeface="Courier New"/>
+                <a:ea typeface="+mn-ea"/>
+                <a:cs typeface="Courier New"/>
+              </a:rPr>
+              <a:t> Point(3,</a:t>
+            </a:r>
+            <a:r>
+              <a:rPr kumimoji="0" lang="en-CA" sz="1800" b="0" i="0" u="none" strike="noStrike" kern="1200" cap="none" spc="0" normalizeH="0" baseline="0" noProof="0" dirty="0">
+                <a:ln>
+                  <a:noFill/>
+                </a:ln>
+                <a:solidFill>
+                  <a:srgbClr val="00FF00"/>
+                </a:solidFill>
+                <a:effectLst/>
+                <a:uLnTx/>
+                <a:uFillTx/>
+                <a:latin typeface="Courier New"/>
+                <a:ea typeface="+mn-ea"/>
+                <a:cs typeface="Courier New"/>
+              </a:rPr>
+              <a:t>4)</a:t>
+            </a:r>
+          </a:p>
+          <a:p>
+            <a:pPr marL="1765300" marR="0" lvl="0" indent="0" algn="l" defTabSz="914400" rtl="0" eaLnBrk="1" fontAlgn="auto" latinLnBrk="0" hangingPunct="1">
+              <a:lnSpc>
+                <a:spcPct val="100000"/>
+              </a:lnSpc>
+              <a:spcBef>
+                <a:spcPts val="0"/>
+              </a:spcBef>
+              <a:spcAft>
+                <a:spcPts val="0"/>
+              </a:spcAft>
+              <a:buClrTx/>
+              <a:buSzTx/>
+              <a:buFontTx/>
+              <a:buNone/>
+              <a:tabLst/>
+              <a:defRPr/>
+            </a:pPr>
+            <a:r>
+              <a:rPr kumimoji="0" lang="en-CA" sz="1800" b="0" i="0" u="none" strike="noStrike" kern="1200" cap="none" spc="-5" normalizeH="0" baseline="0" noProof="0" dirty="0">
+                <a:ln>
+                  <a:noFill/>
+                </a:ln>
+                <a:solidFill>
+                  <a:srgbClr val="00FF00"/>
+                </a:solidFill>
+                <a:effectLst/>
+                <a:uLnTx/>
+                <a:uFillTx/>
+                <a:latin typeface="Courier New"/>
+                <a:ea typeface="+mn-ea"/>
+                <a:cs typeface="Courier New"/>
+              </a:rPr>
+              <a:t>&gt;&gt;</a:t>
+            </a:r>
+            <a:r>
+              <a:rPr kumimoji="0" lang="en-CA" sz="1800" b="0" i="0" u="none" strike="noStrike" kern="1200" cap="none" spc="0" normalizeH="0" baseline="0" noProof="0" dirty="0">
+                <a:ln>
+                  <a:noFill/>
+                </a:ln>
+                <a:solidFill>
+                  <a:srgbClr val="00FF00"/>
+                </a:solidFill>
+                <a:effectLst/>
+                <a:uLnTx/>
+                <a:uFillTx/>
+                <a:latin typeface="Courier New"/>
+                <a:ea typeface="+mn-ea"/>
+                <a:cs typeface="Courier New"/>
+              </a:rPr>
+              <a:t>&gt;</a:t>
+            </a:r>
+            <a:r>
+              <a:rPr kumimoji="0" lang="en-CA" sz="1800" b="0" i="0" u="none" strike="noStrike" kern="1200" cap="none" spc="-5" normalizeH="0" baseline="0" noProof="0" dirty="0">
+                <a:ln>
+                  <a:noFill/>
+                </a:ln>
+                <a:solidFill>
+                  <a:srgbClr val="00FF00"/>
+                </a:solidFill>
+                <a:effectLst/>
+                <a:uLnTx/>
+                <a:uFillTx/>
+                <a:latin typeface="Courier New"/>
+                <a:ea typeface="+mn-ea"/>
+                <a:cs typeface="Courier New"/>
+              </a:rPr>
+              <a:t> print</a:t>
+            </a:r>
+            <a:r>
+              <a:rPr kumimoji="0" lang="en-CA" sz="1800" b="0" i="0" u="none" strike="noStrike" kern="1200" cap="none" spc="0" normalizeH="0" baseline="0" noProof="0" dirty="0">
+                <a:ln>
+                  <a:noFill/>
+                </a:ln>
+                <a:solidFill>
+                  <a:srgbClr val="00FF00"/>
+                </a:solidFill>
+                <a:effectLst/>
+                <a:uLnTx/>
+                <a:uFillTx/>
+                <a:latin typeface="Courier New"/>
+                <a:ea typeface="+mn-ea"/>
+                <a:cs typeface="Courier New"/>
+              </a:rPr>
+              <a:t>(</a:t>
+            </a:r>
+            <a:r>
+              <a:rPr kumimoji="0" lang="en-CA" sz="1800" b="0" i="0" u="none" strike="noStrike" kern="1200" cap="none" spc="-5" normalizeH="0" baseline="0" noProof="0" dirty="0">
+                <a:ln>
+                  <a:noFill/>
+                </a:ln>
+                <a:solidFill>
+                  <a:srgbClr val="00FF00"/>
+                </a:solidFill>
+                <a:effectLst/>
+                <a:uLnTx/>
+                <a:uFillTx/>
+                <a:latin typeface="Courier New"/>
+                <a:ea typeface="+mn-ea"/>
+                <a:cs typeface="Courier New"/>
+              </a:rPr>
+              <a:t>p</a:t>
+            </a:r>
+            <a:r>
+              <a:rPr kumimoji="0" lang="en-CA" sz="1800" b="0" i="0" u="none" strike="noStrike" kern="1200" cap="none" spc="0" normalizeH="0" baseline="0" noProof="0" dirty="0">
+                <a:ln>
+                  <a:noFill/>
+                </a:ln>
+                <a:solidFill>
+                  <a:srgbClr val="00FF00"/>
+                </a:solidFill>
+                <a:effectLst/>
+                <a:uLnTx/>
+                <a:uFillTx/>
+                <a:latin typeface="Courier New"/>
+                <a:ea typeface="+mn-ea"/>
+                <a:cs typeface="Courier New"/>
+              </a:rPr>
+              <a:t>)</a:t>
+            </a:r>
+          </a:p>
+          <a:p>
+            <a:pPr marL="1765300" lvl="0">
+              <a:defRPr/>
+            </a:pPr>
+            <a:r>
+              <a:rPr lang="en-CA" dirty="0">
+                <a:solidFill>
+                  <a:srgbClr val="00FF00"/>
+                </a:solidFill>
+              </a:rPr>
+              <a:t>&lt;__</a:t>
+            </a:r>
+            <a:r>
+              <a:rPr lang="en-CA" dirty="0" err="1">
+                <a:solidFill>
+                  <a:srgbClr val="00FF00"/>
+                </a:solidFill>
+              </a:rPr>
+              <a:t>main__.Point</a:t>
+            </a:r>
+            <a:r>
+              <a:rPr lang="en-CA" dirty="0">
+                <a:solidFill>
+                  <a:srgbClr val="00FF00"/>
+                </a:solidFill>
+              </a:rPr>
+              <a:t> object at 0x7fd8100778b0&gt;</a:t>
+            </a:r>
+            <a:endParaRPr kumimoji="0" lang="en-CA" sz="1800" b="1" i="0" u="none" strike="noStrike" kern="1200" cap="none" spc="0" normalizeH="0" baseline="0" noProof="0" dirty="0">
+              <a:ln>
+                <a:noFill/>
+              </a:ln>
+              <a:solidFill>
+                <a:srgbClr val="00FF00"/>
+              </a:solidFill>
+              <a:effectLst/>
+              <a:uLnTx/>
+              <a:uFillTx/>
+              <a:latin typeface="Courier New"/>
+              <a:ea typeface="+mn-ea"/>
+              <a:cs typeface="Courier New"/>
+            </a:endParaRPr>
+          </a:p>
+        </p:txBody>
+      </p:sp>
+    </p:spTree>
+    <p:extLst>
+      <p:ext uri="{BB962C8B-B14F-4D97-AF65-F5344CB8AC3E}">
+        <p14:creationId xmlns:p14="http://schemas.microsoft.com/office/powerpoint/2010/main" val="3101585139"/>
+      </p:ext>
+    </p:extLst>
+  </p:cSld>
+  <p:clrMapOvr>
+    <a:masterClrMapping/>
+  </p:clrMapOvr>
+</p:sld>
+</file>
+
+<file path=ppt/slides/slide9.xml><?xml version="1.0" encoding="utf-8"?>
+<p:sld xmlns:a="http://schemas.openxmlformats.org/drawingml/2006/main" xmlns:r="http://schemas.openxmlformats.org/officeDocument/2006/relationships" xmlns:p="http://schemas.openxmlformats.org/presentationml/2006/main">
+  <p:cSld>
+    <p:spTree>
+      <p:nvGrpSpPr>
+        <p:cNvPr id="1" name=""/>
+        <p:cNvGrpSpPr/>
+        <p:nvPr/>
+      </p:nvGrpSpPr>
+      <p:grpSpPr>
+        <a:xfrm>
+          <a:off x="0" y="0"/>
+          <a:ext cx="0" cy="0"/>
+          <a:chOff x="0" y="0"/>
+          <a:chExt cx="0" cy="0"/>
+        </a:xfrm>
+      </p:grpSpPr>
+      <p:sp>
+        <p:nvSpPr>
+          <p:cNvPr id="2" name="Title 1">
+            <a:extLst>
+              <a:ext uri="{FF2B5EF4-FFF2-40B4-BE49-F238E27FC236}">
+                <a16:creationId xmlns:a16="http://schemas.microsoft.com/office/drawing/2014/main" id="{277B8662-D2F9-454D-8182-0E3A3A7F69EC}"/>
+              </a:ext>
+            </a:extLst>
+          </p:cNvPr>
+          <p:cNvSpPr>
+            <a:spLocks noGrp="1"/>
+          </p:cNvSpPr>
+          <p:nvPr>
+            <p:ph type="title"/>
+          </p:nvPr>
+        </p:nvSpPr>
+        <p:spPr/>
+        <p:txBody>
+          <a:bodyPr>
+            <a:normAutofit fontScale="90000"/>
+          </a:bodyPr>
+          <a:lstStyle/>
+          <a:p>
+            <a:r>
+              <a:rPr lang="en-US" dirty="0"/>
+              <a:t>Printing Information</a:t>
+            </a:r>
+          </a:p>
+        </p:txBody>
+      </p:sp>
+      <p:sp>
+        <p:nvSpPr>
+          <p:cNvPr id="3" name="Content Placeholder 2">
+            <a:extLst>
+              <a:ext uri="{FF2B5EF4-FFF2-40B4-BE49-F238E27FC236}">
+                <a16:creationId xmlns:a16="http://schemas.microsoft.com/office/drawing/2014/main" id="{816DE886-4A89-AD42-9138-CE102F1D6C87}"/>
+              </a:ext>
+            </a:extLst>
+          </p:cNvPr>
+          <p:cNvSpPr>
+            <a:spLocks noGrp="1"/>
+          </p:cNvSpPr>
+          <p:nvPr>
+            <p:ph idx="1"/>
+          </p:nvPr>
+        </p:nvSpPr>
+        <p:spPr/>
+        <p:txBody>
+          <a:bodyPr/>
+          <a:lstStyle/>
+          <a:p>
+            <a:r>
+              <a:rPr lang="en-US" dirty="0"/>
+              <a:t>If we had a method, we just need to format the attributes into a string:</a:t>
+            </a:r>
+          </a:p>
+          <a:p>
+            <a:endParaRPr lang="en-US" dirty="0"/>
+          </a:p>
+          <a:p>
+            <a:endParaRPr lang="en-US" dirty="0"/>
+          </a:p>
+          <a:p>
+            <a:endParaRPr lang="en-US" dirty="0"/>
+          </a:p>
+          <a:p>
+            <a:endParaRPr lang="en-US" dirty="0"/>
+          </a:p>
+          <a:p>
+            <a:endParaRPr lang="en-US" dirty="0"/>
+          </a:p>
+          <a:p>
+            <a:endParaRPr lang="en-US" dirty="0"/>
+          </a:p>
+          <a:p>
+            <a:r>
+              <a:rPr lang="en-US" dirty="0"/>
+              <a:t>We could make a similar method for any class (ex: Square)</a:t>
+            </a:r>
+          </a:p>
+        </p:txBody>
+      </p:sp>
+      <p:sp>
+        <p:nvSpPr>
+          <p:cNvPr id="6" name="TextBox 5">
+            <a:extLst>
+              <a:ext uri="{FF2B5EF4-FFF2-40B4-BE49-F238E27FC236}">
+                <a16:creationId xmlns:a16="http://schemas.microsoft.com/office/drawing/2014/main" id="{120E1DC6-BC1E-1849-9678-E19549819074}"/>
+              </a:ext>
+            </a:extLst>
+          </p:cNvPr>
+          <p:cNvSpPr txBox="1"/>
+          <p:nvPr/>
+        </p:nvSpPr>
+        <p:spPr>
+          <a:xfrm>
+            <a:off x="178590" y="2812201"/>
+            <a:ext cx="8422485" cy="2945661"/>
+          </a:xfrm>
+          <a:prstGeom prst="rect">
+            <a:avLst/>
+          </a:prstGeom>
+          <a:noFill/>
+        </p:spPr>
+        <p:txBody>
+          <a:bodyPr wrap="square">
+            <a:spAutoFit/>
+          </a:bodyPr>
+          <a:lstStyle/>
+          <a:p>
+            <a:pPr lvl="0">
+              <a:defRPr/>
+            </a:pPr>
+            <a:r>
+              <a:rPr lang="en-CA" spc="-5" dirty="0">
+                <a:solidFill>
+                  <a:schemeClr val="accent6"/>
+                </a:solidFill>
+                <a:latin typeface="Courier New"/>
+                <a:cs typeface="Courier New"/>
+              </a:rPr>
+              <a:t>class Point:</a:t>
+            </a:r>
+          </a:p>
+          <a:p>
+            <a:pPr lvl="0">
+              <a:defRPr/>
+            </a:pPr>
+            <a:r>
+              <a:rPr lang="en-CA" spc="-5" dirty="0">
+                <a:solidFill>
+                  <a:schemeClr val="accent6"/>
+                </a:solidFill>
+                <a:latin typeface="Courier New"/>
+                <a:cs typeface="Courier New"/>
+              </a:rPr>
+              <a:t>    </a:t>
+            </a:r>
+          </a:p>
+          <a:p>
+            <a:pPr lvl="0">
+              <a:defRPr/>
+            </a:pPr>
+            <a:r>
+              <a:rPr lang="en-CA" spc="-5" dirty="0">
+                <a:solidFill>
+                  <a:schemeClr val="accent6"/>
+                </a:solidFill>
+                <a:latin typeface="Courier New"/>
+                <a:cs typeface="Courier New"/>
+              </a:rPr>
+              <a:t>"""A class that represents and manipulates 2D points"""</a:t>
+            </a:r>
+          </a:p>
+          <a:p>
+            <a:pPr lvl="0">
+              <a:defRPr/>
+            </a:pPr>
+            <a:r>
+              <a:rPr lang="en-CA" spc="-5" dirty="0">
+                <a:solidFill>
+                  <a:srgbClr val="00FF00"/>
+                </a:solidFill>
+                <a:latin typeface="Courier New"/>
+                <a:cs typeface="Courier New"/>
+              </a:rPr>
+              <a:t>    </a:t>
+            </a:r>
+          </a:p>
+          <a:p>
+            <a:pPr lvl="0">
+              <a:defRPr/>
+            </a:pPr>
+            <a:r>
+              <a:rPr lang="en-CA" spc="-5" dirty="0">
+                <a:solidFill>
+                  <a:srgbClr val="00FF00"/>
+                </a:solidFill>
+                <a:latin typeface="Courier New"/>
+                <a:cs typeface="Courier New"/>
+              </a:rPr>
+              <a:t>    def </a:t>
+            </a:r>
+            <a:r>
+              <a:rPr lang="en-CA" spc="-5" dirty="0" err="1">
+                <a:solidFill>
+                  <a:srgbClr val="00FF00"/>
+                </a:solidFill>
+                <a:latin typeface="Courier New"/>
+                <a:cs typeface="Courier New"/>
+              </a:rPr>
+              <a:t>to_string</a:t>
+            </a:r>
+            <a:r>
+              <a:rPr lang="en-CA" spc="-5" dirty="0">
+                <a:solidFill>
+                  <a:srgbClr val="00FF00"/>
+                </a:solidFill>
+                <a:latin typeface="Courier New"/>
+                <a:cs typeface="Courier New"/>
+              </a:rPr>
+              <a:t>(self):</a:t>
+            </a:r>
+          </a:p>
+          <a:p>
+            <a:pPr lvl="0">
+              <a:defRPr/>
+            </a:pPr>
+            <a:r>
+              <a:rPr lang="en-CA" spc="-5" dirty="0">
+                <a:solidFill>
+                  <a:srgbClr val="00FF00"/>
+                </a:solidFill>
+                <a:latin typeface="Courier New"/>
+                <a:cs typeface="Courier New"/>
+              </a:rPr>
+              <a:t>        """</a:t>
+            </a:r>
+          </a:p>
+          <a:p>
+            <a:pPr lvl="0">
+              <a:defRPr/>
+            </a:pPr>
+            <a:r>
+              <a:rPr lang="en-CA" spc="-5" dirty="0">
+                <a:solidFill>
+                  <a:srgbClr val="00FF00"/>
+                </a:solidFill>
+                <a:latin typeface="Courier New"/>
+                <a:cs typeface="Courier New"/>
+              </a:rPr>
+              <a:t>        (self) -&gt; None</a:t>
+            </a:r>
+          </a:p>
+          <a:p>
+            <a:pPr lvl="0">
+              <a:defRPr/>
+            </a:pPr>
+            <a:r>
+              <a:rPr lang="en-CA" spc="-5" dirty="0">
+                <a:solidFill>
+                  <a:srgbClr val="00FF00"/>
+                </a:solidFill>
+                <a:latin typeface="Courier New"/>
+                <a:cs typeface="Courier New"/>
+              </a:rPr>
+              <a:t>        Prints the (x, y) coordinate for the point.</a:t>
+            </a:r>
+          </a:p>
+          <a:p>
+            <a:pPr lvl="0">
+              <a:defRPr/>
+            </a:pPr>
+            <a:r>
+              <a:rPr lang="en-CA" spc="-5" dirty="0">
+                <a:solidFill>
+                  <a:srgbClr val="00FF00"/>
+                </a:solidFill>
+                <a:latin typeface="Courier New"/>
+                <a:cs typeface="Courier New"/>
+              </a:rPr>
+              <a:t>        """</a:t>
+            </a:r>
+          </a:p>
+          <a:p>
+            <a:pPr lvl="0">
+              <a:defRPr/>
+            </a:pPr>
+            <a:r>
+              <a:rPr lang="en-CA" spc="-5" dirty="0">
+                <a:solidFill>
+                  <a:srgbClr val="00FF00"/>
+                </a:solidFill>
+                <a:latin typeface="Courier New"/>
+                <a:cs typeface="Courier New"/>
+              </a:rPr>
+              <a:t>        print('(' + str(</a:t>
+            </a:r>
+            <a:r>
+              <a:rPr lang="en-CA" spc="-5" dirty="0" err="1">
+                <a:solidFill>
+                  <a:srgbClr val="00FF00"/>
+                </a:solidFill>
+                <a:latin typeface="Courier New"/>
+                <a:cs typeface="Courier New"/>
+              </a:rPr>
+              <a:t>self.x</a:t>
+            </a:r>
+            <a:r>
+              <a:rPr lang="en-CA" spc="-5" dirty="0">
+                <a:solidFill>
+                  <a:srgbClr val="00FF00"/>
+                </a:solidFill>
+                <a:latin typeface="Courier New"/>
+                <a:cs typeface="Courier New"/>
+              </a:rPr>
+              <a:t>) + ', ' + str(</a:t>
+            </a:r>
+            <a:r>
+              <a:rPr lang="en-CA" spc="-5" dirty="0" err="1">
+                <a:solidFill>
+                  <a:srgbClr val="00FF00"/>
+                </a:solidFill>
+                <a:latin typeface="Courier New"/>
+                <a:cs typeface="Courier New"/>
+              </a:rPr>
+              <a:t>self.y</a:t>
+            </a:r>
+            <a:r>
+              <a:rPr lang="en-CA" spc="-5" dirty="0">
+                <a:solidFill>
+                  <a:srgbClr val="00FF00"/>
+                </a:solidFill>
+                <a:latin typeface="Courier New"/>
+                <a:cs typeface="Courier New"/>
+              </a:rPr>
+              <a:t>) + ')')</a:t>
+            </a:r>
+            <a:endParaRPr kumimoji="0" lang="en-CA" sz="1800" b="1" i="0" u="none" strike="noStrike" kern="1200" cap="none" spc="0" normalizeH="0" baseline="0" noProof="0" dirty="0">
+              <a:ln>
+                <a:noFill/>
+              </a:ln>
+              <a:solidFill>
+                <a:srgbClr val="00FF00"/>
+              </a:solidFill>
+              <a:effectLst/>
+              <a:uLnTx/>
+              <a:uFillTx/>
+              <a:latin typeface="Courier New"/>
+              <a:ea typeface="+mn-ea"/>
+              <a:cs typeface="Courier New"/>
+            </a:endParaRPr>
+          </a:p>
+        </p:txBody>
+      </p:sp>
+      <p:sp>
+        <p:nvSpPr>
+          <p:cNvPr id="7" name="TextBox 6">
+            <a:extLst>
+              <a:ext uri="{FF2B5EF4-FFF2-40B4-BE49-F238E27FC236}">
+                <a16:creationId xmlns:a16="http://schemas.microsoft.com/office/drawing/2014/main" id="{193F6282-2CF2-3A45-AD92-A60375377CB9}"/>
+              </a:ext>
+            </a:extLst>
+          </p:cNvPr>
+          <p:cNvSpPr txBox="1"/>
+          <p:nvPr/>
+        </p:nvSpPr>
+        <p:spPr>
+          <a:xfrm>
+            <a:off x="6096000" y="2812201"/>
+            <a:ext cx="6165057" cy="1754326"/>
+          </a:xfrm>
+          <a:prstGeom prst="rect">
+            <a:avLst/>
+          </a:prstGeom>
+          <a:noFill/>
+        </p:spPr>
+        <p:txBody>
+          <a:bodyPr wrap="square">
+            <a:spAutoFit/>
+          </a:bodyPr>
+          <a:lstStyle/>
+          <a:p>
+            <a:pPr marL="1765300" marR="0" lvl="0" indent="0" algn="l" defTabSz="914400" rtl="0" eaLnBrk="1" fontAlgn="auto" latinLnBrk="0" hangingPunct="1">
+              <a:lnSpc>
+                <a:spcPct val="100000"/>
+              </a:lnSpc>
+              <a:spcBef>
+                <a:spcPts val="1215"/>
+              </a:spcBef>
+              <a:spcAft>
+                <a:spcPts val="0"/>
+              </a:spcAft>
+              <a:buClrTx/>
+              <a:buSzTx/>
+              <a:buFontTx/>
+              <a:buNone/>
+              <a:tabLst/>
+              <a:defRPr/>
+            </a:pPr>
+            <a:r>
+              <a:rPr kumimoji="0" lang="en-CA" sz="1800" b="0" i="0" u="none" strike="noStrike" kern="1200" cap="none" spc="-5" normalizeH="0" baseline="0" noProof="0" dirty="0">
+                <a:ln>
+                  <a:noFill/>
+                </a:ln>
+                <a:solidFill>
+                  <a:srgbClr val="00FCFF"/>
+                </a:solidFill>
+                <a:effectLst/>
+                <a:uLnTx/>
+                <a:uFillTx/>
+                <a:latin typeface="Courier New"/>
+                <a:ea typeface="+mn-ea"/>
+                <a:cs typeface="Courier New"/>
+              </a:rPr>
+              <a:t>&gt;&gt;</a:t>
+            </a:r>
+            <a:r>
+              <a:rPr kumimoji="0" lang="en-CA" sz="1800" b="0" i="0" u="none" strike="noStrike" kern="1200" cap="none" spc="0" normalizeH="0" baseline="0" noProof="0" dirty="0">
+                <a:ln>
+                  <a:noFill/>
+                </a:ln>
+                <a:solidFill>
+                  <a:srgbClr val="00FCFF"/>
+                </a:solidFill>
+                <a:effectLst/>
+                <a:uLnTx/>
+                <a:uFillTx/>
+                <a:latin typeface="Courier New"/>
+                <a:ea typeface="+mn-ea"/>
+                <a:cs typeface="Courier New"/>
+              </a:rPr>
+              <a:t>&gt;</a:t>
+            </a:r>
+            <a:r>
+              <a:rPr kumimoji="0" lang="en-CA" sz="1800" b="0" i="0" u="none" strike="noStrike" kern="1200" cap="none" spc="-5" normalizeH="0" baseline="0" noProof="0" dirty="0">
+                <a:ln>
+                  <a:noFill/>
+                </a:ln>
+                <a:solidFill>
+                  <a:srgbClr val="00FCFF"/>
+                </a:solidFill>
+                <a:effectLst/>
+                <a:uLnTx/>
+                <a:uFillTx/>
+                <a:latin typeface="Courier New"/>
+                <a:ea typeface="+mn-ea"/>
+                <a:cs typeface="Courier New"/>
+              </a:rPr>
+              <a:t> </a:t>
+            </a:r>
+            <a:r>
+              <a:rPr kumimoji="0" lang="en-CA" sz="1800" b="0" i="0" u="none" strike="noStrike" kern="1200" cap="none" spc="0" normalizeH="0" baseline="0" noProof="0" dirty="0">
+                <a:ln>
+                  <a:noFill/>
+                </a:ln>
+                <a:solidFill>
+                  <a:srgbClr val="00FCFF"/>
+                </a:solidFill>
+                <a:effectLst/>
+                <a:uLnTx/>
+                <a:uFillTx/>
+                <a:latin typeface="Courier New"/>
+                <a:ea typeface="+mn-ea"/>
+                <a:cs typeface="Courier New"/>
+              </a:rPr>
+              <a:t>p</a:t>
+            </a:r>
+            <a:r>
+              <a:rPr kumimoji="0" lang="en-CA" sz="1800" b="0" i="0" u="none" strike="noStrike" kern="1200" cap="none" spc="-5" normalizeH="0" baseline="0" noProof="0" dirty="0">
+                <a:ln>
+                  <a:noFill/>
+                </a:ln>
+                <a:solidFill>
+                  <a:srgbClr val="00FCFF"/>
+                </a:solidFill>
+                <a:effectLst/>
+                <a:uLnTx/>
+                <a:uFillTx/>
+                <a:latin typeface="Courier New"/>
+                <a:ea typeface="+mn-ea"/>
+                <a:cs typeface="Courier New"/>
+              </a:rPr>
+              <a:t> </a:t>
+            </a:r>
+            <a:r>
+              <a:rPr kumimoji="0" lang="en-CA" sz="1800" b="0" i="0" u="none" strike="noStrike" kern="1200" cap="none" spc="0" normalizeH="0" baseline="0" noProof="0" dirty="0">
+                <a:ln>
+                  <a:noFill/>
+                </a:ln>
+                <a:solidFill>
+                  <a:srgbClr val="00FCFF"/>
+                </a:solidFill>
+                <a:effectLst/>
+                <a:uLnTx/>
+                <a:uFillTx/>
+                <a:latin typeface="Courier New"/>
+                <a:ea typeface="+mn-ea"/>
+                <a:cs typeface="Courier New"/>
+              </a:rPr>
+              <a:t>=</a:t>
+            </a:r>
+            <a:r>
+              <a:rPr kumimoji="0" lang="en-CA" sz="1800" b="0" i="0" u="none" strike="noStrike" kern="1200" cap="none" spc="-5" normalizeH="0" baseline="0" noProof="0" dirty="0">
+                <a:ln>
+                  <a:noFill/>
+                </a:ln>
+                <a:solidFill>
+                  <a:srgbClr val="00FCFF"/>
+                </a:solidFill>
+                <a:effectLst/>
+                <a:uLnTx/>
+                <a:uFillTx/>
+                <a:latin typeface="Courier New"/>
+                <a:ea typeface="+mn-ea"/>
+                <a:cs typeface="Courier New"/>
+              </a:rPr>
+              <a:t> Point(3,</a:t>
+            </a:r>
+            <a:r>
+              <a:rPr kumimoji="0" lang="en-CA" sz="1800" b="0" i="0" u="none" strike="noStrike" kern="1200" cap="none" spc="0" normalizeH="0" baseline="0" noProof="0" dirty="0">
+                <a:ln>
+                  <a:noFill/>
+                </a:ln>
+                <a:solidFill>
+                  <a:srgbClr val="00FCFF"/>
+                </a:solidFill>
+                <a:effectLst/>
+                <a:uLnTx/>
+                <a:uFillTx/>
+                <a:latin typeface="Courier New"/>
+                <a:ea typeface="+mn-ea"/>
+                <a:cs typeface="Courier New"/>
+              </a:rPr>
+              <a:t>4)</a:t>
+            </a:r>
+          </a:p>
+          <a:p>
+            <a:pPr marL="1765300" marR="0" lvl="0" indent="0" algn="l" defTabSz="914400" rtl="0" eaLnBrk="1" fontAlgn="auto" latinLnBrk="0" hangingPunct="1">
+              <a:lnSpc>
+                <a:spcPct val="100000"/>
+              </a:lnSpc>
+              <a:spcBef>
+                <a:spcPts val="0"/>
+              </a:spcBef>
+              <a:spcAft>
+                <a:spcPts val="0"/>
+              </a:spcAft>
+              <a:buClrTx/>
+              <a:buSzTx/>
+              <a:buFontTx/>
+              <a:buNone/>
+              <a:tabLst/>
+              <a:defRPr/>
+            </a:pPr>
+            <a:r>
+              <a:rPr kumimoji="0" lang="en-CA" sz="1800" b="0" i="0" u="none" strike="noStrike" kern="1200" cap="none" spc="-5" normalizeH="0" baseline="0" noProof="0" dirty="0">
+                <a:ln>
+                  <a:noFill/>
+                </a:ln>
+                <a:solidFill>
+                  <a:srgbClr val="00FCFF"/>
+                </a:solidFill>
+                <a:effectLst/>
+                <a:uLnTx/>
+                <a:uFillTx/>
+                <a:latin typeface="Courier New"/>
+                <a:ea typeface="+mn-ea"/>
+                <a:cs typeface="Courier New"/>
+              </a:rPr>
+              <a:t>&gt;&gt;</a:t>
+            </a:r>
+            <a:r>
+              <a:rPr kumimoji="0" lang="en-CA" sz="1800" b="0" i="0" u="none" strike="noStrike" kern="1200" cap="none" spc="0" normalizeH="0" baseline="0" noProof="0" dirty="0">
+                <a:ln>
+                  <a:noFill/>
+                </a:ln>
+                <a:solidFill>
+                  <a:srgbClr val="00FCFF"/>
+                </a:solidFill>
+                <a:effectLst/>
+                <a:uLnTx/>
+                <a:uFillTx/>
+                <a:latin typeface="Courier New"/>
+                <a:ea typeface="+mn-ea"/>
+                <a:cs typeface="Courier New"/>
+              </a:rPr>
+              <a:t>&gt; </a:t>
+            </a:r>
+            <a:r>
+              <a:rPr kumimoji="0" lang="en-CA" sz="1800" b="0" i="0" u="none" strike="noStrike" kern="1200" cap="none" spc="-5" normalizeH="0" baseline="0" noProof="0" dirty="0">
+                <a:ln>
+                  <a:noFill/>
+                </a:ln>
+                <a:solidFill>
+                  <a:srgbClr val="00FCFF"/>
+                </a:solidFill>
+                <a:effectLst/>
+                <a:uLnTx/>
+                <a:uFillTx/>
+                <a:latin typeface="Courier New"/>
+                <a:ea typeface="+mn-ea"/>
+                <a:cs typeface="Courier New"/>
+              </a:rPr>
+              <a:t>p.</a:t>
+            </a:r>
+            <a:r>
+              <a:rPr lang="en-CA" spc="-5" dirty="0" err="1">
+                <a:solidFill>
+                  <a:srgbClr val="00FCFF"/>
+                </a:solidFill>
+                <a:latin typeface="Courier New"/>
+                <a:cs typeface="Courier New"/>
+              </a:rPr>
+              <a:t>to_string</a:t>
+            </a:r>
+            <a:r>
+              <a:rPr kumimoji="0" lang="en-CA" sz="1800" b="0" i="0" u="none" strike="noStrike" kern="1200" cap="none" spc="-5" normalizeH="0" baseline="0" noProof="0" dirty="0">
+                <a:ln>
+                  <a:noFill/>
+                </a:ln>
+                <a:solidFill>
+                  <a:srgbClr val="00FCFF"/>
+                </a:solidFill>
+                <a:effectLst/>
+                <a:uLnTx/>
+                <a:uFillTx/>
+                <a:latin typeface="Courier New"/>
+                <a:ea typeface="+mn-ea"/>
+                <a:cs typeface="Courier New"/>
+              </a:rPr>
+              <a:t>()</a:t>
+            </a:r>
+            <a:endParaRPr kumimoji="0" lang="en-CA" sz="1800" b="0" i="0" u="none" strike="noStrike" kern="1200" cap="none" spc="0" normalizeH="0" baseline="0" noProof="0" dirty="0">
+              <a:ln>
+                <a:noFill/>
+              </a:ln>
+              <a:solidFill>
+                <a:srgbClr val="00FCFF"/>
+              </a:solidFill>
+              <a:effectLst/>
+              <a:uLnTx/>
+              <a:uFillTx/>
+              <a:latin typeface="Courier New"/>
+              <a:ea typeface="+mn-ea"/>
+              <a:cs typeface="Courier New"/>
+            </a:endParaRPr>
+          </a:p>
+          <a:p>
+            <a:pPr marL="1765300" marR="0" lvl="0" indent="0" algn="l" defTabSz="914400" rtl="0" eaLnBrk="1" fontAlgn="auto" latinLnBrk="0" hangingPunct="1">
+              <a:lnSpc>
+                <a:spcPct val="100000"/>
+              </a:lnSpc>
+              <a:spcBef>
+                <a:spcPts val="0"/>
+              </a:spcBef>
+              <a:spcAft>
+                <a:spcPts val="0"/>
+              </a:spcAft>
+              <a:buClrTx/>
+              <a:buSzTx/>
+              <a:buFontTx/>
+              <a:buNone/>
+              <a:tabLst/>
+              <a:defRPr/>
+            </a:pPr>
+            <a:r>
+              <a:rPr kumimoji="0" lang="en-CA" sz="1800" b="1" i="0" u="none" strike="noStrike" kern="1200" cap="none" spc="-5" normalizeH="0" baseline="0" noProof="0" dirty="0">
+                <a:ln>
+                  <a:noFill/>
+                </a:ln>
+                <a:solidFill>
+                  <a:srgbClr val="00FCFF"/>
+                </a:solidFill>
+                <a:effectLst/>
+                <a:uLnTx/>
+                <a:uFillTx/>
+                <a:latin typeface="Courier New"/>
+                <a:ea typeface="+mn-ea"/>
+                <a:cs typeface="Courier New"/>
+              </a:rPr>
+              <a:t>'(3,4)'</a:t>
+            </a:r>
+            <a:endParaRPr kumimoji="0" lang="en-CA" sz="1800" b="0" i="0" u="none" strike="noStrike" kern="1200" cap="none" spc="0" normalizeH="0" baseline="0" noProof="0" dirty="0">
+              <a:ln>
+                <a:noFill/>
+              </a:ln>
+              <a:solidFill>
+                <a:srgbClr val="00FCFF"/>
+              </a:solidFill>
+              <a:effectLst/>
+              <a:uLnTx/>
+              <a:uFillTx/>
+              <a:latin typeface="Courier New"/>
+              <a:ea typeface="+mn-ea"/>
+              <a:cs typeface="Courier New"/>
+            </a:endParaRPr>
+          </a:p>
+          <a:p>
+            <a:pPr marL="1765300" marR="0" lvl="0" indent="0" algn="l" defTabSz="914400" rtl="0" eaLnBrk="1" fontAlgn="auto" latinLnBrk="0" hangingPunct="1">
+              <a:lnSpc>
+                <a:spcPct val="100000"/>
+              </a:lnSpc>
+              <a:spcBef>
+                <a:spcPts val="0"/>
+              </a:spcBef>
+              <a:spcAft>
+                <a:spcPts val="0"/>
+              </a:spcAft>
+              <a:buClrTx/>
+              <a:buSzTx/>
+              <a:buFontTx/>
+              <a:buNone/>
+              <a:tabLst/>
+              <a:defRPr/>
+            </a:pPr>
+            <a:r>
+              <a:rPr kumimoji="0" lang="en-CA" sz="1800" b="0" i="0" u="none" strike="noStrike" kern="1200" cap="none" spc="-5" normalizeH="0" baseline="0" noProof="0" dirty="0">
+                <a:ln>
+                  <a:noFill/>
+                </a:ln>
+                <a:solidFill>
+                  <a:srgbClr val="00FCFF"/>
+                </a:solidFill>
+                <a:effectLst/>
+                <a:uLnTx/>
+                <a:uFillTx/>
+                <a:latin typeface="Courier New"/>
+                <a:ea typeface="+mn-ea"/>
+                <a:cs typeface="Courier New"/>
+              </a:rPr>
+              <a:t>&gt;&gt;</a:t>
+            </a:r>
+            <a:r>
+              <a:rPr kumimoji="0" lang="en-CA" sz="1800" b="0" i="0" u="none" strike="noStrike" kern="1200" cap="none" spc="0" normalizeH="0" baseline="0" noProof="0" dirty="0">
+                <a:ln>
+                  <a:noFill/>
+                </a:ln>
+                <a:solidFill>
+                  <a:srgbClr val="00FCFF"/>
+                </a:solidFill>
+                <a:effectLst/>
+                <a:uLnTx/>
+                <a:uFillTx/>
+                <a:latin typeface="Courier New"/>
+                <a:ea typeface="+mn-ea"/>
+                <a:cs typeface="Courier New"/>
+              </a:rPr>
+              <a:t>&gt;</a:t>
+            </a:r>
+            <a:r>
+              <a:rPr kumimoji="0" lang="en-CA" sz="1800" b="0" i="0" u="none" strike="noStrike" kern="1200" cap="none" spc="-5" normalizeH="0" baseline="0" noProof="0" dirty="0">
+                <a:ln>
+                  <a:noFill/>
+                </a:ln>
+                <a:solidFill>
+                  <a:srgbClr val="00FCFF"/>
+                </a:solidFill>
+                <a:effectLst/>
+                <a:uLnTx/>
+                <a:uFillTx/>
+                <a:latin typeface="Courier New"/>
+                <a:ea typeface="+mn-ea"/>
+                <a:cs typeface="Courier New"/>
+              </a:rPr>
+              <a:t> </a:t>
+            </a:r>
+            <a:r>
+              <a:rPr kumimoji="0" lang="en-CA" sz="1800" b="0" i="0" u="none" strike="noStrike" kern="1200" cap="none" spc="0" normalizeH="0" baseline="0" noProof="0" dirty="0">
+                <a:ln>
+                  <a:noFill/>
+                </a:ln>
+                <a:solidFill>
+                  <a:srgbClr val="00FCFF"/>
+                </a:solidFill>
+                <a:effectLst/>
+                <a:uLnTx/>
+                <a:uFillTx/>
+                <a:latin typeface="Courier New"/>
+                <a:ea typeface="+mn-ea"/>
+                <a:cs typeface="Courier New"/>
+              </a:rPr>
+              <a:t>r =</a:t>
+            </a:r>
+            <a:r>
+              <a:rPr kumimoji="0" lang="en-CA" sz="1800" b="0" i="0" u="none" strike="noStrike" kern="1200" cap="none" spc="-5" normalizeH="0" baseline="0" noProof="0" dirty="0">
+                <a:ln>
+                  <a:noFill/>
+                </a:ln>
+                <a:solidFill>
+                  <a:srgbClr val="00FCFF"/>
+                </a:solidFill>
+                <a:effectLst/>
+                <a:uLnTx/>
+                <a:uFillTx/>
+                <a:latin typeface="Courier New"/>
+                <a:ea typeface="+mn-ea"/>
+                <a:cs typeface="Courier New"/>
+              </a:rPr>
+              <a:t> </a:t>
+            </a:r>
+            <a:r>
+              <a:rPr kumimoji="0" lang="en-CA" sz="1800" b="0" i="0" u="none" strike="noStrike" kern="1200" cap="none" spc="-5" normalizeH="0" baseline="0" noProof="0" dirty="0" err="1">
+                <a:ln>
+                  <a:noFill/>
+                </a:ln>
+                <a:solidFill>
+                  <a:srgbClr val="00FCFF"/>
+                </a:solidFill>
+                <a:effectLst/>
+                <a:uLnTx/>
+                <a:uFillTx/>
+                <a:latin typeface="Courier New"/>
+                <a:ea typeface="+mn-ea"/>
+                <a:cs typeface="Courier New"/>
+              </a:rPr>
+              <a:t>p.halfway</a:t>
+            </a:r>
+            <a:r>
+              <a:rPr kumimoji="0" lang="en-CA" sz="1800" b="0" i="0" u="none" strike="noStrike" kern="1200" cap="none" spc="-5" normalizeH="0" baseline="0" noProof="0" dirty="0">
+                <a:ln>
+                  <a:noFill/>
+                </a:ln>
+                <a:solidFill>
+                  <a:srgbClr val="00FCFF"/>
+                </a:solidFill>
+                <a:effectLst/>
+                <a:uLnTx/>
+                <a:uFillTx/>
+                <a:latin typeface="Courier New"/>
+                <a:ea typeface="+mn-ea"/>
+                <a:cs typeface="Courier New"/>
+              </a:rPr>
+              <a:t>(Point(5,12))</a:t>
+            </a:r>
+            <a:endParaRPr kumimoji="0" lang="en-CA" sz="1800" b="0" i="0" u="none" strike="noStrike" kern="1200" cap="none" spc="0" normalizeH="0" baseline="0" noProof="0" dirty="0">
+              <a:ln>
+                <a:noFill/>
+              </a:ln>
+              <a:solidFill>
+                <a:srgbClr val="00FCFF"/>
+              </a:solidFill>
+              <a:effectLst/>
+              <a:uLnTx/>
+              <a:uFillTx/>
+              <a:latin typeface="Courier New"/>
+              <a:ea typeface="+mn-ea"/>
+              <a:cs typeface="Courier New"/>
+            </a:endParaRPr>
+          </a:p>
+          <a:p>
+            <a:pPr marL="1765300" marR="0" lvl="0" indent="0" algn="l" defTabSz="914400" rtl="0" eaLnBrk="1" fontAlgn="auto" latinLnBrk="0" hangingPunct="1">
+              <a:lnSpc>
+                <a:spcPct val="100000"/>
+              </a:lnSpc>
+              <a:spcBef>
+                <a:spcPts val="0"/>
+              </a:spcBef>
+              <a:spcAft>
+                <a:spcPts val="0"/>
+              </a:spcAft>
+              <a:buClrTx/>
+              <a:buSzTx/>
+              <a:buFontTx/>
+              <a:buNone/>
+              <a:tabLst/>
+              <a:defRPr/>
+            </a:pPr>
+            <a:r>
+              <a:rPr kumimoji="0" lang="en-CA" sz="1800" b="0" i="0" u="none" strike="noStrike" kern="1200" cap="none" spc="-5" normalizeH="0" baseline="0" noProof="0" dirty="0">
+                <a:ln>
+                  <a:noFill/>
+                </a:ln>
+                <a:solidFill>
+                  <a:srgbClr val="00FCFF"/>
+                </a:solidFill>
+                <a:effectLst/>
+                <a:uLnTx/>
+                <a:uFillTx/>
+                <a:latin typeface="Courier New"/>
+                <a:ea typeface="+mn-ea"/>
+                <a:cs typeface="Courier New"/>
+              </a:rPr>
+              <a:t>&gt;&gt;</a:t>
+            </a:r>
+            <a:r>
+              <a:rPr kumimoji="0" lang="en-CA" sz="1800" b="0" i="0" u="none" strike="noStrike" kern="1200" cap="none" spc="0" normalizeH="0" baseline="0" noProof="0" dirty="0">
+                <a:ln>
+                  <a:noFill/>
+                </a:ln>
+                <a:solidFill>
+                  <a:srgbClr val="00FCFF"/>
+                </a:solidFill>
+                <a:effectLst/>
+                <a:uLnTx/>
+                <a:uFillTx/>
+                <a:latin typeface="Courier New"/>
+                <a:ea typeface="+mn-ea"/>
+                <a:cs typeface="Courier New"/>
+              </a:rPr>
+              <a:t>&gt; </a:t>
+            </a:r>
+            <a:r>
+              <a:rPr kumimoji="0" lang="en-CA" sz="1800" b="0" i="0" u="none" strike="noStrike" kern="1200" cap="none" spc="-5" normalizeH="0" baseline="0" noProof="0" dirty="0" err="1">
+                <a:ln>
+                  <a:noFill/>
+                </a:ln>
+                <a:solidFill>
+                  <a:srgbClr val="00FCFF"/>
+                </a:solidFill>
+                <a:effectLst/>
+                <a:uLnTx/>
+                <a:uFillTx/>
+                <a:latin typeface="Courier New"/>
+                <a:ea typeface="+mn-ea"/>
+                <a:cs typeface="Courier New"/>
+              </a:rPr>
+              <a:t>r.to_string</a:t>
+            </a:r>
+            <a:r>
+              <a:rPr lang="en-CA" sz="1800" spc="-5" dirty="0">
+                <a:solidFill>
+                  <a:srgbClr val="00FCFF"/>
+                </a:solidFill>
+                <a:latin typeface="Courier New"/>
+                <a:cs typeface="Courier New"/>
+              </a:rPr>
+              <a:t>()</a:t>
+            </a:r>
+            <a:endParaRPr kumimoji="0" lang="en-CA" sz="1800" b="0" i="0" u="none" strike="noStrike" kern="1200" cap="none" spc="0" normalizeH="0" baseline="0" noProof="0" dirty="0">
+              <a:ln>
+                <a:noFill/>
+              </a:ln>
+              <a:solidFill>
+                <a:srgbClr val="00FCFF"/>
+              </a:solidFill>
+              <a:effectLst/>
+              <a:uLnTx/>
+              <a:uFillTx/>
+              <a:latin typeface="Courier New"/>
+              <a:ea typeface="+mn-ea"/>
+              <a:cs typeface="Courier New"/>
+            </a:endParaRPr>
+          </a:p>
+          <a:p>
+            <a:pPr marL="1765300" marR="0" lvl="0" indent="0" algn="l" defTabSz="914400" rtl="0" eaLnBrk="1" fontAlgn="auto" latinLnBrk="0" hangingPunct="1">
+              <a:lnSpc>
+                <a:spcPct val="100000"/>
+              </a:lnSpc>
+              <a:spcBef>
+                <a:spcPts val="0"/>
+              </a:spcBef>
+              <a:spcAft>
+                <a:spcPts val="0"/>
+              </a:spcAft>
+              <a:buClrTx/>
+              <a:buSzTx/>
+              <a:buFontTx/>
+              <a:buNone/>
+              <a:tabLst/>
+              <a:defRPr/>
+            </a:pPr>
+            <a:r>
+              <a:rPr kumimoji="0" lang="en-CA" sz="1800" b="1" i="0" u="none" strike="noStrike" kern="1200" cap="none" spc="-5" normalizeH="0" baseline="0" noProof="0" dirty="0">
+                <a:ln>
+                  <a:noFill/>
+                </a:ln>
+                <a:solidFill>
+                  <a:srgbClr val="00FCFF"/>
+                </a:solidFill>
+                <a:effectLst/>
+                <a:uLnTx/>
+                <a:uFillTx/>
+                <a:latin typeface="Courier New"/>
+                <a:ea typeface="+mn-ea"/>
+                <a:cs typeface="Courier New"/>
+              </a:rPr>
+              <a:t>'(4,8)'</a:t>
+            </a:r>
+            <a:endParaRPr kumimoji="0" lang="en-CA" sz="1800" b="0" i="0" u="none" strike="noStrike" kern="1200" cap="none" spc="0" normalizeH="0" baseline="0" noProof="0" dirty="0">
+              <a:ln>
+                <a:noFill/>
+              </a:ln>
+              <a:solidFill>
+                <a:srgbClr val="00FCFF"/>
+              </a:solidFill>
+              <a:effectLst/>
+              <a:uLnTx/>
+              <a:uFillTx/>
+              <a:latin typeface="Courier New"/>
+              <a:ea typeface="+mn-ea"/>
+              <a:cs typeface="Courier New"/>
+            </a:endParaRPr>
+          </a:p>
+        </p:txBody>
+      </p:sp>
+    </p:spTree>
+    <p:extLst>
+      <p:ext uri="{BB962C8B-B14F-4D97-AF65-F5344CB8AC3E}">
+        <p14:creationId xmlns:p14="http://schemas.microsoft.com/office/powerpoint/2010/main" val="959801457"/>
+      </p:ext>
+    </p:extLst>
+  </p:cSld>
+  <p:clrMapOvr>
+    <a:masterClrMapping/>
+  </p:clrMapOvr>
+  <p:timing>
+    <p:tnLst>
+      <p:par>
+        <p:cTn id="1" dur="indefinite" restart="never" nodeType="tmRoot">
+          <p:childTnLst>
+            <p:seq concurrent="1" nextAc="seek">
+              <p:cTn id="2" dur="indefinite" nodeType="mainSeq">
+                <p:childTnLst>
+                  <p:par>
+                    <p:cTn id="3" fill="hold">
+                      <p:stCondLst>
+                        <p:cond delay="indefinite"/>
+                      </p:stCondLst>
+                      <p:childTnLst>
+                        <p:par>
+                          <p:cTn id="4" fill="hold">
+                            <p:stCondLst>
+                              <p:cond delay="0"/>
+                            </p:stCondLst>
+                            <p:childTnLst>
+                              <p:par>
+                                <p:cTn id="5" presetID="1" presetClass="entr" presetSubtype="0" fill="hold" grpId="0" nodeType="clickEffect">
+                                  <p:stCondLst>
+                                    <p:cond delay="0"/>
+                                  </p:stCondLst>
+                                  <p:childTnLst>
+                                    <p:set>
+                                      <p:cBhvr>
+                                        <p:cTn id="6" dur="1" fill="hold">
+                                          <p:stCondLst>
+                                            <p:cond delay="0"/>
+                                          </p:stCondLst>
+                                        </p:cTn>
+                                        <p:tgtEl>
+                                          <p:spTgt spid="7"/>
+                                        </p:tgtEl>
+                                        <p:attrNameLst>
+                                          <p:attrName>style.visibility</p:attrName>
+                                        </p:attrNameLst>
+                                      </p:cBhvr>
+                                      <p:to>
+                                        <p:strVal val="visible"/>
+                                      </p:to>
+                                    </p:set>
+                                  </p:childTnLst>
+                                </p:cTn>
+                              </p:par>
+                            </p:childTnLst>
+                          </p:cTn>
+                        </p:par>
+                      </p:childTnLst>
+                    </p:cTn>
+                  </p:par>
+                </p:childTnLst>
+              </p:cTn>
+              <p:prevCondLst>
+                <p:cond evt="onPrev" delay="0">
+                  <p:tgtEl>
+                    <p:sldTgt/>
+                  </p:tgtEl>
+                </p:cond>
+              </p:prevCondLst>
+              <p:nextCondLst>
+                <p:cond evt="onNext" delay="0">
+                  <p:tgtEl>
+                    <p:sldTgt/>
+                  </p:tgtEl>
+                </p:cond>
+              </p:nextCondLst>
+            </p:seq>
+          </p:childTnLst>
+        </p:cTn>
+      </p:par>
+    </p:tnLst>
+    <p:bldLst>
+      <p:bldP spid="7" grpId="0"/>
+    </p:bldLst>
   </p:timing>
 </p:sld>
 </file>
